--- a/applications/govtech/documents/govtech_ppt.pptx
+++ b/applications/govtech/documents/govtech_ppt.pptx
@@ -3107,7 +3107,6 @@
         </p:nvPicPr>
         <p:blipFill>
           <a:blip r:embed="rId2"/>
-          <a:srcRect l="33" r="33"/>
           <a:stretch>
             <a:fillRect/>
           </a:stretch>
@@ -3130,8 +3129,8 @@
         </p:nvSpPr>
         <p:spPr>
           <a:xfrm>
-            <a:off x="0" y="3474720"/>
-            <a:ext cx="12191695" cy="3383280"/>
+            <a:off x="0" y="3657600"/>
+            <a:ext cx="12191695" cy="3200400"/>
           </a:xfrm>
           <a:prstGeom prst="rect">
             <a:avLst/>
@@ -3142,7 +3141,6 @@
           <a:ln>
             <a:noFill/>
           </a:ln>
-          <a:effectLst/>
         </p:spPr>
         <p:style>
           <a:lnRef idx="1">
@@ -3174,7 +3172,7 @@
         </p:nvSpPr>
         <p:spPr>
           <a:xfrm>
-            <a:off x="594360" y="3749040"/>
+            <a:off x="548640" y="3931920"/>
             <a:ext cx="10972800" cy="320040"/>
           </a:xfrm>
           <a:prstGeom prst="rect">
@@ -3183,16 +3181,12 @@
           <a:noFill/>
         </p:spPr>
         <p:txBody>
-          <a:bodyPr wrap="square" anchor="t">
+          <a:bodyPr wrap="square">
             <a:spAutoFit/>
           </a:bodyPr>
           <a:lstStyle/>
           <a:p>
-            <a:pPr algn="l">
-              <a:spcAft>
-                <a:spcPts val="0"/>
-              </a:spcAft>
-            </a:pPr>
+            <a:pPr algn="l"/>
             <a:r>
               <a:rPr sz="1300" b="1" i="0">
                 <a:solidFill>
@@ -3213,8 +3207,8 @@
         </p:nvSpPr>
         <p:spPr>
           <a:xfrm>
-            <a:off x="594360" y="4206240"/>
-            <a:ext cx="10972800" cy="640080"/>
+            <a:off x="548640" y="4389120"/>
+            <a:ext cx="10972800" cy="594360"/>
           </a:xfrm>
           <a:prstGeom prst="rect">
             <a:avLst/>
@@ -3222,24 +3216,20 @@
           <a:noFill/>
         </p:spPr>
         <p:txBody>
-          <a:bodyPr wrap="square" anchor="t">
+          <a:bodyPr wrap="square">
             <a:spAutoFit/>
           </a:bodyPr>
           <a:lstStyle/>
           <a:p>
-            <a:pPr algn="l">
-              <a:spcAft>
-                <a:spcPts val="0"/>
-              </a:spcAft>
-            </a:pPr>
-            <a:r>
-              <a:rPr sz="2600" b="1" i="0">
+            <a:pPr algn="l"/>
+            <a:r>
+              <a:rPr sz="2400" b="1" i="0">
                 <a:solidFill>
                   <a:srgbClr val="FFFFFF"/>
                 </a:solidFill>
                 <a:latin typeface="Calibri"/>
               </a:rPr>
-              <a:t>District Health Intelligence for Government Partners</a:t>
+              <a:t>GovTech Readiness Brief — District Health Intelligence</a:t>
             </a:r>
           </a:p>
         </p:txBody>
@@ -3252,7 +3242,7 @@
         </p:nvSpPr>
         <p:spPr>
           <a:xfrm>
-            <a:off x="594360" y="4983481"/>
+            <a:off x="548640" y="5166360"/>
             <a:ext cx="10972800" cy="365760"/>
           </a:xfrm>
           <a:prstGeom prst="rect">
@@ -3261,57 +3251,14 @@
           <a:noFill/>
         </p:spPr>
         <p:txBody>
-          <a:bodyPr wrap="square" anchor="t">
+          <a:bodyPr wrap="square">
             <a:spAutoFit/>
           </a:bodyPr>
           <a:lstStyle/>
           <a:p>
-            <a:pPr algn="l">
-              <a:spcAft>
-                <a:spcPts val="0"/>
-              </a:spcAft>
-            </a:pPr>
-            <a:r>
-              <a:rPr sz="1500" b="0" i="1">
-                <a:solidFill>
-                  <a:srgbClr val="F2C79B"/>
-                </a:solidFill>
-                <a:latin typeface="Calibri"/>
-              </a:rPr>
-              <a:t>Watching for health / Africa challenges — ready proof-of-concept partner</a:t>
-            </a:r>
-          </a:p>
-        </p:txBody>
-      </p:sp>
-      <p:sp>
-        <p:nvSpPr>
-          <p:cNvPr id="7" name="TextBox 6"/>
-          <p:cNvSpPr txBox="1"/>
-          <p:nvPr/>
-        </p:nvSpPr>
-        <p:spPr>
-          <a:xfrm>
-            <a:off x="594360" y="5532120"/>
-            <a:ext cx="10972800" cy="274320"/>
-          </a:xfrm>
-          <a:prstGeom prst="rect">
-            <a:avLst/>
-          </a:prstGeom>
-          <a:noFill/>
-        </p:spPr>
-        <p:txBody>
-          <a:bodyPr wrap="square" anchor="t">
-            <a:spAutoFit/>
-          </a:bodyPr>
-          <a:lstStyle/>
-          <a:p>
-            <a:pPr algn="l">
-              <a:spcAft>
-                <a:spcPts val="0"/>
-              </a:spcAft>
-            </a:pPr>
-            <a:r>
-              <a:rPr sz="1300" b="1" i="0">
+            <a:pPr algn="l"/>
+            <a:r>
+              <a:rPr sz="1400" b="1" i="0">
                 <a:solidFill>
                   <a:srgbClr val="FFFFFF"/>
                 </a:solidFill>
@@ -3324,14 +3271,14 @@
       </p:sp>
       <p:sp>
         <p:nvSpPr>
-          <p:cNvPr id="8" name="TextBox 7"/>
+          <p:cNvPr id="7" name="TextBox 6"/>
           <p:cNvSpPr txBox="1"/>
           <p:nvPr/>
         </p:nvSpPr>
         <p:spPr>
           <a:xfrm>
-            <a:off x="594360" y="5989320"/>
-            <a:ext cx="10972800" cy="365760"/>
+            <a:off x="548640" y="5760720"/>
+            <a:ext cx="10972800" cy="320040"/>
           </a:xfrm>
           <a:prstGeom prst="rect">
             <a:avLst/>
@@ -3339,24 +3286,20 @@
           <a:noFill/>
         </p:spPr>
         <p:txBody>
-          <a:bodyPr wrap="square" anchor="t">
+          <a:bodyPr wrap="square">
             <a:spAutoFit/>
           </a:bodyPr>
           <a:lstStyle/>
           <a:p>
-            <a:pPr algn="l">
-              <a:spcAft>
-                <a:spcPts val="0"/>
-              </a:spcAft>
-            </a:pPr>
-            <a:r>
-              <a:rPr sz="1200" b="0" i="0">
+            <a:pPr algn="l"/>
+            <a:r>
+              <a:rPr sz="1100" b="0" i="0">
                 <a:solidFill>
                   <a:srgbClr val="D0E8E8"/>
                 </a:solidFill>
                 <a:latin typeface="Calibri"/>
               </a:rPr>
-              <a:t>Shortlist FairBanks when health or Africa digital-government challenges open; engage on relevant PoCs.</a:t>
+              <a:t>Challenge deadlines vary — we submit only for health / Africa-aligned use cases</a:t>
             </a:r>
           </a:p>
         </p:txBody>
@@ -3389,7 +3332,6 @@
         </p:nvPicPr>
         <p:blipFill>
           <a:blip r:embed="rId2"/>
-          <a:srcRect t="7796" b="7796"/>
           <a:stretch>
             <a:fillRect/>
           </a:stretch>
@@ -3412,8 +3354,8 @@
         </p:nvSpPr>
         <p:spPr>
           <a:xfrm>
-            <a:off x="0" y="3657600"/>
-            <a:ext cx="12191695" cy="3200400"/>
+            <a:off x="0" y="4297680"/>
+            <a:ext cx="12191695" cy="2560320"/>
           </a:xfrm>
           <a:prstGeom prst="rect">
             <a:avLst/>
@@ -3424,7 +3366,6 @@
           <a:ln>
             <a:noFill/>
           </a:ln>
-          <a:effectLst/>
         </p:spPr>
         <p:style>
           <a:lnRef idx="1">
@@ -3456,8 +3397,8 @@
         </p:nvSpPr>
         <p:spPr>
           <a:xfrm>
-            <a:off x="594360" y="3931920"/>
-            <a:ext cx="10972800" cy="274320"/>
+            <a:off x="548640" y="4663440"/>
+            <a:ext cx="10972800" cy="502920"/>
           </a:xfrm>
           <a:prstGeom prst="rect">
             <a:avLst/>
@@ -3465,24 +3406,20 @@
           <a:noFill/>
         </p:spPr>
         <p:txBody>
-          <a:bodyPr wrap="square" anchor="t">
+          <a:bodyPr wrap="square">
             <a:spAutoFit/>
           </a:bodyPr>
           <a:lstStyle/>
           <a:p>
-            <a:pPr algn="l">
-              <a:spcAft>
-                <a:spcPts val="0"/>
-              </a:spcAft>
-            </a:pPr>
-            <a:r>
-              <a:rPr sz="1300" b="1" i="0">
-                <a:solidFill>
-                  <a:srgbClr val="14A3A3"/>
+            <a:pPr algn="l"/>
+            <a:r>
+              <a:rPr sz="2400" b="1" i="0">
+                <a:solidFill>
+                  <a:srgbClr val="FFFFFF"/>
                 </a:solidFill>
                 <a:latin typeface="Calibri"/>
               </a:rPr>
-              <a:t>The ask</a:t>
+              <a:t>Ready when the right health or Africa GovTech challenge opens.</a:t>
             </a:r>
           </a:p>
         </p:txBody>
@@ -3495,8 +3432,8 @@
         </p:nvSpPr>
         <p:spPr>
           <a:xfrm>
-            <a:off x="594360" y="4389120"/>
-            <a:ext cx="10972800" cy="822960"/>
+            <a:off x="548640" y="5486400"/>
+            <a:ext cx="10972800" cy="320040"/>
           </a:xfrm>
           <a:prstGeom prst="rect">
             <a:avLst/>
@@ -3504,94 +3441,12 @@
           <a:noFill/>
         </p:spPr>
         <p:txBody>
-          <a:bodyPr wrap="square" anchor="t">
+          <a:bodyPr wrap="square">
             <a:spAutoFit/>
           </a:bodyPr>
           <a:lstStyle/>
           <a:p>
-            <a:pPr algn="l">
-              <a:spcAft>
-                <a:spcPts val="0"/>
-              </a:spcAft>
-            </a:pPr>
-            <a:r>
-              <a:rPr sz="2200" b="1" i="0">
-                <a:solidFill>
-                  <a:srgbClr val="FFFFFF"/>
-                </a:solidFill>
-                <a:latin typeface="Calibri"/>
-              </a:rPr>
-              <a:t>Shortlist FairBanks when health or Africa digital-government challenges open; engage on relevant PoCs.</a:t>
-            </a:r>
-          </a:p>
-        </p:txBody>
-      </p:sp>
-      <p:sp>
-        <p:nvSpPr>
-          <p:cNvPr id="6" name="TextBox 5"/>
-          <p:cNvSpPr txBox="1"/>
-          <p:nvPr/>
-        </p:nvSpPr>
-        <p:spPr>
-          <a:xfrm>
-            <a:off x="594360" y="5394960"/>
-            <a:ext cx="10972800" cy="365760"/>
-          </a:xfrm>
-          <a:prstGeom prst="rect">
-            <a:avLst/>
-          </a:prstGeom>
-          <a:noFill/>
-        </p:spPr>
-        <p:txBody>
-          <a:bodyPr wrap="square" anchor="t">
-            <a:spAutoFit/>
-          </a:bodyPr>
-          <a:lstStyle/>
-          <a:p>
-            <a:pPr algn="l">
-              <a:spcAft>
-                <a:spcPts val="0"/>
-              </a:spcAft>
-            </a:pPr>
-            <a:r>
-              <a:rPr sz="1400" b="0" i="1">
-                <a:solidFill>
-                  <a:srgbClr val="F2C79B"/>
-                </a:solidFill>
-                <a:latin typeface="Calibri"/>
-              </a:rPr>
-              <a:t>Watching for health / Africa challenges — ready proof-of-concept partner</a:t>
-            </a:r>
-          </a:p>
-        </p:txBody>
-      </p:sp>
-      <p:sp>
-        <p:nvSpPr>
-          <p:cNvPr id="7" name="TextBox 6"/>
-          <p:cNvSpPr txBox="1"/>
-          <p:nvPr/>
-        </p:nvSpPr>
-        <p:spPr>
-          <a:xfrm>
-            <a:off x="594360" y="5943600"/>
-            <a:ext cx="10972800" cy="320040"/>
-          </a:xfrm>
-          <a:prstGeom prst="rect">
-            <a:avLst/>
-          </a:prstGeom>
-          <a:noFill/>
-        </p:spPr>
-        <p:txBody>
-          <a:bodyPr wrap="square" anchor="t">
-            <a:spAutoFit/>
-          </a:bodyPr>
-          <a:lstStyle/>
-          <a:p>
-            <a:pPr algn="l">
-              <a:spcAft>
-                <a:spcPts val="0"/>
-              </a:spcAft>
-            </a:pPr>
+            <a:pPr algn="l"/>
             <a:r>
               <a:rPr sz="1400" b="1" i="0">
                 <a:solidFill>
@@ -3631,7 +3486,7 @@
         <p:spPr>
           <a:xfrm>
             <a:off x="0" y="0"/>
-            <a:ext cx="12191695" cy="960120"/>
+            <a:ext cx="12191695" cy="914400"/>
           </a:xfrm>
           <a:prstGeom prst="rect">
             <a:avLst/>
@@ -3642,7 +3497,6 @@
           <a:ln>
             <a:noFill/>
           </a:ln>
-          <a:effectLst/>
         </p:spPr>
         <p:style>
           <a:lnRef idx="1">
@@ -3675,7 +3529,7 @@
         <p:spPr>
           <a:xfrm>
             <a:off x="0" y="0"/>
-            <a:ext cx="164592" cy="960120"/>
+            <a:ext cx="137160" cy="914400"/>
           </a:xfrm>
           <a:prstGeom prst="rect">
             <a:avLst/>
@@ -3686,7 +3540,6 @@
           <a:ln>
             <a:noFill/>
           </a:ln>
-          <a:effectLst/>
         </p:spPr>
         <p:style>
           <a:lnRef idx="1">
@@ -3718,125 +3571,8 @@
         </p:nvSpPr>
         <p:spPr>
           <a:xfrm>
-            <a:off x="457200" y="109728"/>
-            <a:ext cx="10972800" cy="256032"/>
-          </a:xfrm>
-          <a:prstGeom prst="rect">
-            <a:avLst/>
-          </a:prstGeom>
-          <a:noFill/>
-        </p:spPr>
-        <p:txBody>
-          <a:bodyPr wrap="square" anchor="t">
-            <a:spAutoFit/>
-          </a:bodyPr>
-          <a:lstStyle/>
-          <a:p>
-            <a:pPr algn="l">
-              <a:spcAft>
-                <a:spcPts val="0"/>
-              </a:spcAft>
-            </a:pPr>
-            <a:r>
-              <a:rPr sz="1100" b="1" i="0">
-                <a:solidFill>
-                  <a:srgbClr val="C45C26"/>
-                </a:solidFill>
-                <a:latin typeface="Calibri"/>
-              </a:rPr>
-              <a:t>WIN-WIN</a:t>
-            </a:r>
-          </a:p>
-        </p:txBody>
-      </p:sp>
-      <p:sp>
-        <p:nvSpPr>
-          <p:cNvPr id="5" name="TextBox 4"/>
-          <p:cNvSpPr txBox="1"/>
-          <p:nvPr/>
-        </p:nvSpPr>
-        <p:spPr>
-          <a:xfrm>
-            <a:off x="457200" y="384048"/>
-            <a:ext cx="11247120" cy="475488"/>
-          </a:xfrm>
-          <a:prstGeom prst="rect">
-            <a:avLst/>
-          </a:prstGeom>
-          <a:noFill/>
-        </p:spPr>
-        <p:txBody>
-          <a:bodyPr wrap="square" anchor="t">
-            <a:spAutoFit/>
-          </a:bodyPr>
-          <a:lstStyle/>
-          <a:p>
-            <a:pPr algn="l">
-              <a:spcAft>
-                <a:spcPts val="0"/>
-              </a:spcAft>
-            </a:pPr>
-            <a:r>
-              <a:rPr sz="2200" b="1" i="0">
-                <a:solidFill>
-                  <a:srgbClr val="0A1F2E"/>
-                </a:solidFill>
-                <a:latin typeface="Calibri"/>
-              </a:rPr>
-              <a:t>Mutual value for FairBanks and the programme</a:t>
-            </a:r>
-          </a:p>
-        </p:txBody>
-      </p:sp>
-      <p:sp>
-        <p:nvSpPr>
-          <p:cNvPr id="6" name="TextBox 5"/>
-          <p:cNvSpPr txBox="1"/>
-          <p:nvPr/>
-        </p:nvSpPr>
-        <p:spPr>
-          <a:xfrm>
-            <a:off x="457200" y="1143000"/>
-            <a:ext cx="5486400" cy="320040"/>
-          </a:xfrm>
-          <a:prstGeom prst="rect">
-            <a:avLst/>
-          </a:prstGeom>
-          <a:noFill/>
-        </p:spPr>
-        <p:txBody>
-          <a:bodyPr wrap="square" anchor="t">
-            <a:spAutoFit/>
-          </a:bodyPr>
-          <a:lstStyle/>
-          <a:p>
-            <a:pPr algn="l">
-              <a:spcAft>
-                <a:spcPts val="0"/>
-              </a:spcAft>
-            </a:pPr>
-            <a:r>
-              <a:rPr sz="1600" b="1" i="0">
-                <a:solidFill>
-                  <a:srgbClr val="0D6E6E"/>
-                </a:solidFill>
-                <a:latin typeface="Calibri"/>
-              </a:rPr>
-              <a:t>What we gain</a:t>
-            </a:r>
-          </a:p>
-        </p:txBody>
-      </p:sp>
-      <p:sp>
-        <p:nvSpPr>
-          <p:cNvPr id="7" name="TextBox 6"/>
-          <p:cNvSpPr txBox="1"/>
-          <p:nvPr/>
-        </p:nvSpPr>
-        <p:spPr>
-          <a:xfrm>
-            <a:off x="457200" y="1508760"/>
-            <a:ext cx="5486400" cy="4800600"/>
+            <a:off x="411480" y="91440"/>
+            <a:ext cx="10972800" cy="274320"/>
           </a:xfrm>
           <a:prstGeom prst="rect">
             <a:avLst/>
@@ -3849,120 +3585,29 @@
           </a:bodyPr>
           <a:lstStyle/>
           <a:p>
-            <a:pPr>
-              <a:spcAft>
-                <a:spcPts val="800"/>
-              </a:spcAft>
-            </a:pPr>
-            <a:r>
-              <a:rPr sz="1300">
-                <a:solidFill>
-                  <a:srgbClr val="1E2F38"/>
+            <a:pPr algn="l"/>
+            <a:r>
+              <a:rPr sz="1100" b="1" i="0">
+                <a:solidFill>
+                  <a:srgbClr val="C45C26"/>
                 </a:solidFill>
                 <a:latin typeface="Calibri"/>
               </a:rPr>
-              <a:t>•  Access to government PoC pathways and Trust Valley capacity building</a:t>
-            </a:r>
-          </a:p>
-          <a:p>
-            <a:pPr>
-              <a:spcAft>
-                <a:spcPts val="800"/>
-              </a:spcAft>
-            </a:pPr>
-            <a:r>
-              <a:rPr sz="1300">
-                <a:solidFill>
-                  <a:srgbClr val="1E2F38"/>
-                </a:solidFill>
-                <a:latin typeface="Calibri"/>
-              </a:rPr>
-              <a:t>•  Credibility from World Bank / SECO ecosystem visibility</a:t>
-            </a:r>
-          </a:p>
-          <a:p>
-            <a:pPr>
-              <a:spcAft>
-                <a:spcPts val="800"/>
-              </a:spcAft>
-            </a:pPr>
-            <a:r>
-              <a:rPr sz="1300">
-                <a:solidFill>
-                  <a:srgbClr val="1E2F38"/>
-                </a:solidFill>
-                <a:latin typeface="Calibri"/>
-              </a:rPr>
-              <a:t>•  Learning that hardens FCHIP for public-sector deployment</a:t>
-            </a:r>
-          </a:p>
-          <a:p>
-            <a:pPr>
-              <a:spcAft>
-                <a:spcPts val="800"/>
-              </a:spcAft>
-            </a:pPr>
-            <a:r>
-              <a:rPr sz="1300">
-                <a:solidFill>
-                  <a:srgbClr val="1E2F38"/>
-                </a:solidFill>
-                <a:latin typeface="Calibri"/>
-              </a:rPr>
-              <a:t>•  Potential Switzerland bootcamp for selected innovators</a:t>
-            </a:r>
-          </a:p>
-        </p:txBody>
-      </p:sp>
-      <p:sp>
-        <p:nvSpPr>
-          <p:cNvPr id="8" name="TextBox 7"/>
+              <a:t>READINESS BRIEF</a:t>
+            </a:r>
+          </a:p>
+        </p:txBody>
+      </p:sp>
+      <p:sp>
+        <p:nvSpPr>
+          <p:cNvPr id="5" name="TextBox 4"/>
           <p:cNvSpPr txBox="1"/>
           <p:nvPr/>
         </p:nvSpPr>
         <p:spPr>
           <a:xfrm>
-            <a:off x="6309360" y="1143000"/>
-            <a:ext cx="5486400" cy="320040"/>
-          </a:xfrm>
-          <a:prstGeom prst="rect">
-            <a:avLst/>
-          </a:prstGeom>
-          <a:noFill/>
-        </p:spPr>
-        <p:txBody>
-          <a:bodyPr wrap="square" anchor="t">
-            <a:spAutoFit/>
-          </a:bodyPr>
-          <a:lstStyle/>
-          <a:p>
-            <a:pPr algn="l">
-              <a:spcAft>
-                <a:spcPts val="0"/>
-              </a:spcAft>
-            </a:pPr>
-            <a:r>
-              <a:rPr sz="1600" b="1" i="0">
-                <a:solidFill>
-                  <a:srgbClr val="0D6E6E"/>
-                </a:solidFill>
-                <a:latin typeface="Calibri"/>
-              </a:rPr>
-              <a:t>What they gain</a:t>
-            </a:r>
-          </a:p>
-        </p:txBody>
-      </p:sp>
-      <p:sp>
-        <p:nvSpPr>
-          <p:cNvPr id="9" name="TextBox 8"/>
-          <p:cNvSpPr txBox="1"/>
-          <p:nvPr/>
-        </p:nvSpPr>
-        <p:spPr>
-          <a:xfrm>
-            <a:off x="6309360" y="1508760"/>
-            <a:ext cx="5394960" cy="4800600"/>
+            <a:off x="411480" y="384048"/>
+            <a:ext cx="10972800" cy="457200"/>
           </a:xfrm>
           <a:prstGeom prst="rect">
             <a:avLst/>
@@ -3975,81 +3620,90 @@
           </a:bodyPr>
           <a:lstStyle/>
           <a:p>
-            <a:pPr>
-              <a:spcAft>
-                <a:spcPts val="800"/>
-              </a:spcAft>
-            </a:pPr>
-            <a:r>
-              <a:rPr sz="1300">
-                <a:solidFill>
-                  <a:srgbClr val="1E2F38"/>
+            <a:pPr algn="l"/>
+            <a:r>
+              <a:rPr sz="2400" b="1" i="0">
+                <a:solidFill>
+                  <a:srgbClr val="0A1F2E"/>
                 </a:solidFill>
                 <a:latin typeface="Calibri"/>
               </a:rPr>
-              <a:t>•  A vendor that already runs clinic and community operations — not only software</a:t>
-            </a:r>
-          </a:p>
-          <a:p>
-            <a:pPr>
-              <a:spcAft>
-                <a:spcPts val="800"/>
-              </a:spcAft>
-            </a:pPr>
-            <a:r>
-              <a:rPr sz="1300">
-                <a:solidFill>
-                  <a:srgbClr val="1E2F38"/>
+              <a:t>Ready PoC partner — not a blind submitter</a:t>
+            </a:r>
+          </a:p>
+        </p:txBody>
+      </p:sp>
+      <p:sp>
+        <p:nvSpPr>
+          <p:cNvPr id="6" name="TextBox 5"/>
+          <p:cNvSpPr txBox="1"/>
+          <p:nvPr/>
+        </p:nvSpPr>
+        <p:spPr>
+          <a:xfrm>
+            <a:off x="457200" y="1097280"/>
+            <a:ext cx="5669280" cy="5029200"/>
+          </a:xfrm>
+          <a:prstGeom prst="rect">
+            <a:avLst/>
+          </a:prstGeom>
+          <a:noFill/>
+        </p:spPr>
+        <p:txBody>
+          <a:bodyPr wrap="square">
+            <a:spAutoFit/>
+          </a:bodyPr>
+          <a:lstStyle/>
+          <a:p>
+            <a:pPr algn="l"/>
+            <a:r>
+              <a:rPr sz="1600" b="0" i="0">
+                <a:solidFill>
+                  <a:srgbClr val="3A4A54"/>
                 </a:solidFill>
                 <a:latin typeface="Calibri"/>
               </a:rPr>
-              <a:t>•  Health intelligence use cases governments actually need (surveillance, CHW data, dashboards)</a:t>
-            </a:r>
-          </a:p>
-          <a:p>
-            <a:pPr>
-              <a:spcAft>
-                <a:spcPts val="800"/>
-              </a:spcAft>
-            </a:pPr>
-            <a:r>
-              <a:rPr sz="1300">
-                <a:solidFill>
-                  <a:srgbClr val="1E2F38"/>
-                </a:solidFill>
-                <a:latin typeface="Calibri"/>
-              </a:rPr>
-              <a:t>•  African implementer ready for public-sector co-design</a:t>
-            </a:r>
-          </a:p>
-          <a:p>
-            <a:pPr>
-              <a:spcAft>
-                <a:spcPts val="800"/>
-              </a:spcAft>
-            </a:pPr>
-            <a:r>
-              <a:rPr sz="1300">
-                <a:solidFill>
-                  <a:srgbClr val="1E2F38"/>
-                </a:solidFill>
-                <a:latin typeface="Calibri"/>
-              </a:rPr>
-              <a:t>•  Reusable PoC patterns for district health offices</a:t>
-            </a:r>
-          </a:p>
-        </p:txBody>
-      </p:sp>
-      <p:sp>
-        <p:nvSpPr>
-          <p:cNvPr id="10" name="Rectangle 9"/>
+              <a:t>GovTech connects tech firms with government digitalisation needs.
+Capacity building · Switzerland bootcamp · government PoC
+We maintain this pack and submit only when health / Africa challenges match.</a:t>
+            </a:r>
+          </a:p>
+        </p:txBody>
+      </p:sp>
+      <p:pic>
+        <p:nvPicPr>
+          <p:cNvPr id="7" name="Picture 6" descr="dashboard_demo_opt.jpg"/>
+          <p:cNvPicPr>
+            <a:picLocks noChangeAspect="1"/>
+          </p:cNvPicPr>
+          <p:nvPr/>
+        </p:nvPicPr>
+        <p:blipFill>
+          <a:blip r:embed="rId2"/>
+          <a:stretch>
+            <a:fillRect/>
+          </a:stretch>
+        </p:blipFill>
+        <p:spPr>
+          <a:xfrm>
+            <a:off x="6400800" y="1844040"/>
+            <a:ext cx="5303520" cy="3535680"/>
+          </a:xfrm>
+          <a:prstGeom prst="rect">
+            <a:avLst/>
+          </a:prstGeom>
+        </p:spPr>
+      </p:pic>
+      <p:sp>
+        <p:nvSpPr>
+          <p:cNvPr id="8" name="Rectangle 7"/>
           <p:cNvSpPr/>
           <p:nvPr/>
         </p:nvSpPr>
         <p:spPr>
           <a:xfrm>
-            <a:off x="0" y="6565392"/>
-            <a:ext cx="12191695" cy="292608"/>
+            <a:off x="0" y="6583680"/>
+            <a:ext cx="12191695" cy="274320"/>
           </a:xfrm>
           <a:prstGeom prst="rect">
             <a:avLst/>
@@ -4060,7 +3714,6 @@
           <a:ln>
             <a:noFill/>
           </a:ln>
-          <a:effectLst/>
         </p:spPr>
         <p:style>
           <a:lnRef idx="1">
@@ -4086,14 +3739,14 @@
       </p:sp>
       <p:sp>
         <p:nvSpPr>
-          <p:cNvPr id="11" name="TextBox 10"/>
+          <p:cNvPr id="9" name="TextBox 8"/>
           <p:cNvSpPr txBox="1"/>
           <p:nvPr/>
         </p:nvSpPr>
         <p:spPr>
           <a:xfrm>
-            <a:off x="365760" y="6574536"/>
-            <a:ext cx="9144000" cy="274320"/>
+            <a:off x="365760" y="6592824"/>
+            <a:ext cx="9144000" cy="256032"/>
           </a:xfrm>
           <a:prstGeom prst="rect">
             <a:avLst/>
@@ -4101,16 +3754,12 @@
           <a:noFill/>
         </p:spPr>
         <p:txBody>
-          <a:bodyPr wrap="square" anchor="ctr">
+          <a:bodyPr wrap="square">
             <a:spAutoFit/>
           </a:bodyPr>
           <a:lstStyle/>
           <a:p>
-            <a:pPr algn="l">
-              <a:spcAft>
-                <a:spcPts val="0"/>
-              </a:spcAft>
-            </a:pPr>
+            <a:pPr algn="l"/>
             <a:r>
               <a:rPr sz="900" b="0" i="0">
                 <a:solidFill>
@@ -4118,21 +3767,21 @@
                 </a:solidFill>
                 <a:latin typeface="Calibri"/>
               </a:rPr>
-              <a:t>FairBanks FCHIP  |  World Bank GovTech Innovation Challenge   |  Your health, our mission.</a:t>
-            </a:r>
-          </a:p>
-        </p:txBody>
-      </p:sp>
-      <p:sp>
-        <p:nvSpPr>
-          <p:cNvPr id="12" name="TextBox 11"/>
+              <a:t>FairBanks FCHIP | GovTech Readiness | Your health, our mission.</a:t>
+            </a:r>
+          </a:p>
+        </p:txBody>
+      </p:sp>
+      <p:sp>
+        <p:nvSpPr>
+          <p:cNvPr id="10" name="TextBox 9"/>
           <p:cNvSpPr txBox="1"/>
           <p:nvPr/>
         </p:nvSpPr>
         <p:spPr>
           <a:xfrm>
-            <a:off x="11094415" y="6574536"/>
-            <a:ext cx="731520" cy="274320"/>
+            <a:off x="11460175" y="6592824"/>
+            <a:ext cx="457200" cy="256032"/>
           </a:xfrm>
           <a:prstGeom prst="rect">
             <a:avLst/>
@@ -4140,16 +3789,12 @@
           <a:noFill/>
         </p:spPr>
         <p:txBody>
-          <a:bodyPr wrap="square" anchor="ctr">
+          <a:bodyPr wrap="square">
             <a:spAutoFit/>
           </a:bodyPr>
           <a:lstStyle/>
           <a:p>
-            <a:pPr algn="r">
-              <a:spcAft>
-                <a:spcPts val="0"/>
-              </a:spcAft>
-            </a:pPr>
+            <a:pPr algn="r"/>
             <a:r>
               <a:rPr sz="900" b="0" i="0">
                 <a:solidFill>
@@ -4189,7 +3834,7 @@
         <p:spPr>
           <a:xfrm>
             <a:off x="0" y="0"/>
-            <a:ext cx="12191695" cy="960120"/>
+            <a:ext cx="12191695" cy="914400"/>
           </a:xfrm>
           <a:prstGeom prst="rect">
             <a:avLst/>
@@ -4200,7 +3845,6 @@
           <a:ln>
             <a:noFill/>
           </a:ln>
-          <a:effectLst/>
         </p:spPr>
         <p:style>
           <a:lnRef idx="1">
@@ -4233,7 +3877,7 @@
         <p:spPr>
           <a:xfrm>
             <a:off x="0" y="0"/>
-            <a:ext cx="164592" cy="960120"/>
+            <a:ext cx="137160" cy="914400"/>
           </a:xfrm>
           <a:prstGeom prst="rect">
             <a:avLst/>
@@ -4244,7 +3888,6 @@
           <a:ln>
             <a:noFill/>
           </a:ln>
-          <a:effectLst/>
         </p:spPr>
         <p:style>
           <a:lnRef idx="1">
@@ -4276,110 +3919,8 @@
         </p:nvSpPr>
         <p:spPr>
           <a:xfrm>
-            <a:off x="457200" y="109728"/>
-            <a:ext cx="10972800" cy="256032"/>
-          </a:xfrm>
-          <a:prstGeom prst="rect">
-            <a:avLst/>
-          </a:prstGeom>
-          <a:noFill/>
-        </p:spPr>
-        <p:txBody>
-          <a:bodyPr wrap="square" anchor="t">
-            <a:spAutoFit/>
-          </a:bodyPr>
-          <a:lstStyle/>
-          <a:p>
-            <a:pPr algn="l">
-              <a:spcAft>
-                <a:spcPts val="0"/>
-              </a:spcAft>
-            </a:pPr>
-            <a:r>
-              <a:rPr sz="1100" b="1" i="0">
-                <a:solidFill>
-                  <a:srgbClr val="C45C26"/>
-                </a:solidFill>
-                <a:latin typeface="Calibri"/>
-              </a:rPr>
-              <a:t>THE PROBLEM</a:t>
-            </a:r>
-          </a:p>
-        </p:txBody>
-      </p:sp>
-      <p:sp>
-        <p:nvSpPr>
-          <p:cNvPr id="5" name="TextBox 4"/>
-          <p:cNvSpPr txBox="1"/>
-          <p:nvPr/>
-        </p:nvSpPr>
-        <p:spPr>
-          <a:xfrm>
-            <a:off x="457200" y="384048"/>
-            <a:ext cx="11247120" cy="475488"/>
-          </a:xfrm>
-          <a:prstGeom prst="rect">
-            <a:avLst/>
-          </a:prstGeom>
-          <a:noFill/>
-        </p:spPr>
-        <p:txBody>
-          <a:bodyPr wrap="square" anchor="t">
-            <a:spAutoFit/>
-          </a:bodyPr>
-          <a:lstStyle/>
-          <a:p>
-            <a:pPr algn="l">
-              <a:spcAft>
-                <a:spcPts val="0"/>
-              </a:spcAft>
-            </a:pPr>
-            <a:r>
-              <a:rPr sz="2200" b="1" i="0">
-                <a:solidFill>
-                  <a:srgbClr val="0A1F2E"/>
-                </a:solidFill>
-                <a:latin typeface="Calibri"/>
-              </a:rPr>
-              <a:t>Health systems react too late</a:t>
-            </a:r>
-          </a:p>
-        </p:txBody>
-      </p:sp>
-      <p:pic>
-        <p:nvPicPr>
-          <p:cNvPr id="6" name="Picture 5" descr="reactive_clinic_opt.jpg"/>
-          <p:cNvPicPr>
-            <a:picLocks noChangeAspect="1"/>
-          </p:cNvPicPr>
-          <p:nvPr/>
-        </p:nvPicPr>
-        <p:blipFill>
-          <a:blip r:embed="rId2"/>
-          <a:stretch>
-            <a:fillRect/>
-          </a:stretch>
-        </p:blipFill>
-        <p:spPr>
-          <a:xfrm>
-            <a:off x="411480" y="2004691"/>
-            <a:ext cx="5303520" cy="3534417"/>
-          </a:xfrm>
-          <a:prstGeom prst="rect">
-            <a:avLst/>
-          </a:prstGeom>
-        </p:spPr>
-      </p:pic>
-      <p:sp>
-        <p:nvSpPr>
-          <p:cNvPr id="7" name="TextBox 6"/>
-          <p:cNvSpPr txBox="1"/>
-          <p:nvPr/>
-        </p:nvSpPr>
-        <p:spPr>
-          <a:xfrm>
-            <a:off x="6035040" y="1234440"/>
-            <a:ext cx="5669280" cy="5074920"/>
+            <a:off x="411480" y="91440"/>
+            <a:ext cx="10972800" cy="274320"/>
           </a:xfrm>
           <a:prstGeom prst="rect">
             <a:avLst/>
@@ -4392,97 +3933,409 @@
           </a:bodyPr>
           <a:lstStyle/>
           <a:p>
-            <a:pPr>
-              <a:spcAft>
-                <a:spcPts val="800"/>
-              </a:spcAft>
-            </a:pPr>
-            <a:r>
-              <a:rPr sz="1400">
-                <a:solidFill>
-                  <a:srgbClr val="1E2F38"/>
+            <a:pPr algn="l"/>
+            <a:r>
+              <a:rPr sz="1100" b="1" i="0">
+                <a:solidFill>
+                  <a:srgbClr val="C45C26"/>
                 </a:solidFill>
                 <a:latin typeface="Calibri"/>
               </a:rPr>
-              <a:t>•  Care often starts only after people fall sick</a:t>
-            </a:r>
-          </a:p>
-          <a:p>
-            <a:pPr>
-              <a:spcAft>
-                <a:spcPts val="800"/>
-              </a:spcAft>
-            </a:pPr>
-            <a:r>
-              <a:rPr sz="1400">
-                <a:solidFill>
-                  <a:srgbClr val="1E2F38"/>
+              <a:t>CHALLENGE MONITORING</a:t>
+            </a:r>
+          </a:p>
+        </p:txBody>
+      </p:sp>
+      <p:sp>
+        <p:nvSpPr>
+          <p:cNvPr id="5" name="TextBox 4"/>
+          <p:cNvSpPr txBox="1"/>
+          <p:nvPr/>
+        </p:nvSpPr>
+        <p:spPr>
+          <a:xfrm>
+            <a:off x="411480" y="384048"/>
+            <a:ext cx="10972800" cy="457200"/>
+          </a:xfrm>
+          <a:prstGeom prst="rect">
+            <a:avLst/>
+          </a:prstGeom>
+          <a:noFill/>
+        </p:spPr>
+        <p:txBody>
+          <a:bodyPr wrap="square">
+            <a:spAutoFit/>
+          </a:bodyPr>
+          <a:lstStyle/>
+          <a:p>
+            <a:pPr algn="l"/>
+            <a:r>
+              <a:rPr sz="2400" b="1" i="0">
+                <a:solidFill>
+                  <a:srgbClr val="0A1F2E"/>
                 </a:solidFill>
                 <a:latin typeface="Calibri"/>
               </a:rPr>
-              <a:t>•  Community health data sits in paper registers and silos</a:t>
-            </a:r>
-          </a:p>
-          <a:p>
-            <a:pPr>
-              <a:spcAft>
-                <a:spcPts val="800"/>
-              </a:spcAft>
-            </a:pPr>
-            <a:r>
-              <a:rPr sz="1400">
-                <a:solidFill>
-                  <a:srgbClr val="1E2F38"/>
+              <a:t>Weekly scan · match gate · tailored submit</a:t>
+            </a:r>
+          </a:p>
+        </p:txBody>
+      </p:sp>
+      <p:sp>
+        <p:nvSpPr>
+          <p:cNvPr id="6" name="Rectangle 5"/>
+          <p:cNvSpPr/>
+          <p:nvPr/>
+        </p:nvSpPr>
+        <p:spPr>
+          <a:xfrm>
+            <a:off x="457200" y="1143000"/>
+            <a:ext cx="11155680" cy="1097280"/>
+          </a:xfrm>
+          <a:prstGeom prst="rect">
+            <a:avLst/>
+          </a:prstGeom>
+          <a:solidFill>
+            <a:srgbClr val="FFFFFF"/>
+          </a:solidFill>
+          <a:ln>
+            <a:solidFill>
+              <a:srgbClr val="D0DCDC"/>
+            </a:solidFill>
+          </a:ln>
+        </p:spPr>
+        <p:style>
+          <a:lnRef idx="1">
+            <a:schemeClr val="accent1"/>
+          </a:lnRef>
+          <a:fillRef idx="3">
+            <a:schemeClr val="accent1"/>
+          </a:fillRef>
+          <a:effectRef idx="2">
+            <a:schemeClr val="accent1"/>
+          </a:effectRef>
+          <a:fontRef idx="minor">
+            <a:schemeClr val="lt1"/>
+          </a:fontRef>
+        </p:style>
+        <p:txBody>
+          <a:bodyPr rtlCol="0" anchor="ctr"/>
+          <a:lstStyle/>
+          <a:p>
+            <a:pPr algn="ctr"/>
+          </a:p>
+        </p:txBody>
+      </p:sp>
+      <p:sp>
+        <p:nvSpPr>
+          <p:cNvPr id="7" name="TextBox 6"/>
+          <p:cNvSpPr txBox="1"/>
+          <p:nvPr/>
+        </p:nvSpPr>
+        <p:spPr>
+          <a:xfrm>
+            <a:off x="640080" y="1280160"/>
+            <a:ext cx="2286000" cy="320040"/>
+          </a:xfrm>
+          <a:prstGeom prst="rect">
+            <a:avLst/>
+          </a:prstGeom>
+          <a:noFill/>
+        </p:spPr>
+        <p:txBody>
+          <a:bodyPr wrap="square">
+            <a:spAutoFit/>
+          </a:bodyPr>
+          <a:lstStyle/>
+          <a:p>
+            <a:pPr algn="l"/>
+            <a:r>
+              <a:rPr sz="1400" b="1" i="0">
+                <a:solidFill>
+                  <a:srgbClr val="0D6E6E"/>
                 </a:solidFill>
                 <a:latin typeface="Calibri"/>
               </a:rPr>
-              <a:t>•  High-risk pregnancies and NCDs are found too late</a:t>
-            </a:r>
-          </a:p>
-          <a:p>
-            <a:pPr>
-              <a:spcAft>
-                <a:spcPts val="800"/>
-              </a:spcAft>
-            </a:pPr>
-            <a:r>
-              <a:rPr sz="1400">
-                <a:solidFill>
-                  <a:srgbClr val="1E2F38"/>
+              <a:t>Weekly</a:t>
+            </a:r>
+          </a:p>
+        </p:txBody>
+      </p:sp>
+      <p:sp>
+        <p:nvSpPr>
+          <p:cNvPr id="8" name="TextBox 7"/>
+          <p:cNvSpPr txBox="1"/>
+          <p:nvPr/>
+        </p:nvSpPr>
+        <p:spPr>
+          <a:xfrm>
+            <a:off x="3017520" y="1280160"/>
+            <a:ext cx="8229600" cy="822960"/>
+          </a:xfrm>
+          <a:prstGeom prst="rect">
+            <a:avLst/>
+          </a:prstGeom>
+          <a:noFill/>
+        </p:spPr>
+        <p:txBody>
+          <a:bodyPr wrap="square">
+            <a:spAutoFit/>
+          </a:bodyPr>
+          <a:lstStyle/>
+          <a:p>
+            <a:pPr algn="l"/>
+            <a:r>
+              <a:rPr sz="1400" b="0" i="0">
+                <a:solidFill>
+                  <a:srgbClr val="3A4A54"/>
                 </a:solidFill>
                 <a:latin typeface="Calibri"/>
               </a:rPr>
-              <a:t>•  Medicine stock-outs hit hard during disease surges</a:t>
-            </a:r>
-          </a:p>
-          <a:p>
-            <a:pPr>
-              <a:spcAft>
-                <a:spcPts val="800"/>
-              </a:spcAft>
-            </a:pPr>
-            <a:r>
-              <a:rPr sz="1400">
-                <a:solidFill>
-                  <a:srgbClr val="1E2F38"/>
+              <a:t>Scan GovTech challenge pages for health / Africa digital-government calls</a:t>
+            </a:r>
+          </a:p>
+        </p:txBody>
+      </p:sp>
+      <p:sp>
+        <p:nvSpPr>
+          <p:cNvPr id="9" name="Rectangle 8"/>
+          <p:cNvSpPr/>
+          <p:nvPr/>
+        </p:nvSpPr>
+        <p:spPr>
+          <a:xfrm>
+            <a:off x="457200" y="2377440"/>
+            <a:ext cx="11155680" cy="1097280"/>
+          </a:xfrm>
+          <a:prstGeom prst="rect">
+            <a:avLst/>
+          </a:prstGeom>
+          <a:solidFill>
+            <a:srgbClr val="FFFFFF"/>
+          </a:solidFill>
+          <a:ln>
+            <a:solidFill>
+              <a:srgbClr val="D0DCDC"/>
+            </a:solidFill>
+          </a:ln>
+        </p:spPr>
+        <p:style>
+          <a:lnRef idx="1">
+            <a:schemeClr val="accent1"/>
+          </a:lnRef>
+          <a:fillRef idx="3">
+            <a:schemeClr val="accent1"/>
+          </a:fillRef>
+          <a:effectRef idx="2">
+            <a:schemeClr val="accent1"/>
+          </a:effectRef>
+          <a:fontRef idx="minor">
+            <a:schemeClr val="lt1"/>
+          </a:fontRef>
+        </p:style>
+        <p:txBody>
+          <a:bodyPr rtlCol="0" anchor="ctr"/>
+          <a:lstStyle/>
+          <a:p>
+            <a:pPr algn="ctr"/>
+          </a:p>
+        </p:txBody>
+      </p:sp>
+      <p:sp>
+        <p:nvSpPr>
+          <p:cNvPr id="10" name="TextBox 9"/>
+          <p:cNvSpPr txBox="1"/>
+          <p:nvPr/>
+        </p:nvSpPr>
+        <p:spPr>
+          <a:xfrm>
+            <a:off x="640080" y="2514600"/>
+            <a:ext cx="2286000" cy="320040"/>
+          </a:xfrm>
+          <a:prstGeom prst="rect">
+            <a:avLst/>
+          </a:prstGeom>
+          <a:noFill/>
+        </p:spPr>
+        <p:txBody>
+          <a:bodyPr wrap="square">
+            <a:spAutoFit/>
+          </a:bodyPr>
+          <a:lstStyle/>
+          <a:p>
+            <a:pPr algn="l"/>
+            <a:r>
+              <a:rPr sz="1400" b="1" i="0">
+                <a:solidFill>
+                  <a:srgbClr val="0D6E6E"/>
                 </a:solidFill>
                 <a:latin typeface="Calibri"/>
               </a:rPr>
-              <a:t>•  Health shocks push poor families deeper into hardship</a:t>
-            </a:r>
-          </a:p>
-        </p:txBody>
-      </p:sp>
-      <p:sp>
-        <p:nvSpPr>
-          <p:cNvPr id="8" name="Rectangle 7"/>
+              <a:t>Match gate</a:t>
+            </a:r>
+          </a:p>
+        </p:txBody>
+      </p:sp>
+      <p:sp>
+        <p:nvSpPr>
+          <p:cNvPr id="11" name="TextBox 10"/>
+          <p:cNvSpPr txBox="1"/>
+          <p:nvPr/>
+        </p:nvSpPr>
+        <p:spPr>
+          <a:xfrm>
+            <a:off x="3017520" y="2514600"/>
+            <a:ext cx="8229600" cy="822960"/>
+          </a:xfrm>
+          <a:prstGeom prst="rect">
+            <a:avLst/>
+          </a:prstGeom>
+          <a:noFill/>
+        </p:spPr>
+        <p:txBody>
+          <a:bodyPr wrap="square">
+            <a:spAutoFit/>
+          </a:bodyPr>
+          <a:lstStyle/>
+          <a:p>
+            <a:pPr algn="l"/>
+            <a:r>
+              <a:rPr sz="1400" b="0" i="0">
+                <a:solidFill>
+                  <a:srgbClr val="3A4A54"/>
+                </a:solidFill>
+                <a:latin typeface="Calibri"/>
+              </a:rPr>
+              <a:t>Submit only when use case aligns with district health intelligence PoC</a:t>
+            </a:r>
+          </a:p>
+        </p:txBody>
+      </p:sp>
+      <p:sp>
+        <p:nvSpPr>
+          <p:cNvPr id="12" name="Rectangle 11"/>
           <p:cNvSpPr/>
           <p:nvPr/>
         </p:nvSpPr>
         <p:spPr>
           <a:xfrm>
-            <a:off x="0" y="6565392"/>
-            <a:ext cx="12191695" cy="292608"/>
+            <a:off x="457200" y="3611880"/>
+            <a:ext cx="11155680" cy="1097280"/>
+          </a:xfrm>
+          <a:prstGeom prst="rect">
+            <a:avLst/>
+          </a:prstGeom>
+          <a:solidFill>
+            <a:srgbClr val="FFFFFF"/>
+          </a:solidFill>
+          <a:ln>
+            <a:solidFill>
+              <a:srgbClr val="D0DCDC"/>
+            </a:solidFill>
+          </a:ln>
+        </p:spPr>
+        <p:style>
+          <a:lnRef idx="1">
+            <a:schemeClr val="accent1"/>
+          </a:lnRef>
+          <a:fillRef idx="3">
+            <a:schemeClr val="accent1"/>
+          </a:fillRef>
+          <a:effectRef idx="2">
+            <a:schemeClr val="accent1"/>
+          </a:effectRef>
+          <a:fontRef idx="minor">
+            <a:schemeClr val="lt1"/>
+          </a:fontRef>
+        </p:style>
+        <p:txBody>
+          <a:bodyPr rtlCol="0" anchor="ctr"/>
+          <a:lstStyle/>
+          <a:p>
+            <a:pPr algn="ctr"/>
+          </a:p>
+        </p:txBody>
+      </p:sp>
+      <p:sp>
+        <p:nvSpPr>
+          <p:cNvPr id="13" name="TextBox 12"/>
+          <p:cNvSpPr txBox="1"/>
+          <p:nvPr/>
+        </p:nvSpPr>
+        <p:spPr>
+          <a:xfrm>
+            <a:off x="640080" y="3749040"/>
+            <a:ext cx="2286000" cy="320040"/>
+          </a:xfrm>
+          <a:prstGeom prst="rect">
+            <a:avLst/>
+          </a:prstGeom>
+          <a:noFill/>
+        </p:spPr>
+        <p:txBody>
+          <a:bodyPr wrap="square">
+            <a:spAutoFit/>
+          </a:bodyPr>
+          <a:lstStyle/>
+          <a:p>
+            <a:pPr algn="l"/>
+            <a:r>
+              <a:rPr sz="1400" b="1" i="0">
+                <a:solidFill>
+                  <a:srgbClr val="0D6E6E"/>
+                </a:solidFill>
+                <a:latin typeface="Calibri"/>
+              </a:rPr>
+              <a:t>If selected</a:t>
+            </a:r>
+          </a:p>
+        </p:txBody>
+      </p:sp>
+      <p:sp>
+        <p:nvSpPr>
+          <p:cNvPr id="14" name="TextBox 13"/>
+          <p:cNvSpPr txBox="1"/>
+          <p:nvPr/>
+        </p:nvSpPr>
+        <p:spPr>
+          <a:xfrm>
+            <a:off x="3017520" y="3749040"/>
+            <a:ext cx="8229600" cy="822960"/>
+          </a:xfrm>
+          <a:prstGeom prst="rect">
+            <a:avLst/>
+          </a:prstGeom>
+          <a:noFill/>
+        </p:spPr>
+        <p:txBody>
+          <a:bodyPr wrap="square">
+            <a:spAutoFit/>
+          </a:bodyPr>
+          <a:lstStyle/>
+          <a:p>
+            <a:pPr algn="l"/>
+            <a:r>
+              <a:rPr sz="1400" b="0" i="0">
+                <a:solidFill>
+                  <a:srgbClr val="3A4A54"/>
+                </a:solidFill>
+                <a:latin typeface="Calibri"/>
+              </a:rPr>
+              <a:t>Attend capacity building / Switzerland bootcamp as offered</a:t>
+            </a:r>
+          </a:p>
+        </p:txBody>
+      </p:sp>
+      <p:sp>
+        <p:nvSpPr>
+          <p:cNvPr id="15" name="Rectangle 14"/>
+          <p:cNvSpPr/>
+          <p:nvPr/>
+        </p:nvSpPr>
+        <p:spPr>
+          <a:xfrm>
+            <a:off x="0" y="6583680"/>
+            <a:ext cx="12191695" cy="274320"/>
           </a:xfrm>
           <a:prstGeom prst="rect">
             <a:avLst/>
@@ -4493,7 +4346,6 @@
           <a:ln>
             <a:noFill/>
           </a:ln>
-          <a:effectLst/>
         </p:spPr>
         <p:style>
           <a:lnRef idx="1">
@@ -4519,14 +4371,14 @@
       </p:sp>
       <p:sp>
         <p:nvSpPr>
-          <p:cNvPr id="9" name="TextBox 8"/>
+          <p:cNvPr id="16" name="TextBox 15"/>
           <p:cNvSpPr txBox="1"/>
           <p:nvPr/>
         </p:nvSpPr>
         <p:spPr>
           <a:xfrm>
-            <a:off x="365760" y="6574536"/>
-            <a:ext cx="9144000" cy="274320"/>
+            <a:off x="365760" y="6592824"/>
+            <a:ext cx="9144000" cy="256032"/>
           </a:xfrm>
           <a:prstGeom prst="rect">
             <a:avLst/>
@@ -4534,16 +4386,12 @@
           <a:noFill/>
         </p:spPr>
         <p:txBody>
-          <a:bodyPr wrap="square" anchor="ctr">
+          <a:bodyPr wrap="square">
             <a:spAutoFit/>
           </a:bodyPr>
           <a:lstStyle/>
           <a:p>
-            <a:pPr algn="l">
-              <a:spcAft>
-                <a:spcPts val="0"/>
-              </a:spcAft>
-            </a:pPr>
+            <a:pPr algn="l"/>
             <a:r>
               <a:rPr sz="900" b="0" i="0">
                 <a:solidFill>
@@ -4551,21 +4399,21 @@
                 </a:solidFill>
                 <a:latin typeface="Calibri"/>
               </a:rPr>
-              <a:t>FairBanks FCHIP  |  World Bank GovTech Innovation Challenge   |  Your health, our mission.</a:t>
-            </a:r>
-          </a:p>
-        </p:txBody>
-      </p:sp>
-      <p:sp>
-        <p:nvSpPr>
-          <p:cNvPr id="10" name="TextBox 9"/>
+              <a:t>FairBanks FCHIP | GovTech Readiness | Your health, our mission.</a:t>
+            </a:r>
+          </a:p>
+        </p:txBody>
+      </p:sp>
+      <p:sp>
+        <p:nvSpPr>
+          <p:cNvPr id="17" name="TextBox 16"/>
           <p:cNvSpPr txBox="1"/>
           <p:nvPr/>
         </p:nvSpPr>
         <p:spPr>
           <a:xfrm>
-            <a:off x="11094415" y="6574536"/>
-            <a:ext cx="731520" cy="274320"/>
+            <a:off x="11460175" y="6592824"/>
+            <a:ext cx="457200" cy="256032"/>
           </a:xfrm>
           <a:prstGeom prst="rect">
             <a:avLst/>
@@ -4573,16 +4421,12 @@
           <a:noFill/>
         </p:spPr>
         <p:txBody>
-          <a:bodyPr wrap="square" anchor="ctr">
+          <a:bodyPr wrap="square">
             <a:spAutoFit/>
           </a:bodyPr>
           <a:lstStyle/>
           <a:p>
-            <a:pPr algn="r">
-              <a:spcAft>
-                <a:spcPts val="0"/>
-              </a:spcAft>
-            </a:pPr>
+            <a:pPr algn="r"/>
             <a:r>
               <a:rPr sz="900" b="0" i="0">
                 <a:solidFill>
@@ -4622,7 +4466,7 @@
         <p:spPr>
           <a:xfrm>
             <a:off x="0" y="0"/>
-            <a:ext cx="12191695" cy="960120"/>
+            <a:ext cx="12191695" cy="914400"/>
           </a:xfrm>
           <a:prstGeom prst="rect">
             <a:avLst/>
@@ -4633,7 +4477,6 @@
           <a:ln>
             <a:noFill/>
           </a:ln>
-          <a:effectLst/>
         </p:spPr>
         <p:style>
           <a:lnRef idx="1">
@@ -4666,7 +4509,7 @@
         <p:spPr>
           <a:xfrm>
             <a:off x="0" y="0"/>
-            <a:ext cx="164592" cy="960120"/>
+            <a:ext cx="137160" cy="914400"/>
           </a:xfrm>
           <a:prstGeom prst="rect">
             <a:avLst/>
@@ -4677,7 +4520,6 @@
           <a:ln>
             <a:noFill/>
           </a:ln>
-          <a:effectLst/>
         </p:spPr>
         <p:style>
           <a:lnRef idx="1">
@@ -4709,110 +4551,8 @@
         </p:nvSpPr>
         <p:spPr>
           <a:xfrm>
-            <a:off x="457200" y="109728"/>
-            <a:ext cx="10972800" cy="256032"/>
-          </a:xfrm>
-          <a:prstGeom prst="rect">
-            <a:avLst/>
-          </a:prstGeom>
-          <a:noFill/>
-        </p:spPr>
-        <p:txBody>
-          <a:bodyPr wrap="square" anchor="t">
-            <a:spAutoFit/>
-          </a:bodyPr>
-          <a:lstStyle/>
-          <a:p>
-            <a:pPr algn="l">
-              <a:spcAft>
-                <a:spcPts val="0"/>
-              </a:spcAft>
-            </a:pPr>
-            <a:r>
-              <a:rPr sz="1100" b="1" i="0">
-                <a:solidFill>
-                  <a:srgbClr val="C45C26"/>
-                </a:solidFill>
-                <a:latin typeface="Calibri"/>
-              </a:rPr>
-              <a:t>THE SOLUTION</a:t>
-            </a:r>
-          </a:p>
-        </p:txBody>
-      </p:sp>
-      <p:sp>
-        <p:nvSpPr>
-          <p:cNvPr id="5" name="TextBox 4"/>
-          <p:cNvSpPr txBox="1"/>
-          <p:nvPr/>
-        </p:nvSpPr>
-        <p:spPr>
-          <a:xfrm>
-            <a:off x="457200" y="384048"/>
-            <a:ext cx="11247120" cy="475488"/>
-          </a:xfrm>
-          <a:prstGeom prst="rect">
-            <a:avLst/>
-          </a:prstGeom>
-          <a:noFill/>
-        </p:spPr>
-        <p:txBody>
-          <a:bodyPr wrap="square" anchor="t">
-            <a:spAutoFit/>
-          </a:bodyPr>
-          <a:lstStyle/>
-          <a:p>
-            <a:pPr algn="l">
-              <a:spcAft>
-                <a:spcPts val="0"/>
-              </a:spcAft>
-            </a:pPr>
-            <a:r>
-              <a:rPr sz="2200" b="1" i="0">
-                <a:solidFill>
-                  <a:srgbClr val="0A1F2E"/>
-                </a:solidFill>
-                <a:latin typeface="Calibri"/>
-              </a:rPr>
-              <a:t>FCHIP — community health intelligence</a:t>
-            </a:r>
-          </a:p>
-        </p:txBody>
-      </p:sp>
-      <p:pic>
-        <p:nvPicPr>
-          <p:cNvPr id="6" name="Picture 5" descr="data_flow_iso_labeled_opt.jpg"/>
-          <p:cNvPicPr>
-            <a:picLocks noChangeAspect="1"/>
-          </p:cNvPicPr>
-          <p:nvPr/>
-        </p:nvPicPr>
-        <p:blipFill>
-          <a:blip r:embed="rId2"/>
-          <a:stretch>
-            <a:fillRect/>
-          </a:stretch>
-        </p:blipFill>
-        <p:spPr>
-          <a:xfrm>
-            <a:off x="365760" y="1639062"/>
-            <a:ext cx="6400800" cy="4265676"/>
-          </a:xfrm>
-          <a:prstGeom prst="rect">
-            <a:avLst/>
-          </a:prstGeom>
-        </p:spPr>
-      </p:pic>
-      <p:sp>
-        <p:nvSpPr>
-          <p:cNvPr id="7" name="TextBox 6"/>
-          <p:cNvSpPr txBox="1"/>
-          <p:nvPr/>
-        </p:nvSpPr>
-        <p:spPr>
-          <a:xfrm>
-            <a:off x="7040880" y="1234440"/>
-            <a:ext cx="4754880" cy="5074920"/>
+            <a:off x="411480" y="91440"/>
+            <a:ext cx="10972800" cy="274320"/>
           </a:xfrm>
           <a:prstGeom prst="rect">
             <a:avLst/>
@@ -4825,81 +4565,101 @@
           </a:bodyPr>
           <a:lstStyle/>
           <a:p>
-            <a:pPr>
-              <a:spcAft>
-                <a:spcPts val="800"/>
-              </a:spcAft>
-            </a:pPr>
-            <a:r>
-              <a:rPr sz="1400">
-                <a:solidFill>
-                  <a:srgbClr val="1E2F38"/>
+            <a:pPr algn="l"/>
+            <a:r>
+              <a:rPr sz="1100" b="1" i="0">
+                <a:solidFill>
+                  <a:srgbClr val="C45C26"/>
                 </a:solidFill>
                 <a:latin typeface="Calibri"/>
               </a:rPr>
-              <a:t>•  CHWs and VHTs capture structured data at household level</a:t>
-            </a:r>
-          </a:p>
-          <a:p>
-            <a:pPr>
-              <a:spcAft>
-                <a:spcPts val="800"/>
-              </a:spcAft>
-            </a:pPr>
-            <a:r>
-              <a:rPr sz="1400">
-                <a:solidFill>
-                  <a:srgbClr val="1E2F38"/>
+              <a:t>HONEST SCOPE</a:t>
+            </a:r>
+          </a:p>
+        </p:txBody>
+      </p:sp>
+      <p:sp>
+        <p:nvSpPr>
+          <p:cNvPr id="5" name="TextBox 4"/>
+          <p:cNvSpPr txBox="1"/>
+          <p:nvPr/>
+        </p:nvSpPr>
+        <p:spPr>
+          <a:xfrm>
+            <a:off x="411480" y="384048"/>
+            <a:ext cx="10972800" cy="457200"/>
+          </a:xfrm>
+          <a:prstGeom prst="rect">
+            <a:avLst/>
+          </a:prstGeom>
+          <a:noFill/>
+        </p:spPr>
+        <p:txBody>
+          <a:bodyPr wrap="square">
+            <a:spAutoFit/>
+          </a:bodyPr>
+          <a:lstStyle/>
+          <a:p>
+            <a:pPr algn="l"/>
+            <a:r>
+              <a:rPr sz="2400" b="1" i="0">
+                <a:solidFill>
+                  <a:srgbClr val="0A1F2E"/>
                 </a:solidFill>
                 <a:latin typeface="Calibri"/>
               </a:rPr>
-              <a:t>•  FCHIP applies AI, ML, and GIS to predict risk early</a:t>
-            </a:r>
-          </a:p>
-          <a:p>
-            <a:pPr>
-              <a:spcAft>
-                <a:spcPts val="800"/>
-              </a:spcAft>
-            </a:pPr>
-            <a:r>
-              <a:rPr sz="1400">
+              <a:t>Moroccan audit challenges are not our target</a:t>
+            </a:r>
+          </a:p>
+        </p:txBody>
+      </p:sp>
+      <p:sp>
+        <p:nvSpPr>
+          <p:cNvPr id="6" name="TextBox 5"/>
+          <p:cNvSpPr txBox="1"/>
+          <p:nvPr/>
+        </p:nvSpPr>
+        <p:spPr>
+          <a:xfrm>
+            <a:off x="457200" y="1097280"/>
+            <a:ext cx="10972800" cy="5029200"/>
+          </a:xfrm>
+          <a:prstGeom prst="rect">
+            <a:avLst/>
+          </a:prstGeom>
+          <a:noFill/>
+        </p:spPr>
+        <p:txBody>
+          <a:bodyPr wrap="square">
+            <a:spAutoFit/>
+          </a:bodyPr>
+          <a:lstStyle/>
+          <a:p>
+            <a:pPr algn="l"/>
+            <a:r>
+              <a:rPr sz="1800" b="0" i="0">
                 <a:solidFill>
                   <a:srgbClr val="1E2F38"/>
                 </a:solidFill>
                 <a:latin typeface="Calibri"/>
               </a:rPr>
-              <a:t>•  Alerts reach clinics, districts, and partners in time to act</a:t>
-            </a:r>
-          </a:p>
-          <a:p>
-            <a:pPr>
-              <a:spcAft>
-                <a:spcPts val="800"/>
-              </a:spcAft>
-            </a:pPr>
-            <a:r>
-              <a:rPr sz="1400">
-                <a:solidFill>
-                  <a:srgbClr val="1E2F38"/>
-                </a:solidFill>
-                <a:latin typeface="Calibri"/>
-              </a:rPr>
-              <a:t>•  Built on a live medical centre and community programmes</a:t>
-            </a:r>
-          </a:p>
-        </p:txBody>
-      </p:sp>
-      <p:sp>
-        <p:nvSpPr>
-          <p:cNvPr id="8" name="Rectangle 7"/>
+              <a:t>Current open public-finance audit use cases are outside FairBanks' domain.
+We will not stretch a community health story to fit unrelated software requirements.
+Our lane: district health intelligence from a live clinic + CHW operator.</a:t>
+            </a:r>
+          </a:p>
+        </p:txBody>
+      </p:sp>
+      <p:sp>
+        <p:nvSpPr>
+          <p:cNvPr id="7" name="Rectangle 6"/>
           <p:cNvSpPr/>
           <p:nvPr/>
         </p:nvSpPr>
         <p:spPr>
           <a:xfrm>
-            <a:off x="0" y="6565392"/>
-            <a:ext cx="12191695" cy="292608"/>
+            <a:off x="0" y="6583680"/>
+            <a:ext cx="12191695" cy="274320"/>
           </a:xfrm>
           <a:prstGeom prst="rect">
             <a:avLst/>
@@ -4910,7 +4670,6 @@
           <a:ln>
             <a:noFill/>
           </a:ln>
-          <a:effectLst/>
         </p:spPr>
         <p:style>
           <a:lnRef idx="1">
@@ -4936,14 +4695,49 @@
       </p:sp>
       <p:sp>
         <p:nvSpPr>
+          <p:cNvPr id="8" name="TextBox 7"/>
+          <p:cNvSpPr txBox="1"/>
+          <p:nvPr/>
+        </p:nvSpPr>
+        <p:spPr>
+          <a:xfrm>
+            <a:off x="365760" y="6592824"/>
+            <a:ext cx="9144000" cy="256032"/>
+          </a:xfrm>
+          <a:prstGeom prst="rect">
+            <a:avLst/>
+          </a:prstGeom>
+          <a:noFill/>
+        </p:spPr>
+        <p:txBody>
+          <a:bodyPr wrap="square">
+            <a:spAutoFit/>
+          </a:bodyPr>
+          <a:lstStyle/>
+          <a:p>
+            <a:pPr algn="l"/>
+            <a:r>
+              <a:rPr sz="900" b="0" i="0">
+                <a:solidFill>
+                  <a:srgbClr val="FFFFFF"/>
+                </a:solidFill>
+                <a:latin typeface="Calibri"/>
+              </a:rPr>
+              <a:t>FairBanks FCHIP | GovTech Readiness | Your health, our mission.</a:t>
+            </a:r>
+          </a:p>
+        </p:txBody>
+      </p:sp>
+      <p:sp>
+        <p:nvSpPr>
           <p:cNvPr id="9" name="TextBox 8"/>
           <p:cNvSpPr txBox="1"/>
           <p:nvPr/>
         </p:nvSpPr>
         <p:spPr>
           <a:xfrm>
-            <a:off x="365760" y="6574536"/>
-            <a:ext cx="9144000" cy="274320"/>
+            <a:off x="11460175" y="6592824"/>
+            <a:ext cx="457200" cy="256032"/>
           </a:xfrm>
           <a:prstGeom prst="rect">
             <a:avLst/>
@@ -4951,55 +4745,12 @@
           <a:noFill/>
         </p:spPr>
         <p:txBody>
-          <a:bodyPr wrap="square" anchor="ctr">
+          <a:bodyPr wrap="square">
             <a:spAutoFit/>
           </a:bodyPr>
           <a:lstStyle/>
           <a:p>
-            <a:pPr algn="l">
-              <a:spcAft>
-                <a:spcPts val="0"/>
-              </a:spcAft>
-            </a:pPr>
-            <a:r>
-              <a:rPr sz="900" b="0" i="0">
-                <a:solidFill>
-                  <a:srgbClr val="FFFFFF"/>
-                </a:solidFill>
-                <a:latin typeface="Calibri"/>
-              </a:rPr>
-              <a:t>FairBanks FCHIP  |  World Bank GovTech Innovation Challenge   |  Your health, our mission.</a:t>
-            </a:r>
-          </a:p>
-        </p:txBody>
-      </p:sp>
-      <p:sp>
-        <p:nvSpPr>
-          <p:cNvPr id="10" name="TextBox 9"/>
-          <p:cNvSpPr txBox="1"/>
-          <p:nvPr/>
-        </p:nvSpPr>
-        <p:spPr>
-          <a:xfrm>
-            <a:off x="11094415" y="6574536"/>
-            <a:ext cx="731520" cy="274320"/>
-          </a:xfrm>
-          <a:prstGeom prst="rect">
-            <a:avLst/>
-          </a:prstGeom>
-          <a:noFill/>
-        </p:spPr>
-        <p:txBody>
-          <a:bodyPr wrap="square" anchor="ctr">
-            <a:spAutoFit/>
-          </a:bodyPr>
-          <a:lstStyle/>
-          <a:p>
-            <a:pPr algn="r">
-              <a:spcAft>
-                <a:spcPts val="0"/>
-              </a:spcAft>
-            </a:pPr>
+            <a:pPr algn="r"/>
             <a:r>
               <a:rPr sz="900" b="0" i="0">
                 <a:solidFill>
@@ -5039,7 +4790,7 @@
         <p:spPr>
           <a:xfrm>
             <a:off x="0" y="0"/>
-            <a:ext cx="12191695" cy="960120"/>
+            <a:ext cx="12191695" cy="914400"/>
           </a:xfrm>
           <a:prstGeom prst="rect">
             <a:avLst/>
@@ -5050,7 +4801,6 @@
           <a:ln>
             <a:noFill/>
           </a:ln>
-          <a:effectLst/>
         </p:spPr>
         <p:style>
           <a:lnRef idx="1">
@@ -5083,7 +4833,7 @@
         <p:spPr>
           <a:xfrm>
             <a:off x="0" y="0"/>
-            <a:ext cx="164592" cy="960120"/>
+            <a:ext cx="137160" cy="914400"/>
           </a:xfrm>
           <a:prstGeom prst="rect">
             <a:avLst/>
@@ -5094,7 +4844,6 @@
           <a:ln>
             <a:noFill/>
           </a:ln>
-          <a:effectLst/>
         </p:spPr>
         <p:style>
           <a:lnRef idx="1">
@@ -5126,8 +4875,8 @@
         </p:nvSpPr>
         <p:spPr>
           <a:xfrm>
-            <a:off x="457200" y="109728"/>
-            <a:ext cx="10972800" cy="256032"/>
+            <a:off x="411480" y="91440"/>
+            <a:ext cx="10972800" cy="274320"/>
           </a:xfrm>
           <a:prstGeom prst="rect">
             <a:avLst/>
@@ -5135,16 +4884,12 @@
           <a:noFill/>
         </p:spPr>
         <p:txBody>
-          <a:bodyPr wrap="square" anchor="t">
+          <a:bodyPr wrap="square">
             <a:spAutoFit/>
           </a:bodyPr>
           <a:lstStyle/>
           <a:p>
-            <a:pPr algn="l">
-              <a:spcAft>
-                <a:spcPts val="0"/>
-              </a:spcAft>
-            </a:pPr>
+            <a:pPr algn="l"/>
             <a:r>
               <a:rPr sz="1100" b="1" i="0">
                 <a:solidFill>
@@ -5152,7 +4897,7 @@
                 </a:solidFill>
                 <a:latin typeface="Calibri"/>
               </a:rPr>
-              <a:t>PROGRAMME FIT</a:t>
+              <a:t>POC PATTERN</a:t>
             </a:r>
           </a:p>
         </p:txBody>
@@ -5165,8 +4910,8 @@
         </p:nvSpPr>
         <p:spPr>
           <a:xfrm>
-            <a:off x="457200" y="384048"/>
-            <a:ext cx="11247120" cy="475488"/>
+            <a:off x="411480" y="384048"/>
+            <a:ext cx="10972800" cy="457200"/>
           </a:xfrm>
           <a:prstGeom prst="rect">
             <a:avLst/>
@@ -5174,74 +4919,48 @@
           <a:noFill/>
         </p:spPr>
         <p:txBody>
-          <a:bodyPr wrap="square" anchor="t">
+          <a:bodyPr wrap="square">
             <a:spAutoFit/>
           </a:bodyPr>
           <a:lstStyle/>
           <a:p>
-            <a:pPr algn="l">
-              <a:spcAft>
-                <a:spcPts val="0"/>
-              </a:spcAft>
-            </a:pPr>
-            <a:r>
-              <a:rPr sz="2200" b="1" i="0">
+            <a:pPr algn="l"/>
+            <a:r>
+              <a:rPr sz="2400" b="1" i="0">
                 <a:solidFill>
                   <a:srgbClr val="0A1F2E"/>
                 </a:solidFill>
                 <a:latin typeface="Calibri"/>
               </a:rPr>
-              <a:t>Why this call matches FCHIP</a:t>
-            </a:r>
-          </a:p>
-        </p:txBody>
-      </p:sp>
-      <p:sp>
-        <p:nvSpPr>
-          <p:cNvPr id="6" name="Rectangle 5"/>
-          <p:cNvSpPr/>
-          <p:nvPr/>
-        </p:nvSpPr>
-        <p:spPr>
-          <a:xfrm>
-            <a:off x="411480" y="1188720"/>
-            <a:ext cx="11338560" cy="1223010"/>
-          </a:xfrm>
-          <a:prstGeom prst="rect">
-            <a:avLst/>
-          </a:prstGeom>
-          <a:solidFill>
-            <a:srgbClr val="FFFFFF"/>
-          </a:solidFill>
-          <a:ln w="9525">
-            <a:solidFill>
-              <a:srgbClr val="D0DCDC"/>
-            </a:solidFill>
-          </a:ln>
-          <a:effectLst/>
-        </p:spPr>
-        <p:style>
-          <a:lnRef idx="1">
-            <a:schemeClr val="accent1"/>
-          </a:lnRef>
-          <a:fillRef idx="3">
-            <a:schemeClr val="accent1"/>
-          </a:fillRef>
-          <a:effectRef idx="2">
-            <a:schemeClr val="accent1"/>
-          </a:effectRef>
-          <a:fontRef idx="minor">
-            <a:schemeClr val="lt1"/>
-          </a:fontRef>
-        </p:style>
-        <p:txBody>
-          <a:bodyPr rtlCol="0" anchor="ctr"/>
-          <a:lstStyle/>
-          <a:p>
-            <a:pPr algn="ctr"/>
-          </a:p>
-        </p:txBody>
-      </p:sp>
+              <a:t>District health intelligence for government partners</a:t>
+            </a:r>
+          </a:p>
+        </p:txBody>
+      </p:sp>
+      <p:pic>
+        <p:nvPicPr>
+          <p:cNvPr id="6" name="Picture 5" descr="data_flow_iso_labeled_opt.jpg"/>
+          <p:cNvPicPr>
+            <a:picLocks noChangeAspect="1"/>
+          </p:cNvPicPr>
+          <p:nvPr/>
+        </p:nvPicPr>
+        <p:blipFill>
+          <a:blip r:embed="rId2"/>
+          <a:stretch>
+            <a:fillRect/>
+          </a:stretch>
+        </p:blipFill>
+        <p:spPr>
+          <a:xfrm>
+            <a:off x="365760" y="1479042"/>
+            <a:ext cx="6400800" cy="4265676"/>
+          </a:xfrm>
+          <a:prstGeom prst="rect">
+            <a:avLst/>
+          </a:prstGeom>
+        </p:spPr>
+      </p:pic>
       <p:sp>
         <p:nvSpPr>
           <p:cNvPr id="7" name="TextBox 6"/>
@@ -5250,8 +4969,8 @@
         </p:nvSpPr>
         <p:spPr>
           <a:xfrm>
-            <a:off x="594360" y="1252728"/>
-            <a:ext cx="2926080" cy="1085850"/>
+            <a:off x="7040880" y="1097280"/>
+            <a:ext cx="4754880" cy="5029200"/>
           </a:xfrm>
           <a:prstGeom prst="rect">
             <a:avLst/>
@@ -5259,449 +4978,35 @@
           <a:noFill/>
         </p:spPr>
         <p:txBody>
-          <a:bodyPr wrap="square" anchor="ctr">
+          <a:bodyPr wrap="square">
             <a:spAutoFit/>
           </a:bodyPr>
           <a:lstStyle/>
           <a:p>
-            <a:pPr algn="l">
-              <a:spcAft>
-                <a:spcPts val="0"/>
-              </a:spcAft>
-            </a:pPr>
-            <a:r>
-              <a:rPr sz="1300" b="1" i="0">
-                <a:solidFill>
-                  <a:srgbClr val="0D6E6E"/>
+            <a:pPr algn="l"/>
+            <a:r>
+              <a:rPr sz="1500" b="0" i="0">
+                <a:solidFill>
+                  <a:srgbClr val="3A4A54"/>
                 </a:solidFill>
                 <a:latin typeface="Calibri"/>
               </a:rPr>
-              <a:t>Tech companies worldwide</a:t>
-            </a:r>
-          </a:p>
-        </p:txBody>
-      </p:sp>
-      <p:sp>
-        <p:nvSpPr>
-          <p:cNvPr id="8" name="TextBox 7"/>
-          <p:cNvSpPr txBox="1"/>
-          <p:nvPr/>
-        </p:nvSpPr>
-        <p:spPr>
-          <a:xfrm>
-            <a:off x="3657600" y="1252728"/>
-            <a:ext cx="7772400" cy="1085850"/>
-          </a:xfrm>
-          <a:prstGeom prst="rect">
-            <a:avLst/>
-          </a:prstGeom>
-          <a:noFill/>
-        </p:spPr>
-        <p:txBody>
-          <a:bodyPr wrap="square" anchor="ctr">
-            <a:spAutoFit/>
-          </a:bodyPr>
-          <a:lstStyle/>
-          <a:p>
-            <a:pPr algn="l">
-              <a:spcAft>
-                <a:spcPts val="0"/>
-              </a:spcAft>
-            </a:pPr>
-            <a:r>
-              <a:rPr sz="1200" b="0" i="0">
-                <a:solidFill>
-                  <a:srgbClr val="3A4A54"/>
-                </a:solidFill>
-                <a:latin typeface="Calibri"/>
-              </a:rPr>
-              <a:t>Ugandan HealthTech operator eligible</a:t>
-            </a:r>
-          </a:p>
-        </p:txBody>
-      </p:sp>
-      <p:sp>
-        <p:nvSpPr>
-          <p:cNvPr id="9" name="Rectangle 8"/>
+              <a:t>Capture → sync → GIS → dashboards → alerts
+Measure decision-cycle gains and CHW data quality for reporting.</a:t>
+            </a:r>
+          </a:p>
+        </p:txBody>
+      </p:sp>
+      <p:sp>
+        <p:nvSpPr>
+          <p:cNvPr id="8" name="Rectangle 7"/>
           <p:cNvSpPr/>
           <p:nvPr/>
         </p:nvSpPr>
         <p:spPr>
           <a:xfrm>
-            <a:off x="411480" y="2503170"/>
-            <a:ext cx="11338560" cy="1223010"/>
-          </a:xfrm>
-          <a:prstGeom prst="rect">
-            <a:avLst/>
-          </a:prstGeom>
-          <a:solidFill>
-            <a:srgbClr val="FFFFFF"/>
-          </a:solidFill>
-          <a:ln w="9525">
-            <a:solidFill>
-              <a:srgbClr val="D0DCDC"/>
-            </a:solidFill>
-          </a:ln>
-          <a:effectLst/>
-        </p:spPr>
-        <p:style>
-          <a:lnRef idx="1">
-            <a:schemeClr val="accent1"/>
-          </a:lnRef>
-          <a:fillRef idx="3">
-            <a:schemeClr val="accent1"/>
-          </a:fillRef>
-          <a:effectRef idx="2">
-            <a:schemeClr val="accent1"/>
-          </a:effectRef>
-          <a:fontRef idx="minor">
-            <a:schemeClr val="lt1"/>
-          </a:fontRef>
-        </p:style>
-        <p:txBody>
-          <a:bodyPr rtlCol="0" anchor="ctr"/>
-          <a:lstStyle/>
-          <a:p>
-            <a:pPr algn="ctr"/>
-          </a:p>
-        </p:txBody>
-      </p:sp>
-      <p:sp>
-        <p:nvSpPr>
-          <p:cNvPr id="10" name="TextBox 9"/>
-          <p:cNvSpPr txBox="1"/>
-          <p:nvPr/>
-        </p:nvSpPr>
-        <p:spPr>
-          <a:xfrm>
-            <a:off x="594360" y="2567178"/>
-            <a:ext cx="2926080" cy="1085850"/>
-          </a:xfrm>
-          <a:prstGeom prst="rect">
-            <a:avLst/>
-          </a:prstGeom>
-          <a:noFill/>
-        </p:spPr>
-        <p:txBody>
-          <a:bodyPr wrap="square" anchor="ctr">
-            <a:spAutoFit/>
-          </a:bodyPr>
-          <a:lstStyle/>
-          <a:p>
-            <a:pPr algn="l">
-              <a:spcAft>
-                <a:spcPts val="0"/>
-              </a:spcAft>
-            </a:pPr>
-            <a:r>
-              <a:rPr sz="1300" b="1" i="0">
-                <a:solidFill>
-                  <a:srgbClr val="0D6E6E"/>
-                </a:solidFill>
-                <a:latin typeface="Calibri"/>
-              </a:rPr>
-              <a:t>Government digitalisation</a:t>
-            </a:r>
-          </a:p>
-        </p:txBody>
-      </p:sp>
-      <p:sp>
-        <p:nvSpPr>
-          <p:cNvPr id="11" name="TextBox 10"/>
-          <p:cNvSpPr txBox="1"/>
-          <p:nvPr/>
-        </p:nvSpPr>
-        <p:spPr>
-          <a:xfrm>
-            <a:off x="3657600" y="2567178"/>
-            <a:ext cx="7772400" cy="1085850"/>
-          </a:xfrm>
-          <a:prstGeom prst="rect">
-            <a:avLst/>
-          </a:prstGeom>
-          <a:noFill/>
-        </p:spPr>
-        <p:txBody>
-          <a:bodyPr wrap="square" anchor="ctr">
-            <a:spAutoFit/>
-          </a:bodyPr>
-          <a:lstStyle/>
-          <a:p>
-            <a:pPr algn="l">
-              <a:spcAft>
-                <a:spcPts val="0"/>
-              </a:spcAft>
-            </a:pPr>
-            <a:r>
-              <a:rPr sz="1200" b="0" i="0">
-                <a:solidFill>
-                  <a:srgbClr val="3A4A54"/>
-                </a:solidFill>
-                <a:latin typeface="Calibri"/>
-              </a:rPr>
-              <a:t>District health intelligence PoC ready</a:t>
-            </a:r>
-          </a:p>
-        </p:txBody>
-      </p:sp>
-      <p:sp>
-        <p:nvSpPr>
-          <p:cNvPr id="12" name="Rectangle 11"/>
-          <p:cNvSpPr/>
-          <p:nvPr/>
-        </p:nvSpPr>
-        <p:spPr>
-          <a:xfrm>
-            <a:off x="411480" y="3817620"/>
-            <a:ext cx="11338560" cy="1223010"/>
-          </a:xfrm>
-          <a:prstGeom prst="rect">
-            <a:avLst/>
-          </a:prstGeom>
-          <a:solidFill>
-            <a:srgbClr val="FFFFFF"/>
-          </a:solidFill>
-          <a:ln w="9525">
-            <a:solidFill>
-              <a:srgbClr val="D0DCDC"/>
-            </a:solidFill>
-          </a:ln>
-          <a:effectLst/>
-        </p:spPr>
-        <p:style>
-          <a:lnRef idx="1">
-            <a:schemeClr val="accent1"/>
-          </a:lnRef>
-          <a:fillRef idx="3">
-            <a:schemeClr val="accent1"/>
-          </a:fillRef>
-          <a:effectRef idx="2">
-            <a:schemeClr val="accent1"/>
-          </a:effectRef>
-          <a:fontRef idx="minor">
-            <a:schemeClr val="lt1"/>
-          </a:fontRef>
-        </p:style>
-        <p:txBody>
-          <a:bodyPr rtlCol="0" anchor="ctr"/>
-          <a:lstStyle/>
-          <a:p>
-            <a:pPr algn="ctr"/>
-          </a:p>
-        </p:txBody>
-      </p:sp>
-      <p:sp>
-        <p:nvSpPr>
-          <p:cNvPr id="13" name="TextBox 12"/>
-          <p:cNvSpPr txBox="1"/>
-          <p:nvPr/>
-        </p:nvSpPr>
-        <p:spPr>
-          <a:xfrm>
-            <a:off x="594360" y="3881628"/>
-            <a:ext cx="2926080" cy="1085850"/>
-          </a:xfrm>
-          <a:prstGeom prst="rect">
-            <a:avLst/>
-          </a:prstGeom>
-          <a:noFill/>
-        </p:spPr>
-        <p:txBody>
-          <a:bodyPr wrap="square" anchor="ctr">
-            <a:spAutoFit/>
-          </a:bodyPr>
-          <a:lstStyle/>
-          <a:p>
-            <a:pPr algn="l">
-              <a:spcAft>
-                <a:spcPts val="0"/>
-              </a:spcAft>
-            </a:pPr>
-            <a:r>
-              <a:rPr sz="1300" b="1" i="0">
-                <a:solidFill>
-                  <a:srgbClr val="0D6E6E"/>
-                </a:solidFill>
-                <a:latin typeface="Calibri"/>
-              </a:rPr>
-              <a:t>Capacity building + bootcamp</a:t>
-            </a:r>
-          </a:p>
-        </p:txBody>
-      </p:sp>
-      <p:sp>
-        <p:nvSpPr>
-          <p:cNvPr id="14" name="TextBox 13"/>
-          <p:cNvSpPr txBox="1"/>
-          <p:nvPr/>
-        </p:nvSpPr>
-        <p:spPr>
-          <a:xfrm>
-            <a:off x="3657600" y="3881628"/>
-            <a:ext cx="7772400" cy="1085850"/>
-          </a:xfrm>
-          <a:prstGeom prst="rect">
-            <a:avLst/>
-          </a:prstGeom>
-          <a:noFill/>
-        </p:spPr>
-        <p:txBody>
-          <a:bodyPr wrap="square" anchor="ctr">
-            <a:spAutoFit/>
-          </a:bodyPr>
-          <a:lstStyle/>
-          <a:p>
-            <a:pPr algn="l">
-              <a:spcAft>
-                <a:spcPts val="0"/>
-              </a:spcAft>
-            </a:pPr>
-            <a:r>
-              <a:rPr sz="1200" b="0" i="0">
-                <a:solidFill>
-                  <a:srgbClr val="3A4A54"/>
-                </a:solidFill>
-                <a:latin typeface="Calibri"/>
-              </a:rPr>
-              <a:t>Team prepared to attend if selected</a:t>
-            </a:r>
-          </a:p>
-        </p:txBody>
-      </p:sp>
-      <p:sp>
-        <p:nvSpPr>
-          <p:cNvPr id="15" name="Rectangle 14"/>
-          <p:cNvSpPr/>
-          <p:nvPr/>
-        </p:nvSpPr>
-        <p:spPr>
-          <a:xfrm>
-            <a:off x="411480" y="5132070"/>
-            <a:ext cx="11338560" cy="1223010"/>
-          </a:xfrm>
-          <a:prstGeom prst="rect">
-            <a:avLst/>
-          </a:prstGeom>
-          <a:solidFill>
-            <a:srgbClr val="FFFFFF"/>
-          </a:solidFill>
-          <a:ln w="9525">
-            <a:solidFill>
-              <a:srgbClr val="D0DCDC"/>
-            </a:solidFill>
-          </a:ln>
-          <a:effectLst/>
-        </p:spPr>
-        <p:style>
-          <a:lnRef idx="1">
-            <a:schemeClr val="accent1"/>
-          </a:lnRef>
-          <a:fillRef idx="3">
-            <a:schemeClr val="accent1"/>
-          </a:fillRef>
-          <a:effectRef idx="2">
-            <a:schemeClr val="accent1"/>
-          </a:effectRef>
-          <a:fontRef idx="minor">
-            <a:schemeClr val="lt1"/>
-          </a:fontRef>
-        </p:style>
-        <p:txBody>
-          <a:bodyPr rtlCol="0" anchor="ctr"/>
-          <a:lstStyle/>
-          <a:p>
-            <a:pPr algn="ctr"/>
-          </a:p>
-        </p:txBody>
-      </p:sp>
-      <p:sp>
-        <p:nvSpPr>
-          <p:cNvPr id="16" name="TextBox 15"/>
-          <p:cNvSpPr txBox="1"/>
-          <p:nvPr/>
-        </p:nvSpPr>
-        <p:spPr>
-          <a:xfrm>
-            <a:off x="594360" y="5196078"/>
-            <a:ext cx="2926080" cy="1085850"/>
-          </a:xfrm>
-          <a:prstGeom prst="rect">
-            <a:avLst/>
-          </a:prstGeom>
-          <a:noFill/>
-        </p:spPr>
-        <p:txBody>
-          <a:bodyPr wrap="square" anchor="ctr">
-            <a:spAutoFit/>
-          </a:bodyPr>
-          <a:lstStyle/>
-          <a:p>
-            <a:pPr algn="l">
-              <a:spcAft>
-                <a:spcPts val="0"/>
-              </a:spcAft>
-            </a:pPr>
-            <a:r>
-              <a:rPr sz="1300" b="1" i="0">
-                <a:solidFill>
-                  <a:srgbClr val="0D6E6E"/>
-                </a:solidFill>
-                <a:latin typeface="Calibri"/>
-              </a:rPr>
-              <a:t>Challenge-specific deadlines</a:t>
-            </a:r>
-          </a:p>
-        </p:txBody>
-      </p:sp>
-      <p:sp>
-        <p:nvSpPr>
-          <p:cNvPr id="17" name="TextBox 16"/>
-          <p:cNvSpPr txBox="1"/>
-          <p:nvPr/>
-        </p:nvSpPr>
-        <p:spPr>
-          <a:xfrm>
-            <a:off x="3657600" y="5196078"/>
-            <a:ext cx="7772400" cy="1085850"/>
-          </a:xfrm>
-          <a:prstGeom prst="rect">
-            <a:avLst/>
-          </a:prstGeom>
-          <a:noFill/>
-        </p:spPr>
-        <p:txBody>
-          <a:bodyPr wrap="square" anchor="ctr">
-            <a:spAutoFit/>
-          </a:bodyPr>
-          <a:lstStyle/>
-          <a:p>
-            <a:pPr algn="l">
-              <a:spcAft>
-                <a:spcPts val="0"/>
-              </a:spcAft>
-            </a:pPr>
-            <a:r>
-              <a:rPr sz="1200" b="0" i="0">
-                <a:solidFill>
-                  <a:srgbClr val="3A4A54"/>
-                </a:solidFill>
-                <a:latin typeface="Calibri"/>
-              </a:rPr>
-              <a:t>Active monitoring; no blind submissions</a:t>
-            </a:r>
-          </a:p>
-        </p:txBody>
-      </p:sp>
-      <p:sp>
-        <p:nvSpPr>
-          <p:cNvPr id="18" name="Rectangle 17"/>
-          <p:cNvSpPr/>
-          <p:nvPr/>
-        </p:nvSpPr>
-        <p:spPr>
-          <a:xfrm>
-            <a:off x="0" y="6565392"/>
-            <a:ext cx="12191695" cy="292608"/>
+            <a:off x="0" y="6583680"/>
+            <a:ext cx="12191695" cy="274320"/>
           </a:xfrm>
           <a:prstGeom prst="rect">
             <a:avLst/>
@@ -5712,7 +5017,6 @@
           <a:ln>
             <a:noFill/>
           </a:ln>
-          <a:effectLst/>
         </p:spPr>
         <p:style>
           <a:lnRef idx="1">
@@ -5738,14 +5042,14 @@
       </p:sp>
       <p:sp>
         <p:nvSpPr>
-          <p:cNvPr id="19" name="TextBox 18"/>
+          <p:cNvPr id="9" name="TextBox 8"/>
           <p:cNvSpPr txBox="1"/>
           <p:nvPr/>
         </p:nvSpPr>
         <p:spPr>
           <a:xfrm>
-            <a:off x="365760" y="6574536"/>
-            <a:ext cx="9144000" cy="274320"/>
+            <a:off x="365760" y="6592824"/>
+            <a:ext cx="9144000" cy="256032"/>
           </a:xfrm>
           <a:prstGeom prst="rect">
             <a:avLst/>
@@ -5753,16 +5057,12 @@
           <a:noFill/>
         </p:spPr>
         <p:txBody>
-          <a:bodyPr wrap="square" anchor="ctr">
+          <a:bodyPr wrap="square">
             <a:spAutoFit/>
           </a:bodyPr>
           <a:lstStyle/>
           <a:p>
-            <a:pPr algn="l">
-              <a:spcAft>
-                <a:spcPts val="0"/>
-              </a:spcAft>
-            </a:pPr>
+            <a:pPr algn="l"/>
             <a:r>
               <a:rPr sz="900" b="0" i="0">
                 <a:solidFill>
@@ -5770,21 +5070,21 @@
                 </a:solidFill>
                 <a:latin typeface="Calibri"/>
               </a:rPr>
-              <a:t>FairBanks FCHIP  |  World Bank GovTech Innovation Challenge   |  Your health, our mission.</a:t>
-            </a:r>
-          </a:p>
-        </p:txBody>
-      </p:sp>
-      <p:sp>
-        <p:nvSpPr>
-          <p:cNvPr id="20" name="TextBox 19"/>
+              <a:t>FairBanks FCHIP | GovTech Readiness | Your health, our mission.</a:t>
+            </a:r>
+          </a:p>
+        </p:txBody>
+      </p:sp>
+      <p:sp>
+        <p:nvSpPr>
+          <p:cNvPr id="10" name="TextBox 9"/>
           <p:cNvSpPr txBox="1"/>
           <p:nvPr/>
         </p:nvSpPr>
         <p:spPr>
           <a:xfrm>
-            <a:off x="11094415" y="6574536"/>
-            <a:ext cx="731520" cy="274320"/>
+            <a:off x="11460175" y="6592824"/>
+            <a:ext cx="457200" cy="256032"/>
           </a:xfrm>
           <a:prstGeom prst="rect">
             <a:avLst/>
@@ -5792,16 +5092,12 @@
           <a:noFill/>
         </p:spPr>
         <p:txBody>
-          <a:bodyPr wrap="square" anchor="ctr">
+          <a:bodyPr wrap="square">
             <a:spAutoFit/>
           </a:bodyPr>
           <a:lstStyle/>
           <a:p>
-            <a:pPr algn="r">
-              <a:spcAft>
-                <a:spcPts val="0"/>
-              </a:spcAft>
-            </a:pPr>
+            <a:pPr algn="r"/>
             <a:r>
               <a:rPr sz="900" b="0" i="0">
                 <a:solidFill>
@@ -5841,7 +5137,7 @@
         <p:spPr>
           <a:xfrm>
             <a:off x="0" y="0"/>
-            <a:ext cx="12191695" cy="960120"/>
+            <a:ext cx="12191695" cy="914400"/>
           </a:xfrm>
           <a:prstGeom prst="rect">
             <a:avLst/>
@@ -5852,7 +5148,6 @@
           <a:ln>
             <a:noFill/>
           </a:ln>
-          <a:effectLst/>
         </p:spPr>
         <p:style>
           <a:lnRef idx="1">
@@ -5885,7 +5180,7 @@
         <p:spPr>
           <a:xfrm>
             <a:off x="0" y="0"/>
-            <a:ext cx="164592" cy="960120"/>
+            <a:ext cx="137160" cy="914400"/>
           </a:xfrm>
           <a:prstGeom prst="rect">
             <a:avLst/>
@@ -5896,7 +5191,6 @@
           <a:ln>
             <a:noFill/>
           </a:ln>
-          <a:effectLst/>
         </p:spPr>
         <p:style>
           <a:lnRef idx="1">
@@ -5928,110 +5222,8 @@
         </p:nvSpPr>
         <p:spPr>
           <a:xfrm>
-            <a:off x="457200" y="109728"/>
-            <a:ext cx="10972800" cy="256032"/>
-          </a:xfrm>
-          <a:prstGeom prst="rect">
-            <a:avLst/>
-          </a:prstGeom>
-          <a:noFill/>
-        </p:spPr>
-        <p:txBody>
-          <a:bodyPr wrap="square" anchor="t">
-            <a:spAutoFit/>
-          </a:bodyPr>
-          <a:lstStyle/>
-          <a:p>
-            <a:pPr algn="l">
-              <a:spcAft>
-                <a:spcPts val="0"/>
-              </a:spcAft>
-            </a:pPr>
-            <a:r>
-              <a:rPr sz="1100" b="1" i="0">
-                <a:solidFill>
-                  <a:srgbClr val="C45C26"/>
-                </a:solidFill>
-                <a:latin typeface="Calibri"/>
-              </a:rPr>
-              <a:t>WHY FAIRBANKS</a:t>
-            </a:r>
-          </a:p>
-        </p:txBody>
-      </p:sp>
-      <p:sp>
-        <p:nvSpPr>
-          <p:cNvPr id="5" name="TextBox 4"/>
-          <p:cNvSpPr txBox="1"/>
-          <p:nvPr/>
-        </p:nvSpPr>
-        <p:spPr>
-          <a:xfrm>
-            <a:off x="457200" y="384048"/>
-            <a:ext cx="11247120" cy="475488"/>
-          </a:xfrm>
-          <a:prstGeom prst="rect">
-            <a:avLst/>
-          </a:prstGeom>
-          <a:noFill/>
-        </p:spPr>
-        <p:txBody>
-          <a:bodyPr wrap="square" anchor="t">
-            <a:spAutoFit/>
-          </a:bodyPr>
-          <a:lstStyle/>
-          <a:p>
-            <a:pPr algn="l">
-              <a:spcAft>
-                <a:spcPts val="0"/>
-              </a:spcAft>
-            </a:pPr>
-            <a:r>
-              <a:rPr sz="2200" b="1" i="0">
-                <a:solidFill>
-                  <a:srgbClr val="0A1F2E"/>
-                </a:solidFill>
-                <a:latin typeface="Calibri"/>
-              </a:rPr>
-              <a:t>A live community health ecosystem</a:t>
-            </a:r>
-          </a:p>
-        </p:txBody>
-      </p:sp>
-      <p:pic>
-        <p:nvPicPr>
-          <p:cNvPr id="6" name="Picture 5" descr="outreach_facilitator_canopy_01_opt.jpg"/>
-          <p:cNvPicPr>
-            <a:picLocks noChangeAspect="1"/>
-          </p:cNvPicPr>
-          <p:nvPr/>
-        </p:nvPicPr>
-        <p:blipFill>
-          <a:blip r:embed="rId2"/>
-          <a:stretch>
-            <a:fillRect/>
-          </a:stretch>
-        </p:blipFill>
-        <p:spPr>
-          <a:xfrm>
-            <a:off x="411480" y="1943753"/>
-            <a:ext cx="5486400" cy="3656293"/>
-          </a:xfrm>
-          <a:prstGeom prst="rect">
-            <a:avLst/>
-          </a:prstGeom>
-        </p:spPr>
-      </p:pic>
-      <p:sp>
-        <p:nvSpPr>
-          <p:cNvPr id="7" name="TextBox 6"/>
-          <p:cNvSpPr txBox="1"/>
-          <p:nvPr/>
-        </p:nvSpPr>
-        <p:spPr>
-          <a:xfrm>
-            <a:off x="6217920" y="1234440"/>
-            <a:ext cx="5486400" cy="5074920"/>
+            <a:off x="411480" y="91440"/>
+            <a:ext cx="10972800" cy="274320"/>
           </a:xfrm>
           <a:prstGeom prst="rect">
             <a:avLst/>
@@ -6044,113 +5236,639 @@
           </a:bodyPr>
           <a:lstStyle/>
           <a:p>
-            <a:pPr>
-              <a:spcAft>
-                <a:spcPts val="800"/>
-              </a:spcAft>
-            </a:pPr>
-            <a:r>
-              <a:rPr sz="1400">
-                <a:solidFill>
-                  <a:srgbClr val="1E2F38"/>
+            <a:pPr algn="l"/>
+            <a:r>
+              <a:rPr sz="1100" b="1" i="0">
+                <a:solidFill>
+                  <a:srgbClr val="C45C26"/>
                 </a:solidFill>
                 <a:latin typeface="Calibri"/>
               </a:rPr>
-              <a:t>•  Functioning FairBanks Medical Centre with clinic, pharmacy, and diagnostics</a:t>
-            </a:r>
-          </a:p>
-          <a:p>
-            <a:pPr>
-              <a:spcAft>
-                <a:spcPts val="800"/>
-              </a:spcAft>
-            </a:pPr>
-            <a:r>
-              <a:rPr sz="1400">
-                <a:solidFill>
-                  <a:srgbClr val="1E2F38"/>
+              <a:t>POC STACK</a:t>
+            </a:r>
+          </a:p>
+        </p:txBody>
+      </p:sp>
+      <p:sp>
+        <p:nvSpPr>
+          <p:cNvPr id="5" name="TextBox 4"/>
+          <p:cNvSpPr txBox="1"/>
+          <p:nvPr/>
+        </p:nvSpPr>
+        <p:spPr>
+          <a:xfrm>
+            <a:off x="411480" y="384048"/>
+            <a:ext cx="10972800" cy="457200"/>
+          </a:xfrm>
+          <a:prstGeom prst="rect">
+            <a:avLst/>
+          </a:prstGeom>
+          <a:noFill/>
+        </p:spPr>
+        <p:txBody>
+          <a:bodyPr wrap="square">
+            <a:spAutoFit/>
+          </a:bodyPr>
+          <a:lstStyle/>
+          <a:p>
+            <a:pPr algn="l"/>
+            <a:r>
+              <a:rPr sz="2400" b="1" i="0">
+                <a:solidFill>
+                  <a:srgbClr val="0A1F2E"/>
                 </a:solidFill>
                 <a:latin typeface="Calibri"/>
               </a:rPr>
-              <a:t>•  Active Community Reach outreach in Bukoto, Kyebando, Kisaasi, Kamwokya, Kikaaya</a:t>
-            </a:r>
-          </a:p>
-          <a:p>
-            <a:pPr>
-              <a:spcAft>
-                <a:spcPts val="800"/>
-              </a:spcAft>
-            </a:pPr>
-            <a:r>
-              <a:rPr sz="1400">
-                <a:solidFill>
-                  <a:srgbClr val="1E2F38"/>
+              <a:t>Five components co-designed with district users</a:t>
+            </a:r>
+          </a:p>
+        </p:txBody>
+      </p:sp>
+      <p:sp>
+        <p:nvSpPr>
+          <p:cNvPr id="6" name="Rectangle 5"/>
+          <p:cNvSpPr/>
+          <p:nvPr/>
+        </p:nvSpPr>
+        <p:spPr>
+          <a:xfrm>
+            <a:off x="457200" y="1051560"/>
+            <a:ext cx="11155680" cy="868680"/>
+          </a:xfrm>
+          <a:prstGeom prst="rect">
+            <a:avLst/>
+          </a:prstGeom>
+          <a:solidFill>
+            <a:srgbClr val="FFFFFF"/>
+          </a:solidFill>
+          <a:ln>
+            <a:solidFill>
+              <a:srgbClr val="D0DCDC"/>
+            </a:solidFill>
+          </a:ln>
+        </p:spPr>
+        <p:style>
+          <a:lnRef idx="1">
+            <a:schemeClr val="accent1"/>
+          </a:lnRef>
+          <a:fillRef idx="3">
+            <a:schemeClr val="accent1"/>
+          </a:fillRef>
+          <a:effectRef idx="2">
+            <a:schemeClr val="accent1"/>
+          </a:effectRef>
+          <a:fontRef idx="minor">
+            <a:schemeClr val="lt1"/>
+          </a:fontRef>
+        </p:style>
+        <p:txBody>
+          <a:bodyPr rtlCol="0" anchor="ctr"/>
+          <a:lstStyle/>
+          <a:p>
+            <a:pPr algn="ctr"/>
+          </a:p>
+        </p:txBody>
+      </p:sp>
+      <p:sp>
+        <p:nvSpPr>
+          <p:cNvPr id="7" name="TextBox 6"/>
+          <p:cNvSpPr txBox="1"/>
+          <p:nvPr/>
+        </p:nvSpPr>
+        <p:spPr>
+          <a:xfrm>
+            <a:off x="640080" y="1143000"/>
+            <a:ext cx="2743200" cy="320040"/>
+          </a:xfrm>
+          <a:prstGeom prst="rect">
+            <a:avLst/>
+          </a:prstGeom>
+          <a:noFill/>
+        </p:spPr>
+        <p:txBody>
+          <a:bodyPr wrap="square">
+            <a:spAutoFit/>
+          </a:bodyPr>
+          <a:lstStyle/>
+          <a:p>
+            <a:pPr algn="l"/>
+            <a:r>
+              <a:rPr sz="1300" b="1" i="0">
+                <a:solidFill>
+                  <a:srgbClr val="0D6E6E"/>
                 </a:solidFill>
                 <a:latin typeface="Calibri"/>
               </a:rPr>
-              <a:t>•  Trusted CHW and VHT relationships for household visits and referrals</a:t>
-            </a:r>
-          </a:p>
-          <a:p>
-            <a:pPr>
-              <a:spcAft>
-                <a:spcPts val="800"/>
-              </a:spcAft>
-            </a:pPr>
-            <a:r>
-              <a:rPr sz="1400">
-                <a:solidFill>
-                  <a:srgbClr val="1E2F38"/>
+              <a:t>Community capture</a:t>
+            </a:r>
+          </a:p>
+        </p:txBody>
+      </p:sp>
+      <p:sp>
+        <p:nvSpPr>
+          <p:cNvPr id="8" name="TextBox 7"/>
+          <p:cNvSpPr txBox="1"/>
+          <p:nvPr/>
+        </p:nvSpPr>
+        <p:spPr>
+          <a:xfrm>
+            <a:off x="3474720" y="1143000"/>
+            <a:ext cx="7772400" cy="685800"/>
+          </a:xfrm>
+          <a:prstGeom prst="rect">
+            <a:avLst/>
+          </a:prstGeom>
+          <a:noFill/>
+        </p:spPr>
+        <p:txBody>
+          <a:bodyPr wrap="square">
+            <a:spAutoFit/>
+          </a:bodyPr>
+          <a:lstStyle/>
+          <a:p>
+            <a:pPr algn="l"/>
+            <a:r>
+              <a:rPr sz="1300" b="0" i="0">
+                <a:solidFill>
+                  <a:srgbClr val="3A4A54"/>
                 </a:solidFill>
                 <a:latin typeface="Calibri"/>
               </a:rPr>
-              <a:t>•  Live programmes: maternal &amp; child health, Gericare, chronic-disease screening</a:t>
-            </a:r>
-          </a:p>
-          <a:p>
-            <a:pPr>
-              <a:spcAft>
-                <a:spcPts val="800"/>
-              </a:spcAft>
-            </a:pPr>
-            <a:r>
-              <a:rPr sz="1400">
-                <a:solidFill>
-                  <a:srgbClr val="1E2F38"/>
+              <a:t>Offline CHW/VHT forms with validation rules</a:t>
+            </a:r>
+          </a:p>
+        </p:txBody>
+      </p:sp>
+      <p:sp>
+        <p:nvSpPr>
+          <p:cNvPr id="9" name="Rectangle 8"/>
+          <p:cNvSpPr/>
+          <p:nvPr/>
+        </p:nvSpPr>
+        <p:spPr>
+          <a:xfrm>
+            <a:off x="457200" y="2011680"/>
+            <a:ext cx="11155680" cy="868680"/>
+          </a:xfrm>
+          <a:prstGeom prst="rect">
+            <a:avLst/>
+          </a:prstGeom>
+          <a:solidFill>
+            <a:srgbClr val="FFFFFF"/>
+          </a:solidFill>
+          <a:ln>
+            <a:solidFill>
+              <a:srgbClr val="D0DCDC"/>
+            </a:solidFill>
+          </a:ln>
+        </p:spPr>
+        <p:style>
+          <a:lnRef idx="1">
+            <a:schemeClr val="accent1"/>
+          </a:lnRef>
+          <a:fillRef idx="3">
+            <a:schemeClr val="accent1"/>
+          </a:fillRef>
+          <a:effectRef idx="2">
+            <a:schemeClr val="accent1"/>
+          </a:effectRef>
+          <a:fontRef idx="minor">
+            <a:schemeClr val="lt1"/>
+          </a:fontRef>
+        </p:style>
+        <p:txBody>
+          <a:bodyPr rtlCol="0" anchor="ctr"/>
+          <a:lstStyle/>
+          <a:p>
+            <a:pPr algn="ctr"/>
+          </a:p>
+        </p:txBody>
+      </p:sp>
+      <p:sp>
+        <p:nvSpPr>
+          <p:cNvPr id="10" name="TextBox 9"/>
+          <p:cNvSpPr txBox="1"/>
+          <p:nvPr/>
+        </p:nvSpPr>
+        <p:spPr>
+          <a:xfrm>
+            <a:off x="640080" y="2103120"/>
+            <a:ext cx="2743200" cy="320040"/>
+          </a:xfrm>
+          <a:prstGeom prst="rect">
+            <a:avLst/>
+          </a:prstGeom>
+          <a:noFill/>
+        </p:spPr>
+        <p:txBody>
+          <a:bodyPr wrap="square">
+            <a:spAutoFit/>
+          </a:bodyPr>
+          <a:lstStyle/>
+          <a:p>
+            <a:pPr algn="l"/>
+            <a:r>
+              <a:rPr sz="1300" b="1" i="0">
+                <a:solidFill>
+                  <a:srgbClr val="0D6E6E"/>
                 </a:solidFill>
                 <a:latin typeface="Calibri"/>
               </a:rPr>
-              <a:t>•  Digital health records and outreach data ready to feed FCHIP</a:t>
-            </a:r>
-          </a:p>
-          <a:p>
-            <a:pPr>
-              <a:spcAft>
-                <a:spcPts val="800"/>
-              </a:spcAft>
-            </a:pPr>
-            <a:r>
-              <a:rPr sz="1400">
-                <a:solidFill>
-                  <a:srgbClr val="1E2F38"/>
+              <a:t>Data pipeline</a:t>
+            </a:r>
+          </a:p>
+        </p:txBody>
+      </p:sp>
+      <p:sp>
+        <p:nvSpPr>
+          <p:cNvPr id="11" name="TextBox 10"/>
+          <p:cNvSpPr txBox="1"/>
+          <p:nvPr/>
+        </p:nvSpPr>
+        <p:spPr>
+          <a:xfrm>
+            <a:off x="3474720" y="2103120"/>
+            <a:ext cx="7772400" cy="685800"/>
+          </a:xfrm>
+          <a:prstGeom prst="rect">
+            <a:avLst/>
+          </a:prstGeom>
+          <a:noFill/>
+        </p:spPr>
+        <p:txBody>
+          <a:bodyPr wrap="square">
+            <a:spAutoFit/>
+          </a:bodyPr>
+          <a:lstStyle/>
+          <a:p>
+            <a:pPr algn="l"/>
+            <a:r>
+              <a:rPr sz="1300" b="0" i="0">
+                <a:solidFill>
+                  <a:srgbClr val="3A4A54"/>
                 </a:solidFill>
                 <a:latin typeface="Calibri"/>
               </a:rPr>
-              <a:t>•  Research and partnership mindset for ethical, evidence-based scale</a:t>
-            </a:r>
-          </a:p>
-        </p:txBody>
-      </p:sp>
-      <p:sp>
-        <p:nvSpPr>
-          <p:cNvPr id="8" name="Rectangle 7"/>
+              <a:t>Secure sync, anonymisation, and quality dashboards</a:t>
+            </a:r>
+          </a:p>
+        </p:txBody>
+      </p:sp>
+      <p:sp>
+        <p:nvSpPr>
+          <p:cNvPr id="12" name="Rectangle 11"/>
           <p:cNvSpPr/>
           <p:nvPr/>
         </p:nvSpPr>
         <p:spPr>
           <a:xfrm>
-            <a:off x="0" y="6565392"/>
-            <a:ext cx="12191695" cy="292608"/>
+            <a:off x="457200" y="2971800"/>
+            <a:ext cx="11155680" cy="868680"/>
+          </a:xfrm>
+          <a:prstGeom prst="rect">
+            <a:avLst/>
+          </a:prstGeom>
+          <a:solidFill>
+            <a:srgbClr val="FFFFFF"/>
+          </a:solidFill>
+          <a:ln>
+            <a:solidFill>
+              <a:srgbClr val="D0DCDC"/>
+            </a:solidFill>
+          </a:ln>
+        </p:spPr>
+        <p:style>
+          <a:lnRef idx="1">
+            <a:schemeClr val="accent1"/>
+          </a:lnRef>
+          <a:fillRef idx="3">
+            <a:schemeClr val="accent1"/>
+          </a:fillRef>
+          <a:effectRef idx="2">
+            <a:schemeClr val="accent1"/>
+          </a:effectRef>
+          <a:fontRef idx="minor">
+            <a:schemeClr val="lt1"/>
+          </a:fontRef>
+        </p:style>
+        <p:txBody>
+          <a:bodyPr rtlCol="0" anchor="ctr"/>
+          <a:lstStyle/>
+          <a:p>
+            <a:pPr algn="ctr"/>
+          </a:p>
+        </p:txBody>
+      </p:sp>
+      <p:sp>
+        <p:nvSpPr>
+          <p:cNvPr id="13" name="TextBox 12"/>
+          <p:cNvSpPr txBox="1"/>
+          <p:nvPr/>
+        </p:nvSpPr>
+        <p:spPr>
+          <a:xfrm>
+            <a:off x="640080" y="3063240"/>
+            <a:ext cx="2743200" cy="320040"/>
+          </a:xfrm>
+          <a:prstGeom prst="rect">
+            <a:avLst/>
+          </a:prstGeom>
+          <a:noFill/>
+        </p:spPr>
+        <p:txBody>
+          <a:bodyPr wrap="square">
+            <a:spAutoFit/>
+          </a:bodyPr>
+          <a:lstStyle/>
+          <a:p>
+            <a:pPr algn="l"/>
+            <a:r>
+              <a:rPr sz="1300" b="1" i="0">
+                <a:solidFill>
+                  <a:srgbClr val="0D6E6E"/>
+                </a:solidFill>
+                <a:latin typeface="Calibri"/>
+              </a:rPr>
+              <a:t>GIS layer</a:t>
+            </a:r>
+          </a:p>
+        </p:txBody>
+      </p:sp>
+      <p:sp>
+        <p:nvSpPr>
+          <p:cNvPr id="14" name="TextBox 13"/>
+          <p:cNvSpPr txBox="1"/>
+          <p:nvPr/>
+        </p:nvSpPr>
+        <p:spPr>
+          <a:xfrm>
+            <a:off x="3474720" y="3063240"/>
+            <a:ext cx="7772400" cy="685800"/>
+          </a:xfrm>
+          <a:prstGeom prst="rect">
+            <a:avLst/>
+          </a:prstGeom>
+          <a:noFill/>
+        </p:spPr>
+        <p:txBody>
+          <a:bodyPr wrap="square">
+            <a:spAutoFit/>
+          </a:bodyPr>
+          <a:lstStyle/>
+          <a:p>
+            <a:pPr algn="l"/>
+            <a:r>
+              <a:rPr sz="1300" b="0" i="0">
+                <a:solidFill>
+                  <a:srgbClr val="3A4A54"/>
+                </a:solidFill>
+                <a:latin typeface="Calibri"/>
+              </a:rPr>
+              <a:t>Hotspot maps for managers and partners</a:t>
+            </a:r>
+          </a:p>
+        </p:txBody>
+      </p:sp>
+      <p:sp>
+        <p:nvSpPr>
+          <p:cNvPr id="15" name="Rectangle 14"/>
+          <p:cNvSpPr/>
+          <p:nvPr/>
+        </p:nvSpPr>
+        <p:spPr>
+          <a:xfrm>
+            <a:off x="457200" y="3931920"/>
+            <a:ext cx="11155680" cy="868680"/>
+          </a:xfrm>
+          <a:prstGeom prst="rect">
+            <a:avLst/>
+          </a:prstGeom>
+          <a:solidFill>
+            <a:srgbClr val="FFFFFF"/>
+          </a:solidFill>
+          <a:ln>
+            <a:solidFill>
+              <a:srgbClr val="D0DCDC"/>
+            </a:solidFill>
+          </a:ln>
+        </p:spPr>
+        <p:style>
+          <a:lnRef idx="1">
+            <a:schemeClr val="accent1"/>
+          </a:lnRef>
+          <a:fillRef idx="3">
+            <a:schemeClr val="accent1"/>
+          </a:fillRef>
+          <a:effectRef idx="2">
+            <a:schemeClr val="accent1"/>
+          </a:effectRef>
+          <a:fontRef idx="minor">
+            <a:schemeClr val="lt1"/>
+          </a:fontRef>
+        </p:style>
+        <p:txBody>
+          <a:bodyPr rtlCol="0" anchor="ctr"/>
+          <a:lstStyle/>
+          <a:p>
+            <a:pPr algn="ctr"/>
+          </a:p>
+        </p:txBody>
+      </p:sp>
+      <p:sp>
+        <p:nvSpPr>
+          <p:cNvPr id="16" name="TextBox 15"/>
+          <p:cNvSpPr txBox="1"/>
+          <p:nvPr/>
+        </p:nvSpPr>
+        <p:spPr>
+          <a:xfrm>
+            <a:off x="640080" y="4023360"/>
+            <a:ext cx="2743200" cy="320040"/>
+          </a:xfrm>
+          <a:prstGeom prst="rect">
+            <a:avLst/>
+          </a:prstGeom>
+          <a:noFill/>
+        </p:spPr>
+        <p:txBody>
+          <a:bodyPr wrap="square">
+            <a:spAutoFit/>
+          </a:bodyPr>
+          <a:lstStyle/>
+          <a:p>
+            <a:pPr algn="l"/>
+            <a:r>
+              <a:rPr sz="1300" b="1" i="0">
+                <a:solidFill>
+                  <a:srgbClr val="0D6E6E"/>
+                </a:solidFill>
+                <a:latin typeface="Calibri"/>
+              </a:rPr>
+              <a:t>Alerts</a:t>
+            </a:r>
+          </a:p>
+        </p:txBody>
+      </p:sp>
+      <p:sp>
+        <p:nvSpPr>
+          <p:cNvPr id="17" name="TextBox 16"/>
+          <p:cNvSpPr txBox="1"/>
+          <p:nvPr/>
+        </p:nvSpPr>
+        <p:spPr>
+          <a:xfrm>
+            <a:off x="3474720" y="4023360"/>
+            <a:ext cx="7772400" cy="685800"/>
+          </a:xfrm>
+          <a:prstGeom prst="rect">
+            <a:avLst/>
+          </a:prstGeom>
+          <a:noFill/>
+        </p:spPr>
+        <p:txBody>
+          <a:bodyPr wrap="square">
+            <a:spAutoFit/>
+          </a:bodyPr>
+          <a:lstStyle/>
+          <a:p>
+            <a:pPr algn="l"/>
+            <a:r>
+              <a:rPr sz="1300" b="0" i="0">
+                <a:solidFill>
+                  <a:srgbClr val="3A4A54"/>
+                </a:solidFill>
+                <a:latin typeface="Calibri"/>
+              </a:rPr>
+              <a:t>Configurable early warnings aligned to local protocols</a:t>
+            </a:r>
+          </a:p>
+        </p:txBody>
+      </p:sp>
+      <p:sp>
+        <p:nvSpPr>
+          <p:cNvPr id="18" name="Rectangle 17"/>
+          <p:cNvSpPr/>
+          <p:nvPr/>
+        </p:nvSpPr>
+        <p:spPr>
+          <a:xfrm>
+            <a:off x="457200" y="4892040"/>
+            <a:ext cx="11155680" cy="868680"/>
+          </a:xfrm>
+          <a:prstGeom prst="rect">
+            <a:avLst/>
+          </a:prstGeom>
+          <a:solidFill>
+            <a:srgbClr val="FFFFFF"/>
+          </a:solidFill>
+          <a:ln>
+            <a:solidFill>
+              <a:srgbClr val="D0DCDC"/>
+            </a:solidFill>
+          </a:ln>
+        </p:spPr>
+        <p:style>
+          <a:lnRef idx="1">
+            <a:schemeClr val="accent1"/>
+          </a:lnRef>
+          <a:fillRef idx="3">
+            <a:schemeClr val="accent1"/>
+          </a:fillRef>
+          <a:effectRef idx="2">
+            <a:schemeClr val="accent1"/>
+          </a:effectRef>
+          <a:fontRef idx="minor">
+            <a:schemeClr val="lt1"/>
+          </a:fontRef>
+        </p:style>
+        <p:txBody>
+          <a:bodyPr rtlCol="0" anchor="ctr"/>
+          <a:lstStyle/>
+          <a:p>
+            <a:pPr algn="ctr"/>
+          </a:p>
+        </p:txBody>
+      </p:sp>
+      <p:sp>
+        <p:nvSpPr>
+          <p:cNvPr id="19" name="TextBox 18"/>
+          <p:cNvSpPr txBox="1"/>
+          <p:nvPr/>
+        </p:nvSpPr>
+        <p:spPr>
+          <a:xfrm>
+            <a:off x="640080" y="4983480"/>
+            <a:ext cx="2743200" cy="320040"/>
+          </a:xfrm>
+          <a:prstGeom prst="rect">
+            <a:avLst/>
+          </a:prstGeom>
+          <a:noFill/>
+        </p:spPr>
+        <p:txBody>
+          <a:bodyPr wrap="square">
+            <a:spAutoFit/>
+          </a:bodyPr>
+          <a:lstStyle/>
+          <a:p>
+            <a:pPr algn="l"/>
+            <a:r>
+              <a:rPr sz="1300" b="1" i="0">
+                <a:solidFill>
+                  <a:srgbClr val="0D6E6E"/>
+                </a:solidFill>
+                <a:latin typeface="Calibri"/>
+              </a:rPr>
+              <a:t>Handover</a:t>
+            </a:r>
+          </a:p>
+        </p:txBody>
+      </p:sp>
+      <p:sp>
+        <p:nvSpPr>
+          <p:cNvPr id="20" name="TextBox 19"/>
+          <p:cNvSpPr txBox="1"/>
+          <p:nvPr/>
+        </p:nvSpPr>
+        <p:spPr>
+          <a:xfrm>
+            <a:off x="3474720" y="4983480"/>
+            <a:ext cx="7772400" cy="685800"/>
+          </a:xfrm>
+          <a:prstGeom prst="rect">
+            <a:avLst/>
+          </a:prstGeom>
+          <a:noFill/>
+        </p:spPr>
+        <p:txBody>
+          <a:bodyPr wrap="square">
+            <a:spAutoFit/>
+          </a:bodyPr>
+          <a:lstStyle/>
+          <a:p>
+            <a:pPr algn="l"/>
+            <a:r>
+              <a:rPr sz="1300" b="0" i="0">
+                <a:solidFill>
+                  <a:srgbClr val="3A4A54"/>
+                </a:solidFill>
+                <a:latin typeface="Calibri"/>
+              </a:rPr>
+              <a:t>Documentation and training for sustained use</a:t>
+            </a:r>
+          </a:p>
+        </p:txBody>
+      </p:sp>
+      <p:sp>
+        <p:nvSpPr>
+          <p:cNvPr id="21" name="Rectangle 20"/>
+          <p:cNvSpPr/>
+          <p:nvPr/>
+        </p:nvSpPr>
+        <p:spPr>
+          <a:xfrm>
+            <a:off x="0" y="6583680"/>
+            <a:ext cx="12191695" cy="274320"/>
           </a:xfrm>
           <a:prstGeom prst="rect">
             <a:avLst/>
@@ -6161,7 +5879,6 @@
           <a:ln>
             <a:noFill/>
           </a:ln>
-          <a:effectLst/>
         </p:spPr>
         <p:style>
           <a:lnRef idx="1">
@@ -6187,14 +5904,14 @@
       </p:sp>
       <p:sp>
         <p:nvSpPr>
-          <p:cNvPr id="9" name="TextBox 8"/>
+          <p:cNvPr id="22" name="TextBox 21"/>
           <p:cNvSpPr txBox="1"/>
           <p:nvPr/>
         </p:nvSpPr>
         <p:spPr>
           <a:xfrm>
-            <a:off x="365760" y="6574536"/>
-            <a:ext cx="9144000" cy="274320"/>
+            <a:off x="365760" y="6592824"/>
+            <a:ext cx="9144000" cy="256032"/>
           </a:xfrm>
           <a:prstGeom prst="rect">
             <a:avLst/>
@@ -6202,16 +5919,12 @@
           <a:noFill/>
         </p:spPr>
         <p:txBody>
-          <a:bodyPr wrap="square" anchor="ctr">
+          <a:bodyPr wrap="square">
             <a:spAutoFit/>
           </a:bodyPr>
           <a:lstStyle/>
           <a:p>
-            <a:pPr algn="l">
-              <a:spcAft>
-                <a:spcPts val="0"/>
-              </a:spcAft>
-            </a:pPr>
+            <a:pPr algn="l"/>
             <a:r>
               <a:rPr sz="900" b="0" i="0">
                 <a:solidFill>
@@ -6219,21 +5932,21 @@
                 </a:solidFill>
                 <a:latin typeface="Calibri"/>
               </a:rPr>
-              <a:t>FairBanks FCHIP  |  World Bank GovTech Innovation Challenge   |  Your health, our mission.</a:t>
-            </a:r>
-          </a:p>
-        </p:txBody>
-      </p:sp>
-      <p:sp>
-        <p:nvSpPr>
-          <p:cNvPr id="10" name="TextBox 9"/>
+              <a:t>FairBanks FCHIP | GovTech Readiness | Your health, our mission.</a:t>
+            </a:r>
+          </a:p>
+        </p:txBody>
+      </p:sp>
+      <p:sp>
+        <p:nvSpPr>
+          <p:cNvPr id="23" name="TextBox 22"/>
           <p:cNvSpPr txBox="1"/>
           <p:nvPr/>
         </p:nvSpPr>
         <p:spPr>
           <a:xfrm>
-            <a:off x="11094415" y="6574536"/>
-            <a:ext cx="731520" cy="274320"/>
+            <a:off x="11460175" y="6592824"/>
+            <a:ext cx="457200" cy="256032"/>
           </a:xfrm>
           <a:prstGeom prst="rect">
             <a:avLst/>
@@ -6241,16 +5954,12 @@
           <a:noFill/>
         </p:spPr>
         <p:txBody>
-          <a:bodyPr wrap="square" anchor="ctr">
+          <a:bodyPr wrap="square">
             <a:spAutoFit/>
           </a:bodyPr>
           <a:lstStyle/>
           <a:p>
-            <a:pPr algn="r">
-              <a:spcAft>
-                <a:spcPts val="0"/>
-              </a:spcAft>
-            </a:pPr>
+            <a:pPr algn="r"/>
             <a:r>
               <a:rPr sz="900" b="0" i="0">
                 <a:solidFill>
@@ -6290,7 +5999,7 @@
         <p:spPr>
           <a:xfrm>
             <a:off x="0" y="0"/>
-            <a:ext cx="12191695" cy="960120"/>
+            <a:ext cx="12191695" cy="914400"/>
           </a:xfrm>
           <a:prstGeom prst="rect">
             <a:avLst/>
@@ -6301,7 +6010,6 @@
           <a:ln>
             <a:noFill/>
           </a:ln>
-          <a:effectLst/>
         </p:spPr>
         <p:style>
           <a:lnRef idx="1">
@@ -6334,7 +6042,7 @@
         <p:spPr>
           <a:xfrm>
             <a:off x="0" y="0"/>
-            <a:ext cx="164592" cy="960120"/>
+            <a:ext cx="137160" cy="914400"/>
           </a:xfrm>
           <a:prstGeom prst="rect">
             <a:avLst/>
@@ -6345,7 +6053,6 @@
           <a:ln>
             <a:noFill/>
           </a:ln>
-          <a:effectLst/>
         </p:spPr>
         <p:style>
           <a:lnRef idx="1">
@@ -6377,86 +6084,8 @@
         </p:nvSpPr>
         <p:spPr>
           <a:xfrm>
-            <a:off x="457200" y="109728"/>
-            <a:ext cx="10972800" cy="256032"/>
-          </a:xfrm>
-          <a:prstGeom prst="rect">
-            <a:avLst/>
-          </a:prstGeom>
-          <a:noFill/>
-        </p:spPr>
-        <p:txBody>
-          <a:bodyPr wrap="square" anchor="t">
-            <a:spAutoFit/>
-          </a:bodyPr>
-          <a:lstStyle/>
-          <a:p>
-            <a:pPr algn="l">
-              <a:spcAft>
-                <a:spcPts val="0"/>
-              </a:spcAft>
-            </a:pPr>
-            <a:r>
-              <a:rPr sz="1100" b="1" i="0">
-                <a:solidFill>
-                  <a:srgbClr val="C45C26"/>
-                </a:solidFill>
-                <a:latin typeface="Calibri"/>
-              </a:rPr>
-              <a:t>THE PLAN</a:t>
-            </a:r>
-          </a:p>
-        </p:txBody>
-      </p:sp>
-      <p:sp>
-        <p:nvSpPr>
-          <p:cNvPr id="5" name="TextBox 4"/>
-          <p:cNvSpPr txBox="1"/>
-          <p:nvPr/>
-        </p:nvSpPr>
-        <p:spPr>
-          <a:xfrm>
-            <a:off x="457200" y="384048"/>
-            <a:ext cx="11247120" cy="475488"/>
-          </a:xfrm>
-          <a:prstGeom prst="rect">
-            <a:avLst/>
-          </a:prstGeom>
-          <a:noFill/>
-        </p:spPr>
-        <p:txBody>
-          <a:bodyPr wrap="square" anchor="t">
-            <a:spAutoFit/>
-          </a:bodyPr>
-          <a:lstStyle/>
-          <a:p>
-            <a:pPr algn="l">
-              <a:spcAft>
-                <a:spcPts val="0"/>
-              </a:spcAft>
-            </a:pPr>
-            <a:r>
-              <a:rPr sz="2200" b="1" i="0">
-                <a:solidFill>
-                  <a:srgbClr val="0A1F2E"/>
-                </a:solidFill>
-                <a:latin typeface="Calibri"/>
-              </a:rPr>
-              <a:t>Monitor → match → PoC</a:t>
-            </a:r>
-          </a:p>
-        </p:txBody>
-      </p:sp>
-      <p:sp>
-        <p:nvSpPr>
-          <p:cNvPr id="6" name="TextBox 5"/>
-          <p:cNvSpPr txBox="1"/>
-          <p:nvPr/>
-        </p:nvSpPr>
-        <p:spPr>
-          <a:xfrm>
-            <a:off x="502920" y="1234440"/>
-            <a:ext cx="5760720" cy="5074920"/>
+            <a:off x="411480" y="91440"/>
+            <a:ext cx="10972800" cy="274320"/>
           </a:xfrm>
           <a:prstGeom prst="rect">
             <a:avLst/>
@@ -6469,74 +6098,57 @@
           </a:bodyPr>
           <a:lstStyle/>
           <a:p>
-            <a:pPr>
-              <a:spcAft>
-                <a:spcPts val="800"/>
-              </a:spcAft>
-            </a:pPr>
-            <a:r>
-              <a:rPr sz="1500">
-                <a:solidFill>
-                  <a:srgbClr val="1E2F38"/>
+            <a:pPr algn="l"/>
+            <a:r>
+              <a:rPr sz="1100" b="1" i="0">
+                <a:solidFill>
+                  <a:srgbClr val="C45C26"/>
                 </a:solidFill>
                 <a:latin typeface="Calibri"/>
               </a:rPr>
-              <a:t>•  Maintain this application pack as a ready response baseline</a:t>
-            </a:r>
-          </a:p>
-          <a:p>
-            <a:pPr>
-              <a:spcAft>
-                <a:spcPts val="800"/>
-              </a:spcAft>
-            </a:pPr>
-            <a:r>
-              <a:rPr sz="1500">
-                <a:solidFill>
-                  <a:srgbClr val="1E2F38"/>
+              <a:t>DECISION SUPPORT</a:t>
+            </a:r>
+          </a:p>
+        </p:txBody>
+      </p:sp>
+      <p:sp>
+        <p:nvSpPr>
+          <p:cNvPr id="5" name="TextBox 4"/>
+          <p:cNvSpPr txBox="1"/>
+          <p:nvPr/>
+        </p:nvSpPr>
+        <p:spPr>
+          <a:xfrm>
+            <a:off x="411480" y="384048"/>
+            <a:ext cx="10972800" cy="457200"/>
+          </a:xfrm>
+          <a:prstGeom prst="rect">
+            <a:avLst/>
+          </a:prstGeom>
+          <a:noFill/>
+        </p:spPr>
+        <p:txBody>
+          <a:bodyPr wrap="square">
+            <a:spAutoFit/>
+          </a:bodyPr>
+          <a:lstStyle/>
+          <a:p>
+            <a:pPr algn="l"/>
+            <a:r>
+              <a:rPr sz="2400" b="1" i="0">
+                <a:solidFill>
+                  <a:srgbClr val="0A1F2E"/>
                 </a:solidFill>
                 <a:latin typeface="Calibri"/>
               </a:rPr>
-              <a:t>•  Monitor World Bank GovTech challenge pages weekly</a:t>
-            </a:r>
-          </a:p>
-          <a:p>
-            <a:pPr>
-              <a:spcAft>
-                <a:spcPts val="800"/>
-              </a:spcAft>
-            </a:pPr>
-            <a:r>
-              <a:rPr sz="1500">
-                <a:solidFill>
-                  <a:srgbClr val="1E2F38"/>
-                </a:solidFill>
-                <a:latin typeface="Calibri"/>
-              </a:rPr>
-              <a:t>•  Submit tailored proposals only for health / Africa-aligned challenges</a:t>
-            </a:r>
-          </a:p>
-          <a:p>
-            <a:pPr>
-              <a:spcAft>
-                <a:spcPts val="800"/>
-              </a:spcAft>
-            </a:pPr>
-            <a:r>
-              <a:rPr sz="1500">
-                <a:solidFill>
-                  <a:srgbClr val="1E2F38"/>
-                </a:solidFill>
-                <a:latin typeface="Calibri"/>
-              </a:rPr>
-              <a:t>•  If selected: co-design PoC with government partner and measure decision-cycle gains</a:t>
+              <a:t>Managers see hotspots and coverage gaps</a:t>
             </a:r>
           </a:p>
         </p:txBody>
       </p:sp>
       <p:pic>
         <p:nvPicPr>
-          <p:cNvPr id="7" name="Picture 6" descr="indoor_training_staff_presenting_01_opt.jpg"/>
+          <p:cNvPr id="6" name="Picture 5" descr="gis_hotspots_opt.jpg"/>
           <p:cNvPicPr>
             <a:picLocks noChangeAspect="1"/>
           </p:cNvPicPr>
@@ -6550,14 +6162,52 @@
         </p:blipFill>
         <p:spPr>
           <a:xfrm>
-            <a:off x="6492240" y="2035160"/>
-            <a:ext cx="5212080" cy="3473479"/>
+            <a:off x="411480" y="1783733"/>
+            <a:ext cx="5486400" cy="3656293"/>
           </a:xfrm>
           <a:prstGeom prst="rect">
             <a:avLst/>
           </a:prstGeom>
         </p:spPr>
       </p:pic>
+      <p:sp>
+        <p:nvSpPr>
+          <p:cNvPr id="7" name="TextBox 6"/>
+          <p:cNvSpPr txBox="1"/>
+          <p:nvPr/>
+        </p:nvSpPr>
+        <p:spPr>
+          <a:xfrm>
+            <a:off x="6217920" y="1097280"/>
+            <a:ext cx="5669280" cy="5029200"/>
+          </a:xfrm>
+          <a:prstGeom prst="rect">
+            <a:avLst/>
+          </a:prstGeom>
+          <a:noFill/>
+        </p:spPr>
+        <p:txBody>
+          <a:bodyPr wrap="square">
+            <a:spAutoFit/>
+          </a:bodyPr>
+          <a:lstStyle/>
+          <a:p>
+            <a:pPr algn="l"/>
+            <a:r>
+              <a:rPr sz="1600" b="0" i="0">
+                <a:solidFill>
+                  <a:srgbClr val="1E2F38"/>
+                </a:solidFill>
+                <a:latin typeface="Calibri"/>
+              </a:rPr>
+              <a:t>• Population risk views
+• Early-warning alerts
+• CHW validation rules
+• Export hooks for national systems where permitted</a:t>
+            </a:r>
+          </a:p>
+        </p:txBody>
+      </p:sp>
       <p:sp>
         <p:nvSpPr>
           <p:cNvPr id="8" name="Rectangle 7"/>
@@ -6566,8 +6216,8 @@
         </p:nvSpPr>
         <p:spPr>
           <a:xfrm>
-            <a:off x="0" y="6565392"/>
-            <a:ext cx="12191695" cy="292608"/>
+            <a:off x="0" y="6583680"/>
+            <a:ext cx="12191695" cy="274320"/>
           </a:xfrm>
           <a:prstGeom prst="rect">
             <a:avLst/>
@@ -6578,7 +6228,6 @@
           <a:ln>
             <a:noFill/>
           </a:ln>
-          <a:effectLst/>
         </p:spPr>
         <p:style>
           <a:lnRef idx="1">
@@ -6610,8 +6259,8 @@
         </p:nvSpPr>
         <p:spPr>
           <a:xfrm>
-            <a:off x="365760" y="6574536"/>
-            <a:ext cx="9144000" cy="274320"/>
+            <a:off x="365760" y="6592824"/>
+            <a:ext cx="9144000" cy="256032"/>
           </a:xfrm>
           <a:prstGeom prst="rect">
             <a:avLst/>
@@ -6619,16 +6268,12 @@
           <a:noFill/>
         </p:spPr>
         <p:txBody>
-          <a:bodyPr wrap="square" anchor="ctr">
+          <a:bodyPr wrap="square">
             <a:spAutoFit/>
           </a:bodyPr>
           <a:lstStyle/>
           <a:p>
-            <a:pPr algn="l">
-              <a:spcAft>
-                <a:spcPts val="0"/>
-              </a:spcAft>
-            </a:pPr>
+            <a:pPr algn="l"/>
             <a:r>
               <a:rPr sz="900" b="0" i="0">
                 <a:solidFill>
@@ -6636,7 +6281,7 @@
                 </a:solidFill>
                 <a:latin typeface="Calibri"/>
               </a:rPr>
-              <a:t>FairBanks FCHIP  |  World Bank GovTech Innovation Challenge   |  Your health, our mission.</a:t>
+              <a:t>FairBanks FCHIP | GovTech Readiness | Your health, our mission.</a:t>
             </a:r>
           </a:p>
         </p:txBody>
@@ -6649,8 +6294,8 @@
         </p:nvSpPr>
         <p:spPr>
           <a:xfrm>
-            <a:off x="11094415" y="6574536"/>
-            <a:ext cx="731520" cy="274320"/>
+            <a:off x="11460175" y="6592824"/>
+            <a:ext cx="457200" cy="256032"/>
           </a:xfrm>
           <a:prstGeom prst="rect">
             <a:avLst/>
@@ -6658,16 +6303,12 @@
           <a:noFill/>
         </p:spPr>
         <p:txBody>
-          <a:bodyPr wrap="square" anchor="ctr">
+          <a:bodyPr wrap="square">
             <a:spAutoFit/>
           </a:bodyPr>
           <a:lstStyle/>
           <a:p>
-            <a:pPr algn="r">
-              <a:spcAft>
-                <a:spcPts val="0"/>
-              </a:spcAft>
-            </a:pPr>
+            <a:pPr algn="r"/>
             <a:r>
               <a:rPr sz="900" b="0" i="0">
                 <a:solidFill>
@@ -6707,7 +6348,7 @@
         <p:spPr>
           <a:xfrm>
             <a:off x="0" y="0"/>
-            <a:ext cx="12191695" cy="960120"/>
+            <a:ext cx="12191695" cy="914400"/>
           </a:xfrm>
           <a:prstGeom prst="rect">
             <a:avLst/>
@@ -6718,7 +6359,6 @@
           <a:ln>
             <a:noFill/>
           </a:ln>
-          <a:effectLst/>
         </p:spPr>
         <p:style>
           <a:lnRef idx="1">
@@ -6751,7 +6391,7 @@
         <p:spPr>
           <a:xfrm>
             <a:off x="0" y="0"/>
-            <a:ext cx="164592" cy="960120"/>
+            <a:ext cx="137160" cy="914400"/>
           </a:xfrm>
           <a:prstGeom prst="rect">
             <a:avLst/>
@@ -6762,7 +6402,6 @@
           <a:ln>
             <a:noFill/>
           </a:ln>
-          <a:effectLst/>
         </p:spPr>
         <p:style>
           <a:lnRef idx="1">
@@ -6794,8 +6433,8 @@
         </p:nvSpPr>
         <p:spPr>
           <a:xfrm>
-            <a:off x="457200" y="109728"/>
-            <a:ext cx="10972800" cy="256032"/>
+            <a:off x="411480" y="91440"/>
+            <a:ext cx="10972800" cy="274320"/>
           </a:xfrm>
           <a:prstGeom prst="rect">
             <a:avLst/>
@@ -6803,16 +6442,12 @@
           <a:noFill/>
         </p:spPr>
         <p:txBody>
-          <a:bodyPr wrap="square" anchor="t">
+          <a:bodyPr wrap="square">
             <a:spAutoFit/>
           </a:bodyPr>
           <a:lstStyle/>
           <a:p>
-            <a:pPr algn="l">
-              <a:spcAft>
-                <a:spcPts val="0"/>
-              </a:spcAft>
-            </a:pPr>
+            <a:pPr algn="l"/>
             <a:r>
               <a:rPr sz="1100" b="1" i="0">
                 <a:solidFill>
@@ -6820,7 +6455,7 @@
                 </a:solidFill>
                 <a:latin typeface="Calibri"/>
               </a:rPr>
-              <a:t>DEEP TECHNOLOGY</a:t>
+              <a:t>OPERATOR ADVANTAGE</a:t>
             </a:r>
           </a:p>
         </p:txBody>
@@ -6833,8 +6468,8 @@
         </p:nvSpPr>
         <p:spPr>
           <a:xfrm>
-            <a:off x="457200" y="384048"/>
-            <a:ext cx="11247120" cy="475488"/>
+            <a:off x="411480" y="384048"/>
+            <a:ext cx="10972800" cy="457200"/>
           </a:xfrm>
           <a:prstGeom prst="rect">
             <a:avLst/>
@@ -6842,31 +6477,27 @@
           <a:noFill/>
         </p:spPr>
         <p:txBody>
-          <a:bodyPr wrap="square" anchor="t">
+          <a:bodyPr wrap="square">
             <a:spAutoFit/>
           </a:bodyPr>
           <a:lstStyle/>
           <a:p>
-            <a:pPr algn="l">
-              <a:spcAft>
-                <a:spcPts val="0"/>
-              </a:spcAft>
-            </a:pPr>
-            <a:r>
-              <a:rPr sz="2200" b="1" i="0">
+            <a:pPr algn="l"/>
+            <a:r>
+              <a:rPr sz="2400" b="1" i="0">
                 <a:solidFill>
                   <a:srgbClr val="0A1F2E"/>
                 </a:solidFill>
                 <a:latin typeface="Calibri"/>
               </a:rPr>
-              <a:t>Intelligence rooted in African community care</a:t>
+              <a:t>Clinic + community — not software alone</a:t>
             </a:r>
           </a:p>
         </p:txBody>
       </p:sp>
       <p:pic>
         <p:nvPicPr>
-          <p:cNvPr id="6" name="Picture 5" descr="deep_tech_collage_opt.jpg"/>
+          <p:cNvPr id="6" name="Picture 5" descr="outreach_facilitator_canopy_01_opt.jpg"/>
           <p:cNvPicPr>
             <a:picLocks noChangeAspect="1"/>
           </p:cNvPicPr>
@@ -6880,8 +6511,8 @@
         </p:blipFill>
         <p:spPr>
           <a:xfrm>
-            <a:off x="411480" y="2065630"/>
-            <a:ext cx="5120640" cy="3412540"/>
+            <a:off x="411480" y="1844671"/>
+            <a:ext cx="5303520" cy="3534417"/>
           </a:xfrm>
           <a:prstGeom prst="rect">
             <a:avLst/>
@@ -6890,60 +6521,14 @@
       </p:pic>
       <p:sp>
         <p:nvSpPr>
-          <p:cNvPr id="7" name="Rectangle 6"/>
-          <p:cNvSpPr/>
-          <p:nvPr/>
-        </p:nvSpPr>
-        <p:spPr>
-          <a:xfrm>
-            <a:off x="5852160" y="1197864"/>
-            <a:ext cx="5852160" cy="766572"/>
-          </a:xfrm>
-          <a:prstGeom prst="rect">
-            <a:avLst/>
-          </a:prstGeom>
-          <a:solidFill>
-            <a:srgbClr val="FFFFFF"/>
-          </a:solidFill>
-          <a:ln w="9525">
-            <a:solidFill>
-              <a:srgbClr val="D0DCDC"/>
-            </a:solidFill>
-          </a:ln>
-          <a:effectLst/>
-        </p:spPr>
-        <p:style>
-          <a:lnRef idx="1">
-            <a:schemeClr val="accent1"/>
-          </a:lnRef>
-          <a:fillRef idx="3">
-            <a:schemeClr val="accent1"/>
-          </a:fillRef>
-          <a:effectRef idx="2">
-            <a:schemeClr val="accent1"/>
-          </a:effectRef>
-          <a:fontRef idx="minor">
-            <a:schemeClr val="lt1"/>
-          </a:fontRef>
-        </p:style>
-        <p:txBody>
-          <a:bodyPr rtlCol="0" anchor="ctr"/>
-          <a:lstStyle/>
-          <a:p>
-            <a:pPr algn="ctr"/>
-          </a:p>
-        </p:txBody>
-      </p:sp>
-      <p:sp>
-        <p:nvSpPr>
-          <p:cNvPr id="8" name="TextBox 7"/>
+          <p:cNvPr id="7" name="TextBox 6"/>
           <p:cNvSpPr txBox="1"/>
           <p:nvPr/>
         </p:nvSpPr>
         <p:spPr>
           <a:xfrm>
-            <a:off x="6035040" y="1252728"/>
-            <a:ext cx="5486400" cy="274320"/>
+            <a:off x="5943600" y="1097280"/>
+            <a:ext cx="5760720" cy="5029200"/>
           </a:xfrm>
           <a:prstGeom prst="rect">
             <a:avLst/>
@@ -6951,697 +6536,37 @@
           <a:noFill/>
         </p:spPr>
         <p:txBody>
-          <a:bodyPr wrap="square" anchor="t">
+          <a:bodyPr wrap="square">
             <a:spAutoFit/>
           </a:bodyPr>
           <a:lstStyle/>
           <a:p>
-            <a:pPr algn="l">
-              <a:spcAft>
-                <a:spcPts val="0"/>
-              </a:spcAft>
-            </a:pPr>
-            <a:r>
-              <a:rPr sz="1400" b="1" i="0">
-                <a:solidFill>
-                  <a:srgbClr val="0D6E6E"/>
+            <a:pPr algn="l"/>
+            <a:r>
+              <a:rPr sz="1600" b="0" i="0">
+                <a:solidFill>
+                  <a:srgbClr val="1E2F38"/>
                 </a:solidFill>
                 <a:latin typeface="Calibri"/>
               </a:rPr>
-              <a:t>Artificial Intelligence</a:t>
-            </a:r>
-          </a:p>
-        </p:txBody>
-      </p:sp>
-      <p:sp>
-        <p:nvSpPr>
-          <p:cNvPr id="9" name="TextBox 8"/>
-          <p:cNvSpPr txBox="1"/>
-          <p:nvPr/>
-        </p:nvSpPr>
-        <p:spPr>
-          <a:xfrm>
-            <a:off x="6035040" y="1527048"/>
-            <a:ext cx="5486400" cy="365760"/>
-          </a:xfrm>
-          <a:prstGeom prst="rect">
-            <a:avLst/>
-          </a:prstGeom>
-          <a:noFill/>
-        </p:spPr>
-        <p:txBody>
-          <a:bodyPr wrap="square" anchor="t">
-            <a:spAutoFit/>
-          </a:bodyPr>
-          <a:lstStyle/>
-          <a:p>
-            <a:pPr algn="l">
-              <a:spcAft>
-                <a:spcPts val="0"/>
-              </a:spcAft>
-            </a:pPr>
-            <a:r>
-              <a:rPr sz="1200" b="0" i="0">
-                <a:solidFill>
-                  <a:srgbClr val="3A4A54"/>
-                </a:solidFill>
-                <a:latin typeface="Calibri"/>
-              </a:rPr>
-              <a:t>Outbreak early warning; maternal and NCD risk scoring</a:t>
-            </a:r>
-          </a:p>
-        </p:txBody>
-      </p:sp>
-      <p:sp>
-        <p:nvSpPr>
-          <p:cNvPr id="10" name="Rectangle 9"/>
+              <a:t>• FairBanks Medical Centre + Community Reach
+• CHW/VHT networks and outreach programmes
+• Team ready for bootcamp if selected
+• PoC measured in real manager workflows</a:t>
+            </a:r>
+          </a:p>
+        </p:txBody>
+      </p:sp>
+      <p:sp>
+        <p:nvSpPr>
+          <p:cNvPr id="8" name="Rectangle 7"/>
           <p:cNvSpPr/>
           <p:nvPr/>
         </p:nvSpPr>
         <p:spPr>
           <a:xfrm>
-            <a:off x="5852160" y="2074164"/>
-            <a:ext cx="5852160" cy="766572"/>
-          </a:xfrm>
-          <a:prstGeom prst="rect">
-            <a:avLst/>
-          </a:prstGeom>
-          <a:solidFill>
-            <a:srgbClr val="FFFFFF"/>
-          </a:solidFill>
-          <a:ln w="9525">
-            <a:solidFill>
-              <a:srgbClr val="D0DCDC"/>
-            </a:solidFill>
-          </a:ln>
-          <a:effectLst/>
-        </p:spPr>
-        <p:style>
-          <a:lnRef idx="1">
-            <a:schemeClr val="accent1"/>
-          </a:lnRef>
-          <a:fillRef idx="3">
-            <a:schemeClr val="accent1"/>
-          </a:fillRef>
-          <a:effectRef idx="2">
-            <a:schemeClr val="accent1"/>
-          </a:effectRef>
-          <a:fontRef idx="minor">
-            <a:schemeClr val="lt1"/>
-          </a:fontRef>
-        </p:style>
-        <p:txBody>
-          <a:bodyPr rtlCol="0" anchor="ctr"/>
-          <a:lstStyle/>
-          <a:p>
-            <a:pPr algn="ctr"/>
-          </a:p>
-        </p:txBody>
-      </p:sp>
-      <p:sp>
-        <p:nvSpPr>
-          <p:cNvPr id="11" name="TextBox 10"/>
-          <p:cNvSpPr txBox="1"/>
-          <p:nvPr/>
-        </p:nvSpPr>
-        <p:spPr>
-          <a:xfrm>
-            <a:off x="6035040" y="2129028"/>
-            <a:ext cx="5486400" cy="274320"/>
-          </a:xfrm>
-          <a:prstGeom prst="rect">
-            <a:avLst/>
-          </a:prstGeom>
-          <a:noFill/>
-        </p:spPr>
-        <p:txBody>
-          <a:bodyPr wrap="square" anchor="t">
-            <a:spAutoFit/>
-          </a:bodyPr>
-          <a:lstStyle/>
-          <a:p>
-            <a:pPr algn="l">
-              <a:spcAft>
-                <a:spcPts val="0"/>
-              </a:spcAft>
-            </a:pPr>
-            <a:r>
-              <a:rPr sz="1400" b="1" i="0">
-                <a:solidFill>
-                  <a:srgbClr val="0D6E6E"/>
-                </a:solidFill>
-                <a:latin typeface="Calibri"/>
-              </a:rPr>
-              <a:t>Machine Learning</a:t>
-            </a:r>
-          </a:p>
-        </p:txBody>
-      </p:sp>
-      <p:sp>
-        <p:nvSpPr>
-          <p:cNvPr id="12" name="TextBox 11"/>
-          <p:cNvSpPr txBox="1"/>
-          <p:nvPr/>
-        </p:nvSpPr>
-        <p:spPr>
-          <a:xfrm>
-            <a:off x="6035040" y="2403348"/>
-            <a:ext cx="5486400" cy="365760"/>
-          </a:xfrm>
-          <a:prstGeom prst="rect">
-            <a:avLst/>
-          </a:prstGeom>
-          <a:noFill/>
-        </p:spPr>
-        <p:txBody>
-          <a:bodyPr wrap="square" anchor="t">
-            <a:spAutoFit/>
-          </a:bodyPr>
-          <a:lstStyle/>
-          <a:p>
-            <a:pPr algn="l">
-              <a:spcAft>
-                <a:spcPts val="0"/>
-              </a:spcAft>
-            </a:pPr>
-            <a:r>
-              <a:rPr sz="1200" b="0" i="0">
-                <a:solidFill>
-                  <a:srgbClr val="3A4A54"/>
-                </a:solidFill>
-                <a:latin typeface="Calibri"/>
-              </a:rPr>
-              <a:t>Learn from community patterns, seasons, and outreach outcomes</a:t>
-            </a:r>
-          </a:p>
-        </p:txBody>
-      </p:sp>
-      <p:sp>
-        <p:nvSpPr>
-          <p:cNvPr id="13" name="Rectangle 12"/>
-          <p:cNvSpPr/>
-          <p:nvPr/>
-        </p:nvSpPr>
-        <p:spPr>
-          <a:xfrm>
-            <a:off x="5852160" y="2950464"/>
-            <a:ext cx="5852160" cy="766572"/>
-          </a:xfrm>
-          <a:prstGeom prst="rect">
-            <a:avLst/>
-          </a:prstGeom>
-          <a:solidFill>
-            <a:srgbClr val="FFFFFF"/>
-          </a:solidFill>
-          <a:ln w="9525">
-            <a:solidFill>
-              <a:srgbClr val="D0DCDC"/>
-            </a:solidFill>
-          </a:ln>
-          <a:effectLst/>
-        </p:spPr>
-        <p:style>
-          <a:lnRef idx="1">
-            <a:schemeClr val="accent1"/>
-          </a:lnRef>
-          <a:fillRef idx="3">
-            <a:schemeClr val="accent1"/>
-          </a:fillRef>
-          <a:effectRef idx="2">
-            <a:schemeClr val="accent1"/>
-          </a:effectRef>
-          <a:fontRef idx="minor">
-            <a:schemeClr val="lt1"/>
-          </a:fontRef>
-        </p:style>
-        <p:txBody>
-          <a:bodyPr rtlCol="0" anchor="ctr"/>
-          <a:lstStyle/>
-          <a:p>
-            <a:pPr algn="ctr"/>
-          </a:p>
-        </p:txBody>
-      </p:sp>
-      <p:sp>
-        <p:nvSpPr>
-          <p:cNvPr id="14" name="TextBox 13"/>
-          <p:cNvSpPr txBox="1"/>
-          <p:nvPr/>
-        </p:nvSpPr>
-        <p:spPr>
-          <a:xfrm>
-            <a:off x="6035040" y="3005328"/>
-            <a:ext cx="5486400" cy="274320"/>
-          </a:xfrm>
-          <a:prstGeom prst="rect">
-            <a:avLst/>
-          </a:prstGeom>
-          <a:noFill/>
-        </p:spPr>
-        <p:txBody>
-          <a:bodyPr wrap="square" anchor="t">
-            <a:spAutoFit/>
-          </a:bodyPr>
-          <a:lstStyle/>
-          <a:p>
-            <a:pPr algn="l">
-              <a:spcAft>
-                <a:spcPts val="0"/>
-              </a:spcAft>
-            </a:pPr>
-            <a:r>
-              <a:rPr sz="1400" b="1" i="0">
-                <a:solidFill>
-                  <a:srgbClr val="0D6E6E"/>
-                </a:solidFill>
-                <a:latin typeface="Calibri"/>
-              </a:rPr>
-              <a:t>GIS Mapping</a:t>
-            </a:r>
-          </a:p>
-        </p:txBody>
-      </p:sp>
-      <p:sp>
-        <p:nvSpPr>
-          <p:cNvPr id="15" name="TextBox 14"/>
-          <p:cNvSpPr txBox="1"/>
-          <p:nvPr/>
-        </p:nvSpPr>
-        <p:spPr>
-          <a:xfrm>
-            <a:off x="6035040" y="3279648"/>
-            <a:ext cx="5486400" cy="365760"/>
-          </a:xfrm>
-          <a:prstGeom prst="rect">
-            <a:avLst/>
-          </a:prstGeom>
-          <a:noFill/>
-        </p:spPr>
-        <p:txBody>
-          <a:bodyPr wrap="square" anchor="t">
-            <a:spAutoFit/>
-          </a:bodyPr>
-          <a:lstStyle/>
-          <a:p>
-            <a:pPr algn="l">
-              <a:spcAft>
-                <a:spcPts val="0"/>
-              </a:spcAft>
-            </a:pPr>
-            <a:r>
-              <a:rPr sz="1200" b="0" i="0">
-                <a:solidFill>
-                  <a:srgbClr val="3A4A54"/>
-                </a:solidFill>
-                <a:latin typeface="Calibri"/>
-              </a:rPr>
-              <a:t>Disease distribution, hotspots, and resource gaps</a:t>
-            </a:r>
-          </a:p>
-        </p:txBody>
-      </p:sp>
-      <p:sp>
-        <p:nvSpPr>
-          <p:cNvPr id="16" name="Rectangle 15"/>
-          <p:cNvSpPr/>
-          <p:nvPr/>
-        </p:nvSpPr>
-        <p:spPr>
-          <a:xfrm>
-            <a:off x="5852160" y="3826764"/>
-            <a:ext cx="5852160" cy="766572"/>
-          </a:xfrm>
-          <a:prstGeom prst="rect">
-            <a:avLst/>
-          </a:prstGeom>
-          <a:solidFill>
-            <a:srgbClr val="FFFFFF"/>
-          </a:solidFill>
-          <a:ln w="9525">
-            <a:solidFill>
-              <a:srgbClr val="D0DCDC"/>
-            </a:solidFill>
-          </a:ln>
-          <a:effectLst/>
-        </p:spPr>
-        <p:style>
-          <a:lnRef idx="1">
-            <a:schemeClr val="accent1"/>
-          </a:lnRef>
-          <a:fillRef idx="3">
-            <a:schemeClr val="accent1"/>
-          </a:fillRef>
-          <a:effectRef idx="2">
-            <a:schemeClr val="accent1"/>
-          </a:effectRef>
-          <a:fontRef idx="minor">
-            <a:schemeClr val="lt1"/>
-          </a:fontRef>
-        </p:style>
-        <p:txBody>
-          <a:bodyPr rtlCol="0" anchor="ctr"/>
-          <a:lstStyle/>
-          <a:p>
-            <a:pPr algn="ctr"/>
-          </a:p>
-        </p:txBody>
-      </p:sp>
-      <p:sp>
-        <p:nvSpPr>
-          <p:cNvPr id="17" name="TextBox 16"/>
-          <p:cNvSpPr txBox="1"/>
-          <p:nvPr/>
-        </p:nvSpPr>
-        <p:spPr>
-          <a:xfrm>
-            <a:off x="6035040" y="3881628"/>
-            <a:ext cx="5486400" cy="274320"/>
-          </a:xfrm>
-          <a:prstGeom prst="rect">
-            <a:avLst/>
-          </a:prstGeom>
-          <a:noFill/>
-        </p:spPr>
-        <p:txBody>
-          <a:bodyPr wrap="square" anchor="t">
-            <a:spAutoFit/>
-          </a:bodyPr>
-          <a:lstStyle/>
-          <a:p>
-            <a:pPr algn="l">
-              <a:spcAft>
-                <a:spcPts val="0"/>
-              </a:spcAft>
-            </a:pPr>
-            <a:r>
-              <a:rPr sz="1400" b="1" i="0">
-                <a:solidFill>
-                  <a:srgbClr val="0D6E6E"/>
-                </a:solidFill>
-                <a:latin typeface="Calibri"/>
-              </a:rPr>
-              <a:t>Mobile Data Collection</a:t>
-            </a:r>
-          </a:p>
-        </p:txBody>
-      </p:sp>
-      <p:sp>
-        <p:nvSpPr>
-          <p:cNvPr id="18" name="TextBox 17"/>
-          <p:cNvSpPr txBox="1"/>
-          <p:nvPr/>
-        </p:nvSpPr>
-        <p:spPr>
-          <a:xfrm>
-            <a:off x="6035040" y="4155948"/>
-            <a:ext cx="5486400" cy="365760"/>
-          </a:xfrm>
-          <a:prstGeom prst="rect">
-            <a:avLst/>
-          </a:prstGeom>
-          <a:noFill/>
-        </p:spPr>
-        <p:txBody>
-          <a:bodyPr wrap="square" anchor="t">
-            <a:spAutoFit/>
-          </a:bodyPr>
-          <a:lstStyle/>
-          <a:p>
-            <a:pPr algn="l">
-              <a:spcAft>
-                <a:spcPts val="0"/>
-              </a:spcAft>
-            </a:pPr>
-            <a:r>
-              <a:rPr sz="1200" b="0" i="0">
-                <a:solidFill>
-                  <a:srgbClr val="3A4A54"/>
-                </a:solidFill>
-                <a:latin typeface="Calibri"/>
-              </a:rPr>
-              <a:t>Offline-capable CHW/VHT capture at household level</a:t>
-            </a:r>
-          </a:p>
-        </p:txBody>
-      </p:sp>
-      <p:sp>
-        <p:nvSpPr>
-          <p:cNvPr id="19" name="Rectangle 18"/>
-          <p:cNvSpPr/>
-          <p:nvPr/>
-        </p:nvSpPr>
-        <p:spPr>
-          <a:xfrm>
-            <a:off x="5852160" y="4703064"/>
-            <a:ext cx="5852160" cy="766572"/>
-          </a:xfrm>
-          <a:prstGeom prst="rect">
-            <a:avLst/>
-          </a:prstGeom>
-          <a:solidFill>
-            <a:srgbClr val="FFFFFF"/>
-          </a:solidFill>
-          <a:ln w="9525">
-            <a:solidFill>
-              <a:srgbClr val="D0DCDC"/>
-            </a:solidFill>
-          </a:ln>
-          <a:effectLst/>
-        </p:spPr>
-        <p:style>
-          <a:lnRef idx="1">
-            <a:schemeClr val="accent1"/>
-          </a:lnRef>
-          <a:fillRef idx="3">
-            <a:schemeClr val="accent1"/>
-          </a:fillRef>
-          <a:effectRef idx="2">
-            <a:schemeClr val="accent1"/>
-          </a:effectRef>
-          <a:fontRef idx="minor">
-            <a:schemeClr val="lt1"/>
-          </a:fontRef>
-        </p:style>
-        <p:txBody>
-          <a:bodyPr rtlCol="0" anchor="ctr"/>
-          <a:lstStyle/>
-          <a:p>
-            <a:pPr algn="ctr"/>
-          </a:p>
-        </p:txBody>
-      </p:sp>
-      <p:sp>
-        <p:nvSpPr>
-          <p:cNvPr id="20" name="TextBox 19"/>
-          <p:cNvSpPr txBox="1"/>
-          <p:nvPr/>
-        </p:nvSpPr>
-        <p:spPr>
-          <a:xfrm>
-            <a:off x="6035040" y="4757928"/>
-            <a:ext cx="5486400" cy="274320"/>
-          </a:xfrm>
-          <a:prstGeom prst="rect">
-            <a:avLst/>
-          </a:prstGeom>
-          <a:noFill/>
-        </p:spPr>
-        <p:txBody>
-          <a:bodyPr wrap="square" anchor="t">
-            <a:spAutoFit/>
-          </a:bodyPr>
-          <a:lstStyle/>
-          <a:p>
-            <a:pPr algn="l">
-              <a:spcAft>
-                <a:spcPts val="0"/>
-              </a:spcAft>
-            </a:pPr>
-            <a:r>
-              <a:rPr sz="1400" b="1" i="0">
-                <a:solidFill>
-                  <a:srgbClr val="0D6E6E"/>
-                </a:solidFill>
-                <a:latin typeface="Calibri"/>
-              </a:rPr>
-              <a:t>Cloud Computing</a:t>
-            </a:r>
-          </a:p>
-        </p:txBody>
-      </p:sp>
-      <p:sp>
-        <p:nvSpPr>
-          <p:cNvPr id="21" name="TextBox 20"/>
-          <p:cNvSpPr txBox="1"/>
-          <p:nvPr/>
-        </p:nvSpPr>
-        <p:spPr>
-          <a:xfrm>
-            <a:off x="6035040" y="5032248"/>
-            <a:ext cx="5486400" cy="365760"/>
-          </a:xfrm>
-          <a:prstGeom prst="rect">
-            <a:avLst/>
-          </a:prstGeom>
-          <a:noFill/>
-        </p:spPr>
-        <p:txBody>
-          <a:bodyPr wrap="square" anchor="t">
-            <a:spAutoFit/>
-          </a:bodyPr>
-          <a:lstStyle/>
-          <a:p>
-            <a:pPr algn="l">
-              <a:spcAft>
-                <a:spcPts val="0"/>
-              </a:spcAft>
-            </a:pPr>
-            <a:r>
-              <a:rPr sz="1200" b="0" i="0">
-                <a:solidFill>
-                  <a:srgbClr val="3A4A54"/>
-                </a:solidFill>
-                <a:latin typeface="Calibri"/>
-              </a:rPr>
-              <a:t>Secure sync across facilities and partners</a:t>
-            </a:r>
-          </a:p>
-        </p:txBody>
-      </p:sp>
-      <p:sp>
-        <p:nvSpPr>
-          <p:cNvPr id="22" name="Rectangle 21"/>
-          <p:cNvSpPr/>
-          <p:nvPr/>
-        </p:nvSpPr>
-        <p:spPr>
-          <a:xfrm>
-            <a:off x="5852160" y="5579364"/>
-            <a:ext cx="5852160" cy="766572"/>
-          </a:xfrm>
-          <a:prstGeom prst="rect">
-            <a:avLst/>
-          </a:prstGeom>
-          <a:solidFill>
-            <a:srgbClr val="FFFFFF"/>
-          </a:solidFill>
-          <a:ln w="9525">
-            <a:solidFill>
-              <a:srgbClr val="D0DCDC"/>
-            </a:solidFill>
-          </a:ln>
-          <a:effectLst/>
-        </p:spPr>
-        <p:style>
-          <a:lnRef idx="1">
-            <a:schemeClr val="accent1"/>
-          </a:lnRef>
-          <a:fillRef idx="3">
-            <a:schemeClr val="accent1"/>
-          </a:fillRef>
-          <a:effectRef idx="2">
-            <a:schemeClr val="accent1"/>
-          </a:effectRef>
-          <a:fontRef idx="minor">
-            <a:schemeClr val="lt1"/>
-          </a:fontRef>
-        </p:style>
-        <p:txBody>
-          <a:bodyPr rtlCol="0" anchor="ctr"/>
-          <a:lstStyle/>
-          <a:p>
-            <a:pPr algn="ctr"/>
-          </a:p>
-        </p:txBody>
-      </p:sp>
-      <p:sp>
-        <p:nvSpPr>
-          <p:cNvPr id="23" name="TextBox 22"/>
-          <p:cNvSpPr txBox="1"/>
-          <p:nvPr/>
-        </p:nvSpPr>
-        <p:spPr>
-          <a:xfrm>
-            <a:off x="6035040" y="5634228"/>
-            <a:ext cx="5486400" cy="274320"/>
-          </a:xfrm>
-          <a:prstGeom prst="rect">
-            <a:avLst/>
-          </a:prstGeom>
-          <a:noFill/>
-        </p:spPr>
-        <p:txBody>
-          <a:bodyPr wrap="square" anchor="t">
-            <a:spAutoFit/>
-          </a:bodyPr>
-          <a:lstStyle/>
-          <a:p>
-            <a:pPr algn="l">
-              <a:spcAft>
-                <a:spcPts val="0"/>
-              </a:spcAft>
-            </a:pPr>
-            <a:r>
-              <a:rPr sz="1400" b="1" i="0">
-                <a:solidFill>
-                  <a:srgbClr val="0D6E6E"/>
-                </a:solidFill>
-                <a:latin typeface="Calibri"/>
-              </a:rPr>
-              <a:t>Analytics Dashboards</a:t>
-            </a:r>
-          </a:p>
-        </p:txBody>
-      </p:sp>
-      <p:sp>
-        <p:nvSpPr>
-          <p:cNvPr id="24" name="TextBox 23"/>
-          <p:cNvSpPr txBox="1"/>
-          <p:nvPr/>
-        </p:nvSpPr>
-        <p:spPr>
-          <a:xfrm>
-            <a:off x="6035040" y="5908548"/>
-            <a:ext cx="5486400" cy="365760"/>
-          </a:xfrm>
-          <a:prstGeom prst="rect">
-            <a:avLst/>
-          </a:prstGeom>
-          <a:noFill/>
-        </p:spPr>
-        <p:txBody>
-          <a:bodyPr wrap="square" anchor="t">
-            <a:spAutoFit/>
-          </a:bodyPr>
-          <a:lstStyle/>
-          <a:p>
-            <a:pPr algn="l">
-              <a:spcAft>
-                <a:spcPts val="0"/>
-              </a:spcAft>
-            </a:pPr>
-            <a:r>
-              <a:rPr sz="1200" b="0" i="0">
-                <a:solidFill>
-                  <a:srgbClr val="3A4A54"/>
-                </a:solidFill>
-                <a:latin typeface="Calibri"/>
-              </a:rPr>
-              <a:t>Real-time views for clinics, districts, and NGOs</a:t>
-            </a:r>
-          </a:p>
-        </p:txBody>
-      </p:sp>
-      <p:sp>
-        <p:nvSpPr>
-          <p:cNvPr id="25" name="Rectangle 24"/>
-          <p:cNvSpPr/>
-          <p:nvPr/>
-        </p:nvSpPr>
-        <p:spPr>
-          <a:xfrm>
-            <a:off x="0" y="6565392"/>
-            <a:ext cx="12191695" cy="292608"/>
+            <a:off x="0" y="6583680"/>
+            <a:ext cx="12191695" cy="274320"/>
           </a:xfrm>
           <a:prstGeom prst="rect">
             <a:avLst/>
@@ -7652,7 +6577,6 @@
           <a:ln>
             <a:noFill/>
           </a:ln>
-          <a:effectLst/>
         </p:spPr>
         <p:style>
           <a:lnRef idx="1">
@@ -7678,14 +6602,14 @@
       </p:sp>
       <p:sp>
         <p:nvSpPr>
-          <p:cNvPr id="26" name="TextBox 25"/>
+          <p:cNvPr id="9" name="TextBox 8"/>
           <p:cNvSpPr txBox="1"/>
           <p:nvPr/>
         </p:nvSpPr>
         <p:spPr>
           <a:xfrm>
-            <a:off x="365760" y="6574536"/>
-            <a:ext cx="9144000" cy="274320"/>
+            <a:off x="365760" y="6592824"/>
+            <a:ext cx="9144000" cy="256032"/>
           </a:xfrm>
           <a:prstGeom prst="rect">
             <a:avLst/>
@@ -7693,16 +6617,12 @@
           <a:noFill/>
         </p:spPr>
         <p:txBody>
-          <a:bodyPr wrap="square" anchor="ctr">
+          <a:bodyPr wrap="square">
             <a:spAutoFit/>
           </a:bodyPr>
           <a:lstStyle/>
           <a:p>
-            <a:pPr algn="l">
-              <a:spcAft>
-                <a:spcPts val="0"/>
-              </a:spcAft>
-            </a:pPr>
+            <a:pPr algn="l"/>
             <a:r>
               <a:rPr sz="900" b="0" i="0">
                 <a:solidFill>
@@ -7710,21 +6630,21 @@
                 </a:solidFill>
                 <a:latin typeface="Calibri"/>
               </a:rPr>
-              <a:t>FairBanks FCHIP  |  World Bank GovTech Innovation Challenge   |  Your health, our mission.</a:t>
-            </a:r>
-          </a:p>
-        </p:txBody>
-      </p:sp>
-      <p:sp>
-        <p:nvSpPr>
-          <p:cNvPr id="27" name="TextBox 26"/>
+              <a:t>FairBanks FCHIP | GovTech Readiness | Your health, our mission.</a:t>
+            </a:r>
+          </a:p>
+        </p:txBody>
+      </p:sp>
+      <p:sp>
+        <p:nvSpPr>
+          <p:cNvPr id="10" name="TextBox 9"/>
           <p:cNvSpPr txBox="1"/>
           <p:nvPr/>
         </p:nvSpPr>
         <p:spPr>
           <a:xfrm>
-            <a:off x="11094415" y="6574536"/>
-            <a:ext cx="731520" cy="274320"/>
+            <a:off x="11460175" y="6592824"/>
+            <a:ext cx="457200" cy="256032"/>
           </a:xfrm>
           <a:prstGeom prst="rect">
             <a:avLst/>
@@ -7732,16 +6652,12 @@
           <a:noFill/>
         </p:spPr>
         <p:txBody>
-          <a:bodyPr wrap="square" anchor="ctr">
+          <a:bodyPr wrap="square">
             <a:spAutoFit/>
           </a:bodyPr>
           <a:lstStyle/>
           <a:p>
-            <a:pPr algn="r">
-              <a:spcAft>
-                <a:spcPts val="0"/>
-              </a:spcAft>
-            </a:pPr>
+            <a:pPr algn="r"/>
             <a:r>
               <a:rPr sz="900" b="0" i="0">
                 <a:solidFill>
@@ -7781,7 +6697,7 @@
         <p:spPr>
           <a:xfrm>
             <a:off x="0" y="0"/>
-            <a:ext cx="12191695" cy="960120"/>
+            <a:ext cx="12191695" cy="914400"/>
           </a:xfrm>
           <a:prstGeom prst="rect">
             <a:avLst/>
@@ -7792,7 +6708,6 @@
           <a:ln>
             <a:noFill/>
           </a:ln>
-          <a:effectLst/>
         </p:spPr>
         <p:style>
           <a:lnRef idx="1">
@@ -7825,7 +6740,7 @@
         <p:spPr>
           <a:xfrm>
             <a:off x="0" y="0"/>
-            <a:ext cx="164592" cy="960120"/>
+            <a:ext cx="137160" cy="914400"/>
           </a:xfrm>
           <a:prstGeom prst="rect">
             <a:avLst/>
@@ -7836,7 +6751,6 @@
           <a:ln>
             <a:noFill/>
           </a:ln>
-          <a:effectLst/>
         </p:spPr>
         <p:style>
           <a:lnRef idx="1">
@@ -7868,86 +6782,8 @@
         </p:nvSpPr>
         <p:spPr>
           <a:xfrm>
-            <a:off x="457200" y="109728"/>
-            <a:ext cx="10972800" cy="256032"/>
-          </a:xfrm>
-          <a:prstGeom prst="rect">
-            <a:avLst/>
-          </a:prstGeom>
-          <a:noFill/>
-        </p:spPr>
-        <p:txBody>
-          <a:bodyPr wrap="square" anchor="t">
-            <a:spAutoFit/>
-          </a:bodyPr>
-          <a:lstStyle/>
-          <a:p>
-            <a:pPr algn="l">
-              <a:spcAft>
-                <a:spcPts val="0"/>
-              </a:spcAft>
-            </a:pPr>
-            <a:r>
-              <a:rPr sz="1100" b="1" i="0">
-                <a:solidFill>
-                  <a:srgbClr val="C45C26"/>
-                </a:solidFill>
-                <a:latin typeface="Calibri"/>
-              </a:rPr>
-              <a:t>OUR MODEL</a:t>
-            </a:r>
-          </a:p>
-        </p:txBody>
-      </p:sp>
-      <p:sp>
-        <p:nvSpPr>
-          <p:cNvPr id="5" name="TextBox 4"/>
-          <p:cNvSpPr txBox="1"/>
-          <p:nvPr/>
-        </p:nvSpPr>
-        <p:spPr>
-          <a:xfrm>
-            <a:off x="457200" y="384048"/>
-            <a:ext cx="11247120" cy="475488"/>
-          </a:xfrm>
-          <a:prstGeom prst="rect">
-            <a:avLst/>
-          </a:prstGeom>
-          <a:noFill/>
-        </p:spPr>
-        <p:txBody>
-          <a:bodyPr wrap="square" anchor="t">
-            <a:spAutoFit/>
-          </a:bodyPr>
-          <a:lstStyle/>
-          <a:p>
-            <a:pPr algn="l">
-              <a:spcAft>
-                <a:spcPts val="0"/>
-              </a:spcAft>
-            </a:pPr>
-            <a:r>
-              <a:rPr sz="2200" b="1" i="0">
-                <a:solidFill>
-                  <a:srgbClr val="0A1F2E"/>
-                </a:solidFill>
-                <a:latin typeface="Calibri"/>
-              </a:rPr>
-              <a:t>Communities first — intelligence that serves care</a:t>
-            </a:r>
-          </a:p>
-        </p:txBody>
-      </p:sp>
-      <p:sp>
-        <p:nvSpPr>
-          <p:cNvPr id="6" name="TextBox 5"/>
-          <p:cNvSpPr txBox="1"/>
-          <p:nvPr/>
-        </p:nvSpPr>
-        <p:spPr>
-          <a:xfrm>
-            <a:off x="502920" y="1234440"/>
-            <a:ext cx="5760720" cy="5074920"/>
+            <a:off x="411480" y="91440"/>
+            <a:ext cx="10972800" cy="274320"/>
           </a:xfrm>
           <a:prstGeom prst="rect">
             <a:avLst/>
@@ -7960,137 +6796,294 @@
           </a:bodyPr>
           <a:lstStyle/>
           <a:p>
-            <a:pPr>
-              <a:spcAft>
-                <a:spcPts val="800"/>
-              </a:spcAft>
-            </a:pPr>
-            <a:r>
-              <a:rPr sz="1400">
-                <a:solidFill>
-                  <a:srgbClr val="1E2F38"/>
+            <a:pPr algn="l"/>
+            <a:r>
+              <a:rPr sz="1100" b="1" i="0">
+                <a:solidFill>
+                  <a:srgbClr val="C45C26"/>
                 </a:solidFill>
                 <a:latin typeface="Calibri"/>
               </a:rPr>
-              <a:t>•  Community members identify needs and own solutions</a:t>
-            </a:r>
-          </a:p>
-          <a:p>
-            <a:pPr>
-              <a:spcAft>
-                <a:spcPts val="800"/>
-              </a:spcAft>
-            </a:pPr>
-            <a:r>
-              <a:rPr sz="1400">
-                <a:solidFill>
-                  <a:srgbClr val="1E2F38"/>
+              <a:t>WIN-WIN</a:t>
+            </a:r>
+          </a:p>
+        </p:txBody>
+      </p:sp>
+      <p:sp>
+        <p:nvSpPr>
+          <p:cNvPr id="5" name="TextBox 4"/>
+          <p:cNvSpPr txBox="1"/>
+          <p:nvPr/>
+        </p:nvSpPr>
+        <p:spPr>
+          <a:xfrm>
+            <a:off x="411480" y="384048"/>
+            <a:ext cx="10972800" cy="457200"/>
+          </a:xfrm>
+          <a:prstGeom prst="rect">
+            <a:avLst/>
+          </a:prstGeom>
+          <a:noFill/>
+        </p:spPr>
+        <p:txBody>
+          <a:bodyPr wrap="square">
+            <a:spAutoFit/>
+          </a:bodyPr>
+          <a:lstStyle/>
+          <a:p>
+            <a:pPr algn="l"/>
+            <a:r>
+              <a:rPr sz="2400" b="1" i="0">
+                <a:solidFill>
+                  <a:srgbClr val="0A1F2E"/>
                 </a:solidFill>
                 <a:latin typeface="Calibri"/>
               </a:rPr>
-              <a:t>•  CHWs / VHTs bridge homes to clinics</a:t>
-            </a:r>
-          </a:p>
-          <a:p>
-            <a:pPr>
-              <a:spcAft>
-                <a:spcPts val="800"/>
-              </a:spcAft>
-            </a:pPr>
-            <a:r>
-              <a:rPr sz="1400">
-                <a:solidFill>
-                  <a:srgbClr val="1E2F38"/>
+              <a:t>GovTech ↔ FairBanks ↔ districts</a:t>
+            </a:r>
+          </a:p>
+        </p:txBody>
+      </p:sp>
+      <p:sp>
+        <p:nvSpPr>
+          <p:cNvPr id="6" name="Rectangle 5"/>
+          <p:cNvSpPr/>
+          <p:nvPr/>
+        </p:nvSpPr>
+        <p:spPr>
+          <a:xfrm>
+            <a:off x="457200" y="1188720"/>
+            <a:ext cx="5394960" cy="4754880"/>
+          </a:xfrm>
+          <a:prstGeom prst="rect">
+            <a:avLst/>
+          </a:prstGeom>
+          <a:solidFill>
+            <a:srgbClr val="FFFFFF"/>
+          </a:solidFill>
+          <a:ln>
+            <a:solidFill>
+              <a:srgbClr val="D0DCDC"/>
+            </a:solidFill>
+          </a:ln>
+        </p:spPr>
+        <p:style>
+          <a:lnRef idx="1">
+            <a:schemeClr val="accent1"/>
+          </a:lnRef>
+          <a:fillRef idx="3">
+            <a:schemeClr val="accent1"/>
+          </a:fillRef>
+          <a:effectRef idx="2">
+            <a:schemeClr val="accent1"/>
+          </a:effectRef>
+          <a:fontRef idx="minor">
+            <a:schemeClr val="lt1"/>
+          </a:fontRef>
+        </p:style>
+        <p:txBody>
+          <a:bodyPr rtlCol="0" anchor="ctr"/>
+          <a:lstStyle/>
+          <a:p>
+            <a:pPr algn="ctr"/>
+          </a:p>
+        </p:txBody>
+      </p:sp>
+      <p:sp>
+        <p:nvSpPr>
+          <p:cNvPr id="7" name="TextBox 6"/>
+          <p:cNvSpPr txBox="1"/>
+          <p:nvPr/>
+        </p:nvSpPr>
+        <p:spPr>
+          <a:xfrm>
+            <a:off x="640080" y="1371600"/>
+            <a:ext cx="5029200" cy="365760"/>
+          </a:xfrm>
+          <a:prstGeom prst="rect">
+            <a:avLst/>
+          </a:prstGeom>
+          <a:noFill/>
+        </p:spPr>
+        <p:txBody>
+          <a:bodyPr wrap="square">
+            <a:spAutoFit/>
+          </a:bodyPr>
+          <a:lstStyle/>
+          <a:p>
+            <a:pPr algn="l"/>
+            <a:r>
+              <a:rPr sz="1600" b="1" i="0">
+                <a:solidFill>
+                  <a:srgbClr val="0D6E6E"/>
                 </a:solidFill>
                 <a:latin typeface="Calibri"/>
               </a:rPr>
-              <a:t>•  FairBanks Community Reach programmes deliver outreach</a:t>
-            </a:r>
-          </a:p>
-          <a:p>
-            <a:pPr>
-              <a:spcAft>
-                <a:spcPts val="800"/>
-              </a:spcAft>
-            </a:pPr>
-            <a:r>
-              <a:rPr sz="1400">
-                <a:solidFill>
-                  <a:srgbClr val="1E2F38"/>
+              <a:t>FairBanks gains</a:t>
+            </a:r>
+          </a:p>
+        </p:txBody>
+      </p:sp>
+      <p:sp>
+        <p:nvSpPr>
+          <p:cNvPr id="8" name="TextBox 7"/>
+          <p:cNvSpPr txBox="1"/>
+          <p:nvPr/>
+        </p:nvSpPr>
+        <p:spPr>
+          <a:xfrm>
+            <a:off x="640080" y="1828800"/>
+            <a:ext cx="5029200" cy="3657600"/>
+          </a:xfrm>
+          <a:prstGeom prst="rect">
+            <a:avLst/>
+          </a:prstGeom>
+          <a:noFill/>
+        </p:spPr>
+        <p:txBody>
+          <a:bodyPr wrap="square">
+            <a:spAutoFit/>
+          </a:bodyPr>
+          <a:lstStyle/>
+          <a:p>
+            <a:pPr algn="l"/>
+            <a:r>
+              <a:rPr sz="1400" b="0" i="0">
+                <a:solidFill>
+                  <a:srgbClr val="3A4A54"/>
                 </a:solidFill>
                 <a:latin typeface="Calibri"/>
               </a:rPr>
-              <a:t>•  FairBanks Medical Centre provides clinical care</a:t>
-            </a:r>
-          </a:p>
-          <a:p>
-            <a:pPr>
-              <a:spcAft>
-                <a:spcPts val="800"/>
-              </a:spcAft>
-            </a:pPr>
-            <a:r>
-              <a:rPr sz="1400">
-                <a:solidFill>
-                  <a:srgbClr val="1E2F38"/>
+              <a:t>Government PoC pathways; World Bank / SECO ecosystem visibility; learning that hardens FCHIP for public-sector deployment; bootcamp access if selected.</a:t>
+            </a:r>
+          </a:p>
+        </p:txBody>
+      </p:sp>
+      <p:sp>
+        <p:nvSpPr>
+          <p:cNvPr id="9" name="Rectangle 8"/>
+          <p:cNvSpPr/>
+          <p:nvPr/>
+        </p:nvSpPr>
+        <p:spPr>
+          <a:xfrm>
+            <a:off x="6217920" y="1188720"/>
+            <a:ext cx="5394960" cy="4754880"/>
+          </a:xfrm>
+          <a:prstGeom prst="rect">
+            <a:avLst/>
+          </a:prstGeom>
+          <a:solidFill>
+            <a:srgbClr val="FFFFFF"/>
+          </a:solidFill>
+          <a:ln>
+            <a:solidFill>
+              <a:srgbClr val="D0DCDC"/>
+            </a:solidFill>
+          </a:ln>
+        </p:spPr>
+        <p:style>
+          <a:lnRef idx="1">
+            <a:schemeClr val="accent1"/>
+          </a:lnRef>
+          <a:fillRef idx="3">
+            <a:schemeClr val="accent1"/>
+          </a:fillRef>
+          <a:effectRef idx="2">
+            <a:schemeClr val="accent1"/>
+          </a:effectRef>
+          <a:fontRef idx="minor">
+            <a:schemeClr val="lt1"/>
+          </a:fontRef>
+        </p:style>
+        <p:txBody>
+          <a:bodyPr rtlCol="0" anchor="ctr"/>
+          <a:lstStyle/>
+          <a:p>
+            <a:pPr algn="ctr"/>
+          </a:p>
+        </p:txBody>
+      </p:sp>
+      <p:sp>
+        <p:nvSpPr>
+          <p:cNvPr id="10" name="TextBox 9"/>
+          <p:cNvSpPr txBox="1"/>
+          <p:nvPr/>
+        </p:nvSpPr>
+        <p:spPr>
+          <a:xfrm>
+            <a:off x="6400800" y="1371600"/>
+            <a:ext cx="5029200" cy="365760"/>
+          </a:xfrm>
+          <a:prstGeom prst="rect">
+            <a:avLst/>
+          </a:prstGeom>
+          <a:noFill/>
+        </p:spPr>
+        <p:txBody>
+          <a:bodyPr wrap="square">
+            <a:spAutoFit/>
+          </a:bodyPr>
+          <a:lstStyle/>
+          <a:p>
+            <a:pPr algn="l"/>
+            <a:r>
+              <a:rPr sz="1600" b="1" i="0">
+                <a:solidFill>
+                  <a:srgbClr val="0D6E6E"/>
                 </a:solidFill>
                 <a:latin typeface="Calibri"/>
               </a:rPr>
-              <a:t>•  Research, partnerships, and skills strengthen the system</a:t>
-            </a:r>
-          </a:p>
-          <a:p>
-            <a:pPr>
-              <a:spcAft>
-                <a:spcPts val="800"/>
-              </a:spcAft>
-            </a:pPr>
-            <a:r>
-              <a:rPr sz="1400">
-                <a:solidFill>
-                  <a:srgbClr val="1E2F38"/>
+              <a:t>GovTech gains</a:t>
+            </a:r>
+          </a:p>
+        </p:txBody>
+      </p:sp>
+      <p:sp>
+        <p:nvSpPr>
+          <p:cNvPr id="11" name="TextBox 10"/>
+          <p:cNvSpPr txBox="1"/>
+          <p:nvPr/>
+        </p:nvSpPr>
+        <p:spPr>
+          <a:xfrm>
+            <a:off x="6400800" y="1828800"/>
+            <a:ext cx="5029200" cy="3657600"/>
+          </a:xfrm>
+          <a:prstGeom prst="rect">
+            <a:avLst/>
+          </a:prstGeom>
+          <a:noFill/>
+        </p:spPr>
+        <p:txBody>
+          <a:bodyPr wrap="square">
+            <a:spAutoFit/>
+          </a:bodyPr>
+          <a:lstStyle/>
+          <a:p>
+            <a:pPr algn="l"/>
+            <a:r>
+              <a:rPr sz="1400" b="0" i="0">
+                <a:solidFill>
+                  <a:srgbClr val="3A4A54"/>
                 </a:solidFill>
                 <a:latin typeface="Calibri"/>
               </a:rPr>
-              <a:t>•  Livelihoods and empowerment make health gains last</a:t>
-            </a:r>
-          </a:p>
-        </p:txBody>
-      </p:sp>
-      <p:pic>
-        <p:nvPicPr>
-          <p:cNvPr id="7" name="Picture 6" descr="gis_hotspots_opt.jpg"/>
-          <p:cNvPicPr>
-            <a:picLocks noChangeAspect="1"/>
-          </p:cNvPicPr>
-          <p:nvPr/>
-        </p:nvPicPr>
-        <p:blipFill>
-          <a:blip r:embed="rId2"/>
-          <a:stretch>
-            <a:fillRect/>
-          </a:stretch>
-        </p:blipFill>
-        <p:spPr>
-          <a:xfrm>
-            <a:off x="6492240" y="2035160"/>
-            <a:ext cx="5212080" cy="3473479"/>
-          </a:xfrm>
-          <a:prstGeom prst="rect">
-            <a:avLst/>
-          </a:prstGeom>
-        </p:spPr>
-      </p:pic>
-      <p:sp>
-        <p:nvSpPr>
-          <p:cNvPr id="8" name="Rectangle 7"/>
+              <a:t>Vendor that runs clinic and community operations — not only software; health intelligence use cases governments need; African implementer ready for co-design; reusable PoC patterns for district health offices.</a:t>
+            </a:r>
+          </a:p>
+        </p:txBody>
+      </p:sp>
+      <p:sp>
+        <p:nvSpPr>
+          <p:cNvPr id="12" name="Rectangle 11"/>
           <p:cNvSpPr/>
           <p:nvPr/>
         </p:nvSpPr>
         <p:spPr>
           <a:xfrm>
-            <a:off x="0" y="6565392"/>
-            <a:ext cx="12191695" cy="292608"/>
+            <a:off x="0" y="6583680"/>
+            <a:ext cx="12191695" cy="274320"/>
           </a:xfrm>
           <a:prstGeom prst="rect">
             <a:avLst/>
@@ -8101,7 +7094,6 @@
           <a:ln>
             <a:noFill/>
           </a:ln>
-          <a:effectLst/>
         </p:spPr>
         <p:style>
           <a:lnRef idx="1">
@@ -8127,14 +7119,14 @@
       </p:sp>
       <p:sp>
         <p:nvSpPr>
-          <p:cNvPr id="9" name="TextBox 8"/>
+          <p:cNvPr id="13" name="TextBox 12"/>
           <p:cNvSpPr txBox="1"/>
           <p:nvPr/>
         </p:nvSpPr>
         <p:spPr>
           <a:xfrm>
-            <a:off x="365760" y="6574536"/>
-            <a:ext cx="9144000" cy="274320"/>
+            <a:off x="365760" y="6592824"/>
+            <a:ext cx="9144000" cy="256032"/>
           </a:xfrm>
           <a:prstGeom prst="rect">
             <a:avLst/>
@@ -8142,16 +7134,12 @@
           <a:noFill/>
         </p:spPr>
         <p:txBody>
-          <a:bodyPr wrap="square" anchor="ctr">
+          <a:bodyPr wrap="square">
             <a:spAutoFit/>
           </a:bodyPr>
           <a:lstStyle/>
           <a:p>
-            <a:pPr algn="l">
-              <a:spcAft>
-                <a:spcPts val="0"/>
-              </a:spcAft>
-            </a:pPr>
+            <a:pPr algn="l"/>
             <a:r>
               <a:rPr sz="900" b="0" i="0">
                 <a:solidFill>
@@ -8159,21 +7147,21 @@
                 </a:solidFill>
                 <a:latin typeface="Calibri"/>
               </a:rPr>
-              <a:t>FairBanks FCHIP  |  World Bank GovTech Innovation Challenge   |  Your health, our mission.</a:t>
-            </a:r>
-          </a:p>
-        </p:txBody>
-      </p:sp>
-      <p:sp>
-        <p:nvSpPr>
-          <p:cNvPr id="10" name="TextBox 9"/>
+              <a:t>FairBanks FCHIP | GovTech Readiness | Your health, our mission.</a:t>
+            </a:r>
+          </a:p>
+        </p:txBody>
+      </p:sp>
+      <p:sp>
+        <p:nvSpPr>
+          <p:cNvPr id="14" name="TextBox 13"/>
           <p:cNvSpPr txBox="1"/>
           <p:nvPr/>
         </p:nvSpPr>
         <p:spPr>
           <a:xfrm>
-            <a:off x="11094415" y="6574536"/>
-            <a:ext cx="731520" cy="274320"/>
+            <a:off x="11460175" y="6592824"/>
+            <a:ext cx="457200" cy="256032"/>
           </a:xfrm>
           <a:prstGeom prst="rect">
             <a:avLst/>
@@ -8181,16 +7169,12 @@
           <a:noFill/>
         </p:spPr>
         <p:txBody>
-          <a:bodyPr wrap="square" anchor="ctr">
+          <a:bodyPr wrap="square">
             <a:spAutoFit/>
           </a:bodyPr>
           <a:lstStyle/>
           <a:p>
-            <a:pPr algn="r">
-              <a:spcAft>
-                <a:spcPts val="0"/>
-              </a:spcAft>
-            </a:pPr>
+            <a:pPr algn="r"/>
             <a:r>
               <a:rPr sz="900" b="0" i="0">
                 <a:solidFill>

--- a/applications/govtech/documents/govtech_ppt.pptx
+++ b/applications/govtech/documents/govtech_ppt.pptx
@@ -3208,7 +3208,7 @@
         <p:spPr>
           <a:xfrm>
             <a:off x="548640" y="4389120"/>
-            <a:ext cx="10972800" cy="594360"/>
+            <a:ext cx="10972800" cy="502920"/>
           </a:xfrm>
           <a:prstGeom prst="rect">
             <a:avLst/>
@@ -3223,7 +3223,7 @@
           <a:p>
             <a:pPr algn="l"/>
             <a:r>
-              <a:rPr sz="2400" b="1" i="0">
+              <a:rPr sz="2200" b="1" i="0">
                 <a:solidFill>
                   <a:srgbClr val="FFFFFF"/>
                 </a:solidFill>
@@ -3242,8 +3242,8 @@
         </p:nvSpPr>
         <p:spPr>
           <a:xfrm>
-            <a:off x="548640" y="5166360"/>
-            <a:ext cx="10972800" cy="365760"/>
+            <a:off x="548640" y="4892040"/>
+            <a:ext cx="10972800" cy="274320"/>
           </a:xfrm>
           <a:prstGeom prst="rect">
             <a:avLst/>
@@ -3258,6 +3258,41 @@
           <a:p>
             <a:pPr algn="l"/>
             <a:r>
+              <a:rPr sz="1300" b="1" i="1">
+                <a:solidFill>
+                  <a:srgbClr val="F2C79B"/>
+                </a:solidFill>
+                <a:latin typeface="Calibri"/>
+              </a:rPr>
+              <a:t>FairBanks Community Health Intelligence Platform (FCHIP)</a:t>
+            </a:r>
+          </a:p>
+        </p:txBody>
+      </p:sp>
+      <p:sp>
+        <p:nvSpPr>
+          <p:cNvPr id="7" name="TextBox 6"/>
+          <p:cNvSpPr txBox="1"/>
+          <p:nvPr/>
+        </p:nvSpPr>
+        <p:spPr>
+          <a:xfrm>
+            <a:off x="548640" y="5257800"/>
+            <a:ext cx="10972800" cy="320040"/>
+          </a:xfrm>
+          <a:prstGeom prst="rect">
+            <a:avLst/>
+          </a:prstGeom>
+          <a:noFill/>
+        </p:spPr>
+        <p:txBody>
+          <a:bodyPr wrap="square">
+            <a:spAutoFit/>
+          </a:bodyPr>
+          <a:lstStyle/>
+          <a:p>
+            <a:pPr algn="l"/>
+            <a:r>
               <a:rPr sz="1400" b="1" i="0">
                 <a:solidFill>
                   <a:srgbClr val="FFFFFF"/>
@@ -3271,7 +3306,7 @@
       </p:sp>
       <p:sp>
         <p:nvSpPr>
-          <p:cNvPr id="7" name="TextBox 6"/>
+          <p:cNvPr id="8" name="TextBox 7"/>
           <p:cNvSpPr txBox="1"/>
           <p:nvPr/>
         </p:nvSpPr>

--- a/applications/govtech/documents/govtech_ppt.pptx
+++ b/applications/govtech/documents/govtech_ppt.pptx
@@ -3186,7 +3186,17 @@
           </a:bodyPr>
           <a:lstStyle/>
           <a:p>
-            <a:pPr algn="l"/>
+            <a:pPr algn="l">
+              <a:lnSpc>
+                <a:spcPct val="115000"/>
+              </a:lnSpc>
+              <a:spcBef>
+                <a:spcPts val="0"/>
+              </a:spcBef>
+              <a:spcAft>
+                <a:spcPts val="200"/>
+              </a:spcAft>
+            </a:pPr>
             <a:r>
               <a:rPr sz="1300" b="1" i="0">
                 <a:solidFill>
@@ -3221,7 +3231,17 @@
           </a:bodyPr>
           <a:lstStyle/>
           <a:p>
-            <a:pPr algn="l"/>
+            <a:pPr algn="l">
+              <a:lnSpc>
+                <a:spcPct val="115000"/>
+              </a:lnSpc>
+              <a:spcBef>
+                <a:spcPts val="0"/>
+              </a:spcBef>
+              <a:spcAft>
+                <a:spcPts val="200"/>
+              </a:spcAft>
+            </a:pPr>
             <a:r>
               <a:rPr sz="2200" b="1" i="0">
                 <a:solidFill>
@@ -3256,7 +3276,17 @@
           </a:bodyPr>
           <a:lstStyle/>
           <a:p>
-            <a:pPr algn="l"/>
+            <a:pPr algn="l">
+              <a:lnSpc>
+                <a:spcPct val="115000"/>
+              </a:lnSpc>
+              <a:spcBef>
+                <a:spcPts val="0"/>
+              </a:spcBef>
+              <a:spcAft>
+                <a:spcPts val="200"/>
+              </a:spcAft>
+            </a:pPr>
             <a:r>
               <a:rPr sz="1300" b="1" i="1">
                 <a:solidFill>
@@ -3291,7 +3321,17 @@
           </a:bodyPr>
           <a:lstStyle/>
           <a:p>
-            <a:pPr algn="l"/>
+            <a:pPr algn="l">
+              <a:lnSpc>
+                <a:spcPct val="115000"/>
+              </a:lnSpc>
+              <a:spcBef>
+                <a:spcPts val="0"/>
+              </a:spcBef>
+              <a:spcAft>
+                <a:spcPts val="200"/>
+              </a:spcAft>
+            </a:pPr>
             <a:r>
               <a:rPr sz="1400" b="1" i="0">
                 <a:solidFill>
@@ -3326,7 +3366,17 @@
           </a:bodyPr>
           <a:lstStyle/>
           <a:p>
-            <a:pPr algn="l"/>
+            <a:pPr algn="l">
+              <a:lnSpc>
+                <a:spcPct val="115000"/>
+              </a:lnSpc>
+              <a:spcBef>
+                <a:spcPts val="0"/>
+              </a:spcBef>
+              <a:spcAft>
+                <a:spcPts val="200"/>
+              </a:spcAft>
+            </a:pPr>
             <a:r>
               <a:rPr sz="1100" b="0" i="0">
                 <a:solidFill>
@@ -3446,7 +3496,17 @@
           </a:bodyPr>
           <a:lstStyle/>
           <a:p>
-            <a:pPr algn="l"/>
+            <a:pPr algn="l">
+              <a:lnSpc>
+                <a:spcPct val="115000"/>
+              </a:lnSpc>
+              <a:spcBef>
+                <a:spcPts val="0"/>
+              </a:spcBef>
+              <a:spcAft>
+                <a:spcPts val="200"/>
+              </a:spcAft>
+            </a:pPr>
             <a:r>
               <a:rPr sz="2400" b="1" i="0">
                 <a:solidFill>
@@ -3481,7 +3541,17 @@
           </a:bodyPr>
           <a:lstStyle/>
           <a:p>
-            <a:pPr algn="l"/>
+            <a:pPr algn="l">
+              <a:lnSpc>
+                <a:spcPct val="115000"/>
+              </a:lnSpc>
+              <a:spcBef>
+                <a:spcPts val="0"/>
+              </a:spcBef>
+              <a:spcAft>
+                <a:spcPts val="200"/>
+              </a:spcAft>
+            </a:pPr>
             <a:r>
               <a:rPr sz="1400" b="1" i="0">
                 <a:solidFill>
@@ -3620,7 +3690,17 @@
           </a:bodyPr>
           <a:lstStyle/>
           <a:p>
-            <a:pPr algn="l"/>
+            <a:pPr algn="l">
+              <a:lnSpc>
+                <a:spcPct val="115000"/>
+              </a:lnSpc>
+              <a:spcBef>
+                <a:spcPts val="0"/>
+              </a:spcBef>
+              <a:spcAft>
+                <a:spcPts val="200"/>
+              </a:spcAft>
+            </a:pPr>
             <a:r>
               <a:rPr sz="1100" b="1" i="0">
                 <a:solidFill>
@@ -3655,7 +3735,17 @@
           </a:bodyPr>
           <a:lstStyle/>
           <a:p>
-            <a:pPr algn="l"/>
+            <a:pPr algn="l">
+              <a:lnSpc>
+                <a:spcPct val="115000"/>
+              </a:lnSpc>
+              <a:spcBef>
+                <a:spcPts val="0"/>
+              </a:spcBef>
+              <a:spcAft>
+                <a:spcPts val="200"/>
+              </a:spcAft>
+            </a:pPr>
             <a:r>
               <a:rPr sz="2400" b="1" i="0">
                 <a:solidFill>
@@ -3690,17 +3780,69 @@
           </a:bodyPr>
           <a:lstStyle/>
           <a:p>
-            <a:pPr algn="l"/>
-            <a:r>
-              <a:rPr sz="1600" b="0" i="0">
+            <a:pPr algn="l">
+              <a:lnSpc>
+                <a:spcPct val="128000"/>
+              </a:lnSpc>
+              <a:spcBef>
+                <a:spcPts val="0"/>
+              </a:spcBef>
+              <a:spcAft>
+                <a:spcPts val="1400"/>
+              </a:spcAft>
+            </a:pPr>
+            <a:r>
+              <a:rPr sz="2600" b="0" i="0">
                 <a:solidFill>
                   <a:srgbClr val="3A4A54"/>
                 </a:solidFill>
                 <a:latin typeface="Calibri"/>
               </a:rPr>
-              <a:t>GovTech connects tech firms with government digitalisation needs.
-Capacity building · Switzerland bootcamp · government PoC
-We maintain this pack and submit only when health / Africa challenges match.</a:t>
+              <a:t>GovTech connects tech firms with government digitalisation needs.</a:t>
+            </a:r>
+          </a:p>
+          <a:p>
+            <a:pPr algn="l">
+              <a:lnSpc>
+                <a:spcPct val="128000"/>
+              </a:lnSpc>
+              <a:spcBef>
+                <a:spcPts val="0"/>
+              </a:spcBef>
+              <a:spcAft>
+                <a:spcPts val="1400"/>
+              </a:spcAft>
+            </a:pPr>
+            <a:r>
+              <a:rPr sz="2600" b="0" i="0">
+                <a:solidFill>
+                  <a:srgbClr val="3A4A54"/>
+                </a:solidFill>
+                <a:latin typeface="Calibri"/>
+              </a:rPr>
+              <a:t>Capacity building · Switzerland bootcamp · government PoC</a:t>
+            </a:r>
+          </a:p>
+          <a:p>
+            <a:pPr algn="l">
+              <a:lnSpc>
+                <a:spcPct val="128000"/>
+              </a:lnSpc>
+              <a:spcBef>
+                <a:spcPts val="0"/>
+              </a:spcBef>
+              <a:spcAft>
+                <a:spcPts val="200"/>
+              </a:spcAft>
+            </a:pPr>
+            <a:r>
+              <a:rPr sz="2600" b="0" i="0">
+                <a:solidFill>
+                  <a:srgbClr val="3A4A54"/>
+                </a:solidFill>
+                <a:latin typeface="Calibri"/>
+              </a:rPr>
+              <a:t>We maintain this pack and submit only when health / Africa challenges match.</a:t>
             </a:r>
           </a:p>
         </p:txBody>
@@ -3794,7 +3936,17 @@
           </a:bodyPr>
           <a:lstStyle/>
           <a:p>
-            <a:pPr algn="l"/>
+            <a:pPr algn="l">
+              <a:lnSpc>
+                <a:spcPct val="115000"/>
+              </a:lnSpc>
+              <a:spcBef>
+                <a:spcPts val="0"/>
+              </a:spcBef>
+              <a:spcAft>
+                <a:spcPts val="200"/>
+              </a:spcAft>
+            </a:pPr>
             <a:r>
               <a:rPr sz="900" b="0" i="0">
                 <a:solidFill>
@@ -3829,7 +3981,17 @@
           </a:bodyPr>
           <a:lstStyle/>
           <a:p>
-            <a:pPr algn="r"/>
+            <a:pPr algn="r">
+              <a:lnSpc>
+                <a:spcPct val="115000"/>
+              </a:lnSpc>
+              <a:spcBef>
+                <a:spcPts val="0"/>
+              </a:spcBef>
+              <a:spcAft>
+                <a:spcPts val="200"/>
+              </a:spcAft>
+            </a:pPr>
             <a:r>
               <a:rPr sz="900" b="0" i="0">
                 <a:solidFill>
@@ -3968,7 +4130,17 @@
           </a:bodyPr>
           <a:lstStyle/>
           <a:p>
-            <a:pPr algn="l"/>
+            <a:pPr algn="l">
+              <a:lnSpc>
+                <a:spcPct val="115000"/>
+              </a:lnSpc>
+              <a:spcBef>
+                <a:spcPts val="0"/>
+              </a:spcBef>
+              <a:spcAft>
+                <a:spcPts val="200"/>
+              </a:spcAft>
+            </a:pPr>
             <a:r>
               <a:rPr sz="1100" b="1" i="0">
                 <a:solidFill>
@@ -4003,7 +4175,17 @@
           </a:bodyPr>
           <a:lstStyle/>
           <a:p>
-            <a:pPr algn="l"/>
+            <a:pPr algn="l">
+              <a:lnSpc>
+                <a:spcPct val="115000"/>
+              </a:lnSpc>
+              <a:spcBef>
+                <a:spcPts val="0"/>
+              </a:spcBef>
+              <a:spcAft>
+                <a:spcPts val="200"/>
+              </a:spcAft>
+            </a:pPr>
             <a:r>
               <a:rPr sz="2400" b="1" i="0">
                 <a:solidFill>
@@ -4083,7 +4265,17 @@
           </a:bodyPr>
           <a:lstStyle/>
           <a:p>
-            <a:pPr algn="l"/>
+            <a:pPr algn="l">
+              <a:lnSpc>
+                <a:spcPct val="115000"/>
+              </a:lnSpc>
+              <a:spcBef>
+                <a:spcPts val="0"/>
+              </a:spcBef>
+              <a:spcAft>
+                <a:spcPts val="200"/>
+              </a:spcAft>
+            </a:pPr>
             <a:r>
               <a:rPr sz="1400" b="1" i="0">
                 <a:solidFill>
@@ -4118,9 +4310,19 @@
           </a:bodyPr>
           <a:lstStyle/>
           <a:p>
-            <a:pPr algn="l"/>
-            <a:r>
-              <a:rPr sz="1400" b="0" i="0">
+            <a:pPr algn="l">
+              <a:lnSpc>
+                <a:spcPct val="115000"/>
+              </a:lnSpc>
+              <a:spcBef>
+                <a:spcPts val="0"/>
+              </a:spcBef>
+              <a:spcAft>
+                <a:spcPts val="200"/>
+              </a:spcAft>
+            </a:pPr>
+            <a:r>
+              <a:rPr sz="1800" b="0" i="0">
                 <a:solidFill>
                   <a:srgbClr val="3A4A54"/>
                 </a:solidFill>
@@ -4198,7 +4400,17 @@
           </a:bodyPr>
           <a:lstStyle/>
           <a:p>
-            <a:pPr algn="l"/>
+            <a:pPr algn="l">
+              <a:lnSpc>
+                <a:spcPct val="115000"/>
+              </a:lnSpc>
+              <a:spcBef>
+                <a:spcPts val="0"/>
+              </a:spcBef>
+              <a:spcAft>
+                <a:spcPts val="200"/>
+              </a:spcAft>
+            </a:pPr>
             <a:r>
               <a:rPr sz="1400" b="1" i="0">
                 <a:solidFill>
@@ -4233,9 +4445,19 @@
           </a:bodyPr>
           <a:lstStyle/>
           <a:p>
-            <a:pPr algn="l"/>
-            <a:r>
-              <a:rPr sz="1400" b="0" i="0">
+            <a:pPr algn="l">
+              <a:lnSpc>
+                <a:spcPct val="115000"/>
+              </a:lnSpc>
+              <a:spcBef>
+                <a:spcPts val="0"/>
+              </a:spcBef>
+              <a:spcAft>
+                <a:spcPts val="200"/>
+              </a:spcAft>
+            </a:pPr>
+            <a:r>
+              <a:rPr sz="1800" b="0" i="0">
                 <a:solidFill>
                   <a:srgbClr val="3A4A54"/>
                 </a:solidFill>
@@ -4313,7 +4535,17 @@
           </a:bodyPr>
           <a:lstStyle/>
           <a:p>
-            <a:pPr algn="l"/>
+            <a:pPr algn="l">
+              <a:lnSpc>
+                <a:spcPct val="115000"/>
+              </a:lnSpc>
+              <a:spcBef>
+                <a:spcPts val="0"/>
+              </a:spcBef>
+              <a:spcAft>
+                <a:spcPts val="200"/>
+              </a:spcAft>
+            </a:pPr>
             <a:r>
               <a:rPr sz="1400" b="1" i="0">
                 <a:solidFill>
@@ -4348,9 +4580,19 @@
           </a:bodyPr>
           <a:lstStyle/>
           <a:p>
-            <a:pPr algn="l"/>
-            <a:r>
-              <a:rPr sz="1400" b="0" i="0">
+            <a:pPr algn="l">
+              <a:lnSpc>
+                <a:spcPct val="115000"/>
+              </a:lnSpc>
+              <a:spcBef>
+                <a:spcPts val="0"/>
+              </a:spcBef>
+              <a:spcAft>
+                <a:spcPts val="200"/>
+              </a:spcAft>
+            </a:pPr>
+            <a:r>
+              <a:rPr sz="1800" b="0" i="0">
                 <a:solidFill>
                   <a:srgbClr val="3A4A54"/>
                 </a:solidFill>
@@ -4426,7 +4668,17 @@
           </a:bodyPr>
           <a:lstStyle/>
           <a:p>
-            <a:pPr algn="l"/>
+            <a:pPr algn="l">
+              <a:lnSpc>
+                <a:spcPct val="115000"/>
+              </a:lnSpc>
+              <a:spcBef>
+                <a:spcPts val="0"/>
+              </a:spcBef>
+              <a:spcAft>
+                <a:spcPts val="200"/>
+              </a:spcAft>
+            </a:pPr>
             <a:r>
               <a:rPr sz="900" b="0" i="0">
                 <a:solidFill>
@@ -4461,7 +4713,17 @@
           </a:bodyPr>
           <a:lstStyle/>
           <a:p>
-            <a:pPr algn="r"/>
+            <a:pPr algn="r">
+              <a:lnSpc>
+                <a:spcPct val="115000"/>
+              </a:lnSpc>
+              <a:spcBef>
+                <a:spcPts val="0"/>
+              </a:spcBef>
+              <a:spcAft>
+                <a:spcPts val="200"/>
+              </a:spcAft>
+            </a:pPr>
             <a:r>
               <a:rPr sz="900" b="0" i="0">
                 <a:solidFill>
@@ -4600,7 +4862,17 @@
           </a:bodyPr>
           <a:lstStyle/>
           <a:p>
-            <a:pPr algn="l"/>
+            <a:pPr algn="l">
+              <a:lnSpc>
+                <a:spcPct val="115000"/>
+              </a:lnSpc>
+              <a:spcBef>
+                <a:spcPts val="0"/>
+              </a:spcBef>
+              <a:spcAft>
+                <a:spcPts val="200"/>
+              </a:spcAft>
+            </a:pPr>
             <a:r>
               <a:rPr sz="1100" b="1" i="0">
                 <a:solidFill>
@@ -4635,7 +4907,17 @@
           </a:bodyPr>
           <a:lstStyle/>
           <a:p>
-            <a:pPr algn="l"/>
+            <a:pPr algn="l">
+              <a:lnSpc>
+                <a:spcPct val="115000"/>
+              </a:lnSpc>
+              <a:spcBef>
+                <a:spcPts val="0"/>
+              </a:spcBef>
+              <a:spcAft>
+                <a:spcPts val="200"/>
+              </a:spcAft>
+            </a:pPr>
             <a:r>
               <a:rPr sz="2400" b="1" i="0">
                 <a:solidFill>
@@ -4670,17 +4952,69 @@
           </a:bodyPr>
           <a:lstStyle/>
           <a:p>
-            <a:pPr algn="l"/>
-            <a:r>
-              <a:rPr sz="1800" b="0" i="0">
+            <a:pPr algn="l">
+              <a:lnSpc>
+                <a:spcPct val="128000"/>
+              </a:lnSpc>
+              <a:spcBef>
+                <a:spcPts val="0"/>
+              </a:spcBef>
+              <a:spcAft>
+                <a:spcPts val="1400"/>
+              </a:spcAft>
+            </a:pPr>
+            <a:r>
+              <a:rPr sz="2600" b="0" i="0">
                 <a:solidFill>
                   <a:srgbClr val="1E2F38"/>
                 </a:solidFill>
                 <a:latin typeface="Calibri"/>
               </a:rPr>
-              <a:t>Current open public-finance audit use cases are outside FairBanks' domain.
-We will not stretch a community health story to fit unrelated software requirements.
-Our lane: district health intelligence from a live clinic + CHW operator.</a:t>
+              <a:t>Current open public-finance audit use cases are outside FairBanks' domain.</a:t>
+            </a:r>
+          </a:p>
+          <a:p>
+            <a:pPr algn="l">
+              <a:lnSpc>
+                <a:spcPct val="128000"/>
+              </a:lnSpc>
+              <a:spcBef>
+                <a:spcPts val="0"/>
+              </a:spcBef>
+              <a:spcAft>
+                <a:spcPts val="1400"/>
+              </a:spcAft>
+            </a:pPr>
+            <a:r>
+              <a:rPr sz="2600" b="0" i="0">
+                <a:solidFill>
+                  <a:srgbClr val="1E2F38"/>
+                </a:solidFill>
+                <a:latin typeface="Calibri"/>
+              </a:rPr>
+              <a:t>We will not stretch a community health story to fit unrelated software requirements.</a:t>
+            </a:r>
+          </a:p>
+          <a:p>
+            <a:pPr algn="l">
+              <a:lnSpc>
+                <a:spcPct val="128000"/>
+              </a:lnSpc>
+              <a:spcBef>
+                <a:spcPts val="0"/>
+              </a:spcBef>
+              <a:spcAft>
+                <a:spcPts val="200"/>
+              </a:spcAft>
+            </a:pPr>
+            <a:r>
+              <a:rPr sz="2600" b="0" i="0">
+                <a:solidFill>
+                  <a:srgbClr val="1E2F38"/>
+                </a:solidFill>
+                <a:latin typeface="Calibri"/>
+              </a:rPr>
+              <a:t>Our lane: district health intelligence from a live clinic + CHW operator.</a:t>
             </a:r>
           </a:p>
         </p:txBody>
@@ -4750,7 +5084,17 @@
           </a:bodyPr>
           <a:lstStyle/>
           <a:p>
-            <a:pPr algn="l"/>
+            <a:pPr algn="l">
+              <a:lnSpc>
+                <a:spcPct val="115000"/>
+              </a:lnSpc>
+              <a:spcBef>
+                <a:spcPts val="0"/>
+              </a:spcBef>
+              <a:spcAft>
+                <a:spcPts val="200"/>
+              </a:spcAft>
+            </a:pPr>
             <a:r>
               <a:rPr sz="900" b="0" i="0">
                 <a:solidFill>
@@ -4785,7 +5129,17 @@
           </a:bodyPr>
           <a:lstStyle/>
           <a:p>
-            <a:pPr algn="r"/>
+            <a:pPr algn="r">
+              <a:lnSpc>
+                <a:spcPct val="115000"/>
+              </a:lnSpc>
+              <a:spcBef>
+                <a:spcPts val="0"/>
+              </a:spcBef>
+              <a:spcAft>
+                <a:spcPts val="200"/>
+              </a:spcAft>
+            </a:pPr>
             <a:r>
               <a:rPr sz="900" b="0" i="0">
                 <a:solidFill>
@@ -4924,7 +5278,17 @@
           </a:bodyPr>
           <a:lstStyle/>
           <a:p>
-            <a:pPr algn="l"/>
+            <a:pPr algn="l">
+              <a:lnSpc>
+                <a:spcPct val="115000"/>
+              </a:lnSpc>
+              <a:spcBef>
+                <a:spcPts val="0"/>
+              </a:spcBef>
+              <a:spcAft>
+                <a:spcPts val="200"/>
+              </a:spcAft>
+            </a:pPr>
             <a:r>
               <a:rPr sz="1100" b="1" i="0">
                 <a:solidFill>
@@ -4959,7 +5323,17 @@
           </a:bodyPr>
           <a:lstStyle/>
           <a:p>
-            <a:pPr algn="l"/>
+            <a:pPr algn="l">
+              <a:lnSpc>
+                <a:spcPct val="115000"/>
+              </a:lnSpc>
+              <a:spcBef>
+                <a:spcPts val="0"/>
+              </a:spcBef>
+              <a:spcAft>
+                <a:spcPts val="200"/>
+              </a:spcAft>
+            </a:pPr>
             <a:r>
               <a:rPr sz="2400" b="1" i="0">
                 <a:solidFill>
@@ -5018,16 +5392,47 @@
           </a:bodyPr>
           <a:lstStyle/>
           <a:p>
-            <a:pPr algn="l"/>
-            <a:r>
-              <a:rPr sz="1500" b="0" i="0">
+            <a:pPr algn="l">
+              <a:lnSpc>
+                <a:spcPct val="128000"/>
+              </a:lnSpc>
+              <a:spcBef>
+                <a:spcPts val="0"/>
+              </a:spcBef>
+              <a:spcAft>
+                <a:spcPts val="1400"/>
+              </a:spcAft>
+            </a:pPr>
+            <a:r>
+              <a:rPr sz="2600" b="0" i="0">
                 <a:solidFill>
                   <a:srgbClr val="3A4A54"/>
                 </a:solidFill>
                 <a:latin typeface="Calibri"/>
               </a:rPr>
-              <a:t>Capture → sync → GIS → dashboards → alerts
-Measure decision-cycle gains and CHW data quality for reporting.</a:t>
+              <a:t>Capture → sync → GIS → dashboards → alerts</a:t>
+            </a:r>
+          </a:p>
+          <a:p>
+            <a:pPr algn="l">
+              <a:lnSpc>
+                <a:spcPct val="128000"/>
+              </a:lnSpc>
+              <a:spcBef>
+                <a:spcPts val="0"/>
+              </a:spcBef>
+              <a:spcAft>
+                <a:spcPts val="200"/>
+              </a:spcAft>
+            </a:pPr>
+            <a:r>
+              <a:rPr sz="2600" b="0" i="0">
+                <a:solidFill>
+                  <a:srgbClr val="3A4A54"/>
+                </a:solidFill>
+                <a:latin typeface="Calibri"/>
+              </a:rPr>
+              <a:t>Measure decision-cycle gains and CHW data quality for reporting.</a:t>
             </a:r>
           </a:p>
         </p:txBody>
@@ -5097,7 +5502,17 @@
           </a:bodyPr>
           <a:lstStyle/>
           <a:p>
-            <a:pPr algn="l"/>
+            <a:pPr algn="l">
+              <a:lnSpc>
+                <a:spcPct val="115000"/>
+              </a:lnSpc>
+              <a:spcBef>
+                <a:spcPts val="0"/>
+              </a:spcBef>
+              <a:spcAft>
+                <a:spcPts val="200"/>
+              </a:spcAft>
+            </a:pPr>
             <a:r>
               <a:rPr sz="900" b="0" i="0">
                 <a:solidFill>
@@ -5132,7 +5547,17 @@
           </a:bodyPr>
           <a:lstStyle/>
           <a:p>
-            <a:pPr algn="r"/>
+            <a:pPr algn="r">
+              <a:lnSpc>
+                <a:spcPct val="115000"/>
+              </a:lnSpc>
+              <a:spcBef>
+                <a:spcPts val="0"/>
+              </a:spcBef>
+              <a:spcAft>
+                <a:spcPts val="200"/>
+              </a:spcAft>
+            </a:pPr>
             <a:r>
               <a:rPr sz="900" b="0" i="0">
                 <a:solidFill>
@@ -5271,7 +5696,17 @@
           </a:bodyPr>
           <a:lstStyle/>
           <a:p>
-            <a:pPr algn="l"/>
+            <a:pPr algn="l">
+              <a:lnSpc>
+                <a:spcPct val="115000"/>
+              </a:lnSpc>
+              <a:spcBef>
+                <a:spcPts val="0"/>
+              </a:spcBef>
+              <a:spcAft>
+                <a:spcPts val="200"/>
+              </a:spcAft>
+            </a:pPr>
             <a:r>
               <a:rPr sz="1100" b="1" i="0">
                 <a:solidFill>
@@ -5306,7 +5741,17 @@
           </a:bodyPr>
           <a:lstStyle/>
           <a:p>
-            <a:pPr algn="l"/>
+            <a:pPr algn="l">
+              <a:lnSpc>
+                <a:spcPct val="115000"/>
+              </a:lnSpc>
+              <a:spcBef>
+                <a:spcPts val="0"/>
+              </a:spcBef>
+              <a:spcAft>
+                <a:spcPts val="200"/>
+              </a:spcAft>
+            </a:pPr>
             <a:r>
               <a:rPr sz="2400" b="1" i="0">
                 <a:solidFill>
@@ -5386,7 +5831,17 @@
           </a:bodyPr>
           <a:lstStyle/>
           <a:p>
-            <a:pPr algn="l"/>
+            <a:pPr algn="l">
+              <a:lnSpc>
+                <a:spcPct val="115000"/>
+              </a:lnSpc>
+              <a:spcBef>
+                <a:spcPts val="0"/>
+              </a:spcBef>
+              <a:spcAft>
+                <a:spcPts val="200"/>
+              </a:spcAft>
+            </a:pPr>
             <a:r>
               <a:rPr sz="1300" b="1" i="0">
                 <a:solidFill>
@@ -5421,7 +5876,17 @@
           </a:bodyPr>
           <a:lstStyle/>
           <a:p>
-            <a:pPr algn="l"/>
+            <a:pPr algn="l">
+              <a:lnSpc>
+                <a:spcPct val="115000"/>
+              </a:lnSpc>
+              <a:spcBef>
+                <a:spcPts val="0"/>
+              </a:spcBef>
+              <a:spcAft>
+                <a:spcPts val="200"/>
+              </a:spcAft>
+            </a:pPr>
             <a:r>
               <a:rPr sz="1300" b="0" i="0">
                 <a:solidFill>
@@ -5501,7 +5966,17 @@
           </a:bodyPr>
           <a:lstStyle/>
           <a:p>
-            <a:pPr algn="l"/>
+            <a:pPr algn="l">
+              <a:lnSpc>
+                <a:spcPct val="115000"/>
+              </a:lnSpc>
+              <a:spcBef>
+                <a:spcPts val="0"/>
+              </a:spcBef>
+              <a:spcAft>
+                <a:spcPts val="200"/>
+              </a:spcAft>
+            </a:pPr>
             <a:r>
               <a:rPr sz="1300" b="1" i="0">
                 <a:solidFill>
@@ -5536,7 +6011,17 @@
           </a:bodyPr>
           <a:lstStyle/>
           <a:p>
-            <a:pPr algn="l"/>
+            <a:pPr algn="l">
+              <a:lnSpc>
+                <a:spcPct val="115000"/>
+              </a:lnSpc>
+              <a:spcBef>
+                <a:spcPts val="0"/>
+              </a:spcBef>
+              <a:spcAft>
+                <a:spcPts val="200"/>
+              </a:spcAft>
+            </a:pPr>
             <a:r>
               <a:rPr sz="1300" b="0" i="0">
                 <a:solidFill>
@@ -5616,7 +6101,17 @@
           </a:bodyPr>
           <a:lstStyle/>
           <a:p>
-            <a:pPr algn="l"/>
+            <a:pPr algn="l">
+              <a:lnSpc>
+                <a:spcPct val="115000"/>
+              </a:lnSpc>
+              <a:spcBef>
+                <a:spcPts val="0"/>
+              </a:spcBef>
+              <a:spcAft>
+                <a:spcPts val="200"/>
+              </a:spcAft>
+            </a:pPr>
             <a:r>
               <a:rPr sz="1300" b="1" i="0">
                 <a:solidFill>
@@ -5651,7 +6146,17 @@
           </a:bodyPr>
           <a:lstStyle/>
           <a:p>
-            <a:pPr algn="l"/>
+            <a:pPr algn="l">
+              <a:lnSpc>
+                <a:spcPct val="115000"/>
+              </a:lnSpc>
+              <a:spcBef>
+                <a:spcPts val="0"/>
+              </a:spcBef>
+              <a:spcAft>
+                <a:spcPts val="200"/>
+              </a:spcAft>
+            </a:pPr>
             <a:r>
               <a:rPr sz="1300" b="0" i="0">
                 <a:solidFill>
@@ -5731,7 +6236,17 @@
           </a:bodyPr>
           <a:lstStyle/>
           <a:p>
-            <a:pPr algn="l"/>
+            <a:pPr algn="l">
+              <a:lnSpc>
+                <a:spcPct val="115000"/>
+              </a:lnSpc>
+              <a:spcBef>
+                <a:spcPts val="0"/>
+              </a:spcBef>
+              <a:spcAft>
+                <a:spcPts val="200"/>
+              </a:spcAft>
+            </a:pPr>
             <a:r>
               <a:rPr sz="1300" b="1" i="0">
                 <a:solidFill>
@@ -5766,7 +6281,17 @@
           </a:bodyPr>
           <a:lstStyle/>
           <a:p>
-            <a:pPr algn="l"/>
+            <a:pPr algn="l">
+              <a:lnSpc>
+                <a:spcPct val="115000"/>
+              </a:lnSpc>
+              <a:spcBef>
+                <a:spcPts val="0"/>
+              </a:spcBef>
+              <a:spcAft>
+                <a:spcPts val="200"/>
+              </a:spcAft>
+            </a:pPr>
             <a:r>
               <a:rPr sz="1300" b="0" i="0">
                 <a:solidFill>
@@ -5846,7 +6371,17 @@
           </a:bodyPr>
           <a:lstStyle/>
           <a:p>
-            <a:pPr algn="l"/>
+            <a:pPr algn="l">
+              <a:lnSpc>
+                <a:spcPct val="115000"/>
+              </a:lnSpc>
+              <a:spcBef>
+                <a:spcPts val="0"/>
+              </a:spcBef>
+              <a:spcAft>
+                <a:spcPts val="200"/>
+              </a:spcAft>
+            </a:pPr>
             <a:r>
               <a:rPr sz="1300" b="1" i="0">
                 <a:solidFill>
@@ -5881,7 +6416,17 @@
           </a:bodyPr>
           <a:lstStyle/>
           <a:p>
-            <a:pPr algn="l"/>
+            <a:pPr algn="l">
+              <a:lnSpc>
+                <a:spcPct val="115000"/>
+              </a:lnSpc>
+              <a:spcBef>
+                <a:spcPts val="0"/>
+              </a:spcBef>
+              <a:spcAft>
+                <a:spcPts val="200"/>
+              </a:spcAft>
+            </a:pPr>
             <a:r>
               <a:rPr sz="1300" b="0" i="0">
                 <a:solidFill>
@@ -5959,7 +6504,17 @@
           </a:bodyPr>
           <a:lstStyle/>
           <a:p>
-            <a:pPr algn="l"/>
+            <a:pPr algn="l">
+              <a:lnSpc>
+                <a:spcPct val="115000"/>
+              </a:lnSpc>
+              <a:spcBef>
+                <a:spcPts val="0"/>
+              </a:spcBef>
+              <a:spcAft>
+                <a:spcPts val="200"/>
+              </a:spcAft>
+            </a:pPr>
             <a:r>
               <a:rPr sz="900" b="0" i="0">
                 <a:solidFill>
@@ -5994,7 +6549,17 @@
           </a:bodyPr>
           <a:lstStyle/>
           <a:p>
-            <a:pPr algn="r"/>
+            <a:pPr algn="r">
+              <a:lnSpc>
+                <a:spcPct val="115000"/>
+              </a:lnSpc>
+              <a:spcBef>
+                <a:spcPts val="0"/>
+              </a:spcBef>
+              <a:spcAft>
+                <a:spcPts val="200"/>
+              </a:spcAft>
+            </a:pPr>
             <a:r>
               <a:rPr sz="900" b="0" i="0">
                 <a:solidFill>
@@ -6133,7 +6698,17 @@
           </a:bodyPr>
           <a:lstStyle/>
           <a:p>
-            <a:pPr algn="l"/>
+            <a:pPr algn="l">
+              <a:lnSpc>
+                <a:spcPct val="115000"/>
+              </a:lnSpc>
+              <a:spcBef>
+                <a:spcPts val="0"/>
+              </a:spcBef>
+              <a:spcAft>
+                <a:spcPts val="200"/>
+              </a:spcAft>
+            </a:pPr>
             <a:r>
               <a:rPr sz="1100" b="1" i="0">
                 <a:solidFill>
@@ -6168,7 +6743,17 @@
           </a:bodyPr>
           <a:lstStyle/>
           <a:p>
-            <a:pPr algn="l"/>
+            <a:pPr algn="l">
+              <a:lnSpc>
+                <a:spcPct val="115000"/>
+              </a:lnSpc>
+              <a:spcBef>
+                <a:spcPts val="0"/>
+              </a:spcBef>
+              <a:spcAft>
+                <a:spcPts val="200"/>
+              </a:spcAft>
+            </a:pPr>
             <a:r>
               <a:rPr sz="2400" b="1" i="0">
                 <a:solidFill>
@@ -6227,18 +6812,91 @@
           </a:bodyPr>
           <a:lstStyle/>
           <a:p>
-            <a:pPr algn="l"/>
-            <a:r>
-              <a:rPr sz="1600" b="0" i="0">
+            <a:pPr algn="l">
+              <a:lnSpc>
+                <a:spcPct val="128000"/>
+              </a:lnSpc>
+              <a:spcBef>
+                <a:spcPts val="0"/>
+              </a:spcBef>
+              <a:spcAft>
+                <a:spcPts val="1400"/>
+              </a:spcAft>
+            </a:pPr>
+            <a:r>
+              <a:rPr sz="2600" b="0" i="0">
                 <a:solidFill>
                   <a:srgbClr val="1E2F38"/>
                 </a:solidFill>
                 <a:latin typeface="Calibri"/>
               </a:rPr>
-              <a:t>• Population risk views
-• Early-warning alerts
-• CHW validation rules
-• Export hooks for national systems where permitted</a:t>
+              <a:t>• Population risk views</a:t>
+            </a:r>
+          </a:p>
+          <a:p>
+            <a:pPr algn="l">
+              <a:lnSpc>
+                <a:spcPct val="128000"/>
+              </a:lnSpc>
+              <a:spcBef>
+                <a:spcPts val="0"/>
+              </a:spcBef>
+              <a:spcAft>
+                <a:spcPts val="1400"/>
+              </a:spcAft>
+            </a:pPr>
+            <a:r>
+              <a:rPr sz="2600" b="0" i="0">
+                <a:solidFill>
+                  <a:srgbClr val="1E2F38"/>
+                </a:solidFill>
+                <a:latin typeface="Calibri"/>
+              </a:rPr>
+              <a:t>• Early-warning alerts</a:t>
+            </a:r>
+          </a:p>
+          <a:p>
+            <a:pPr algn="l">
+              <a:lnSpc>
+                <a:spcPct val="128000"/>
+              </a:lnSpc>
+              <a:spcBef>
+                <a:spcPts val="0"/>
+              </a:spcBef>
+              <a:spcAft>
+                <a:spcPts val="1400"/>
+              </a:spcAft>
+            </a:pPr>
+            <a:r>
+              <a:rPr sz="2600" b="0" i="0">
+                <a:solidFill>
+                  <a:srgbClr val="1E2F38"/>
+                </a:solidFill>
+                <a:latin typeface="Calibri"/>
+              </a:rPr>
+              <a:t>• CHW validation rules</a:t>
+            </a:r>
+          </a:p>
+          <a:p>
+            <a:pPr algn="l">
+              <a:lnSpc>
+                <a:spcPct val="128000"/>
+              </a:lnSpc>
+              <a:spcBef>
+                <a:spcPts val="0"/>
+              </a:spcBef>
+              <a:spcAft>
+                <a:spcPts val="200"/>
+              </a:spcAft>
+            </a:pPr>
+            <a:r>
+              <a:rPr sz="2600" b="0" i="0">
+                <a:solidFill>
+                  <a:srgbClr val="1E2F38"/>
+                </a:solidFill>
+                <a:latin typeface="Calibri"/>
+              </a:rPr>
+              <a:t>• Export hooks for national systems where permitted</a:t>
             </a:r>
           </a:p>
         </p:txBody>
@@ -6308,7 +6966,17 @@
           </a:bodyPr>
           <a:lstStyle/>
           <a:p>
-            <a:pPr algn="l"/>
+            <a:pPr algn="l">
+              <a:lnSpc>
+                <a:spcPct val="115000"/>
+              </a:lnSpc>
+              <a:spcBef>
+                <a:spcPts val="0"/>
+              </a:spcBef>
+              <a:spcAft>
+                <a:spcPts val="200"/>
+              </a:spcAft>
+            </a:pPr>
             <a:r>
               <a:rPr sz="900" b="0" i="0">
                 <a:solidFill>
@@ -6343,7 +7011,17 @@
           </a:bodyPr>
           <a:lstStyle/>
           <a:p>
-            <a:pPr algn="r"/>
+            <a:pPr algn="r">
+              <a:lnSpc>
+                <a:spcPct val="115000"/>
+              </a:lnSpc>
+              <a:spcBef>
+                <a:spcPts val="0"/>
+              </a:spcBef>
+              <a:spcAft>
+                <a:spcPts val="200"/>
+              </a:spcAft>
+            </a:pPr>
             <a:r>
               <a:rPr sz="900" b="0" i="0">
                 <a:solidFill>
@@ -6482,7 +7160,17 @@
           </a:bodyPr>
           <a:lstStyle/>
           <a:p>
-            <a:pPr algn="l"/>
+            <a:pPr algn="l">
+              <a:lnSpc>
+                <a:spcPct val="115000"/>
+              </a:lnSpc>
+              <a:spcBef>
+                <a:spcPts val="0"/>
+              </a:spcBef>
+              <a:spcAft>
+                <a:spcPts val="200"/>
+              </a:spcAft>
+            </a:pPr>
             <a:r>
               <a:rPr sz="1100" b="1" i="0">
                 <a:solidFill>
@@ -6517,7 +7205,17 @@
           </a:bodyPr>
           <a:lstStyle/>
           <a:p>
-            <a:pPr algn="l"/>
+            <a:pPr algn="l">
+              <a:lnSpc>
+                <a:spcPct val="115000"/>
+              </a:lnSpc>
+              <a:spcBef>
+                <a:spcPts val="0"/>
+              </a:spcBef>
+              <a:spcAft>
+                <a:spcPts val="200"/>
+              </a:spcAft>
+            </a:pPr>
             <a:r>
               <a:rPr sz="2400" b="1" i="0">
                 <a:solidFill>
@@ -6576,18 +7274,91 @@
           </a:bodyPr>
           <a:lstStyle/>
           <a:p>
-            <a:pPr algn="l"/>
-            <a:r>
-              <a:rPr sz="1600" b="0" i="0">
+            <a:pPr algn="l">
+              <a:lnSpc>
+                <a:spcPct val="128000"/>
+              </a:lnSpc>
+              <a:spcBef>
+                <a:spcPts val="0"/>
+              </a:spcBef>
+              <a:spcAft>
+                <a:spcPts val="1400"/>
+              </a:spcAft>
+            </a:pPr>
+            <a:r>
+              <a:rPr sz="2600" b="0" i="0">
                 <a:solidFill>
                   <a:srgbClr val="1E2F38"/>
                 </a:solidFill>
                 <a:latin typeface="Calibri"/>
               </a:rPr>
-              <a:t>• FairBanks Medical Centre + Community Reach
-• CHW/VHT networks and outreach programmes
-• Team ready for bootcamp if selected
-• PoC measured in real manager workflows</a:t>
+              <a:t>• FairBanks Medical Centre + Community Reach</a:t>
+            </a:r>
+          </a:p>
+          <a:p>
+            <a:pPr algn="l">
+              <a:lnSpc>
+                <a:spcPct val="128000"/>
+              </a:lnSpc>
+              <a:spcBef>
+                <a:spcPts val="0"/>
+              </a:spcBef>
+              <a:spcAft>
+                <a:spcPts val="1400"/>
+              </a:spcAft>
+            </a:pPr>
+            <a:r>
+              <a:rPr sz="2600" b="0" i="0">
+                <a:solidFill>
+                  <a:srgbClr val="1E2F38"/>
+                </a:solidFill>
+                <a:latin typeface="Calibri"/>
+              </a:rPr>
+              <a:t>• CHW/VHT networks and outreach programmes</a:t>
+            </a:r>
+          </a:p>
+          <a:p>
+            <a:pPr algn="l">
+              <a:lnSpc>
+                <a:spcPct val="128000"/>
+              </a:lnSpc>
+              <a:spcBef>
+                <a:spcPts val="0"/>
+              </a:spcBef>
+              <a:spcAft>
+                <a:spcPts val="1400"/>
+              </a:spcAft>
+            </a:pPr>
+            <a:r>
+              <a:rPr sz="2600" b="0" i="0">
+                <a:solidFill>
+                  <a:srgbClr val="1E2F38"/>
+                </a:solidFill>
+                <a:latin typeface="Calibri"/>
+              </a:rPr>
+              <a:t>• Team ready for bootcamp if selected</a:t>
+            </a:r>
+          </a:p>
+          <a:p>
+            <a:pPr algn="l">
+              <a:lnSpc>
+                <a:spcPct val="128000"/>
+              </a:lnSpc>
+              <a:spcBef>
+                <a:spcPts val="0"/>
+              </a:spcBef>
+              <a:spcAft>
+                <a:spcPts val="200"/>
+              </a:spcAft>
+            </a:pPr>
+            <a:r>
+              <a:rPr sz="2600" b="0" i="0">
+                <a:solidFill>
+                  <a:srgbClr val="1E2F38"/>
+                </a:solidFill>
+                <a:latin typeface="Calibri"/>
+              </a:rPr>
+              <a:t>• PoC measured in real manager workflows</a:t>
             </a:r>
           </a:p>
         </p:txBody>
@@ -6657,7 +7428,17 @@
           </a:bodyPr>
           <a:lstStyle/>
           <a:p>
-            <a:pPr algn="l"/>
+            <a:pPr algn="l">
+              <a:lnSpc>
+                <a:spcPct val="115000"/>
+              </a:lnSpc>
+              <a:spcBef>
+                <a:spcPts val="0"/>
+              </a:spcBef>
+              <a:spcAft>
+                <a:spcPts val="200"/>
+              </a:spcAft>
+            </a:pPr>
             <a:r>
               <a:rPr sz="900" b="0" i="0">
                 <a:solidFill>
@@ -6692,7 +7473,17 @@
           </a:bodyPr>
           <a:lstStyle/>
           <a:p>
-            <a:pPr algn="r"/>
+            <a:pPr algn="r">
+              <a:lnSpc>
+                <a:spcPct val="115000"/>
+              </a:lnSpc>
+              <a:spcBef>
+                <a:spcPts val="0"/>
+              </a:spcBef>
+              <a:spcAft>
+                <a:spcPts val="200"/>
+              </a:spcAft>
+            </a:pPr>
             <a:r>
               <a:rPr sz="900" b="0" i="0">
                 <a:solidFill>
@@ -6831,7 +7622,17 @@
           </a:bodyPr>
           <a:lstStyle/>
           <a:p>
-            <a:pPr algn="l"/>
+            <a:pPr algn="l">
+              <a:lnSpc>
+                <a:spcPct val="115000"/>
+              </a:lnSpc>
+              <a:spcBef>
+                <a:spcPts val="0"/>
+              </a:spcBef>
+              <a:spcAft>
+                <a:spcPts val="200"/>
+              </a:spcAft>
+            </a:pPr>
             <a:r>
               <a:rPr sz="1100" b="1" i="0">
                 <a:solidFill>
@@ -6866,7 +7667,17 @@
           </a:bodyPr>
           <a:lstStyle/>
           <a:p>
-            <a:pPr algn="l"/>
+            <a:pPr algn="l">
+              <a:lnSpc>
+                <a:spcPct val="115000"/>
+              </a:lnSpc>
+              <a:spcBef>
+                <a:spcPts val="0"/>
+              </a:spcBef>
+              <a:spcAft>
+                <a:spcPts val="200"/>
+              </a:spcAft>
+            </a:pPr>
             <a:r>
               <a:rPr sz="2400" b="1" i="0">
                 <a:solidFill>
@@ -6946,7 +7757,17 @@
           </a:bodyPr>
           <a:lstStyle/>
           <a:p>
-            <a:pPr algn="l"/>
+            <a:pPr algn="l">
+              <a:lnSpc>
+                <a:spcPct val="115000"/>
+              </a:lnSpc>
+              <a:spcBef>
+                <a:spcPts val="0"/>
+              </a:spcBef>
+              <a:spcAft>
+                <a:spcPts val="200"/>
+              </a:spcAft>
+            </a:pPr>
             <a:r>
               <a:rPr sz="1600" b="1" i="0">
                 <a:solidFill>
@@ -6981,9 +7802,19 @@
           </a:bodyPr>
           <a:lstStyle/>
           <a:p>
-            <a:pPr algn="l"/>
-            <a:r>
-              <a:rPr sz="1400" b="0" i="0">
+            <a:pPr algn="l">
+              <a:lnSpc>
+                <a:spcPct val="128000"/>
+              </a:lnSpc>
+              <a:spcBef>
+                <a:spcPts val="0"/>
+              </a:spcBef>
+              <a:spcAft>
+                <a:spcPts val="200"/>
+              </a:spcAft>
+            </a:pPr>
+            <a:r>
+              <a:rPr sz="2600" b="0" i="0">
                 <a:solidFill>
                   <a:srgbClr val="3A4A54"/>
                 </a:solidFill>
@@ -7061,7 +7892,17 @@
           </a:bodyPr>
           <a:lstStyle/>
           <a:p>
-            <a:pPr algn="l"/>
+            <a:pPr algn="l">
+              <a:lnSpc>
+                <a:spcPct val="115000"/>
+              </a:lnSpc>
+              <a:spcBef>
+                <a:spcPts val="0"/>
+              </a:spcBef>
+              <a:spcAft>
+                <a:spcPts val="200"/>
+              </a:spcAft>
+            </a:pPr>
             <a:r>
               <a:rPr sz="1600" b="1" i="0">
                 <a:solidFill>
@@ -7096,9 +7937,19 @@
           </a:bodyPr>
           <a:lstStyle/>
           <a:p>
-            <a:pPr algn="l"/>
-            <a:r>
-              <a:rPr sz="1400" b="0" i="0">
+            <a:pPr algn="l">
+              <a:lnSpc>
+                <a:spcPct val="128000"/>
+              </a:lnSpc>
+              <a:spcBef>
+                <a:spcPts val="0"/>
+              </a:spcBef>
+              <a:spcAft>
+                <a:spcPts val="200"/>
+              </a:spcAft>
+            </a:pPr>
+            <a:r>
+              <a:rPr sz="2600" b="0" i="0">
                 <a:solidFill>
                   <a:srgbClr val="3A4A54"/>
                 </a:solidFill>
@@ -7174,7 +8025,17 @@
           </a:bodyPr>
           <a:lstStyle/>
           <a:p>
-            <a:pPr algn="l"/>
+            <a:pPr algn="l">
+              <a:lnSpc>
+                <a:spcPct val="115000"/>
+              </a:lnSpc>
+              <a:spcBef>
+                <a:spcPts val="0"/>
+              </a:spcBef>
+              <a:spcAft>
+                <a:spcPts val="200"/>
+              </a:spcAft>
+            </a:pPr>
             <a:r>
               <a:rPr sz="900" b="0" i="0">
                 <a:solidFill>
@@ -7209,7 +8070,17 @@
           </a:bodyPr>
           <a:lstStyle/>
           <a:p>
-            <a:pPr algn="r"/>
+            <a:pPr algn="r">
+              <a:lnSpc>
+                <a:spcPct val="115000"/>
+              </a:lnSpc>
+              <a:spcBef>
+                <a:spcPts val="0"/>
+              </a:spcBef>
+              <a:spcAft>
+                <a:spcPts val="200"/>
+              </a:spcAft>
+            </a:pPr>
             <a:r>
               <a:rPr sz="900" b="0" i="0">
                 <a:solidFill>

--- a/applications/govtech/documents/govtech_ppt.pptx
+++ b/applications/govtech/documents/govtech_ppt.pptx
@@ -3394,6 +3394,96 @@
   <p:clrMapOvr>
     <a:masterClrMapping/>
   </p:clrMapOvr>
+  <p:timing>
+    <p:tnLst>
+      <p:par>
+        <p:cTn id="1" dur="indefinite" restart="never" nodeType="tmRoot">
+          <p:childTnLst>
+            <p:seq concurrent="true" nextAc="seek">
+              <p:cTn id="2" dur="indefinite" nodeType="mainSeq">
+                <p:childTnLst>
+                  <p:par>
+                    <p:cTn id="9" fill="hold">
+                      <p:stCondLst>
+                        <p:cond delay="0"/>
+                      </p:stCondLst>
+                      <p:childTnLst>
+                        <p:par>
+                          <p:cTn id="3" presetID="10" presetClass="entr" presetSubtype="0" fill="hold" nodeType="withEffect">
+                            <p:stCondLst>
+                              <p:cond delay="0"/>
+                            </p:stCondLst>
+                            <p:childTnLst>
+                              <p:animEffect transition="in" filter="fade">
+                                <p:cBhvr>
+                                  <p:cTn id="4" dur="450"/>
+                                  <p:tgtEl>
+                                    <p:spTgt spid="2"/>
+                                  </p:tgtEl>
+                                </p:cBhvr>
+                              </p:animEffect>
+                            </p:childTnLst>
+                          </p:cTn>
+                        </p:par>
+                        <p:par>
+                          <p:cTn id="5" presetID="10" presetClass="entr" presetSubtype="0" fill="hold" nodeType="withEffect">
+                            <p:stCondLst>
+                              <p:cond delay="200"/>
+                            </p:stCondLst>
+                            <p:childTnLst>
+                              <p:animEffect transition="in" filter="fade">
+                                <p:cBhvr>
+                                  <p:cTn id="6" dur="450"/>
+                                  <p:tgtEl>
+                                    <p:spTgt spid="3"/>
+                                  </p:tgtEl>
+                                </p:cBhvr>
+                              </p:animEffect>
+                            </p:childTnLst>
+                          </p:cTn>
+                        </p:par>
+                        <p:par>
+                          <p:cTn id="7" presetID="10" presetClass="entr" presetSubtype="0" fill="hold" nodeType="withEffect">
+                            <p:stCondLst>
+                              <p:cond delay="200"/>
+                            </p:stCondLst>
+                            <p:childTnLst>
+                              <p:animEffect transition="in" filter="fade">
+                                <p:cBhvr>
+                                  <p:cTn id="8" dur="450"/>
+                                  <p:tgtEl>
+                                    <p:spTgt spid="4"/>
+                                  </p:tgtEl>
+                                </p:cBhvr>
+                              </p:animEffect>
+                            </p:childTnLst>
+                          </p:cTn>
+                        </p:par>
+                      </p:childTnLst>
+                    </p:cTn>
+                  </p:par>
+                </p:childTnLst>
+              </p:cTn>
+              <p:prevCondLst>
+                <p:cond evt="onPrev" delay="0">
+                  <p:tgtEl>
+                    <p:sldTgt/>
+                  </p:tgtEl>
+                </p:cond>
+              </p:prevCondLst>
+              <p:nextCondLst>
+                <p:cond evt="onNext" delay="0">
+                  <p:tgtEl>
+                    <p:sldTgt/>
+                  </p:tgtEl>
+                </p:cond>
+              </p:nextCondLst>
+            </p:seq>
+          </p:childTnLst>
+        </p:cTn>
+      </p:par>
+    </p:tnLst>
+  </p:timing>
 </p:sld>
 </file>
 
@@ -3569,6 +3659,96 @@
   <p:clrMapOvr>
     <a:masterClrMapping/>
   </p:clrMapOvr>
+  <p:timing>
+    <p:tnLst>
+      <p:par>
+        <p:cTn id="1" dur="indefinite" restart="never" nodeType="tmRoot">
+          <p:childTnLst>
+            <p:seq concurrent="true" nextAc="seek">
+              <p:cTn id="2" dur="indefinite" nodeType="mainSeq">
+                <p:childTnLst>
+                  <p:par>
+                    <p:cTn id="9" fill="hold">
+                      <p:stCondLst>
+                        <p:cond delay="0"/>
+                      </p:stCondLst>
+                      <p:childTnLst>
+                        <p:par>
+                          <p:cTn id="3" presetID="10" presetClass="entr" presetSubtype="0" fill="hold" nodeType="withEffect">
+                            <p:stCondLst>
+                              <p:cond delay="0"/>
+                            </p:stCondLst>
+                            <p:childTnLst>
+                              <p:animEffect transition="in" filter="fade">
+                                <p:cBhvr>
+                                  <p:cTn id="4" dur="450"/>
+                                  <p:tgtEl>
+                                    <p:spTgt spid="2"/>
+                                  </p:tgtEl>
+                                </p:cBhvr>
+                              </p:animEffect>
+                            </p:childTnLst>
+                          </p:cTn>
+                        </p:par>
+                        <p:par>
+                          <p:cTn id="5" presetID="10" presetClass="entr" presetSubtype="0" fill="hold" nodeType="withEffect">
+                            <p:stCondLst>
+                              <p:cond delay="200"/>
+                            </p:stCondLst>
+                            <p:childTnLst>
+                              <p:animEffect transition="in" filter="fade">
+                                <p:cBhvr>
+                                  <p:cTn id="6" dur="450"/>
+                                  <p:tgtEl>
+                                    <p:spTgt spid="3"/>
+                                  </p:tgtEl>
+                                </p:cBhvr>
+                              </p:animEffect>
+                            </p:childTnLst>
+                          </p:cTn>
+                        </p:par>
+                        <p:par>
+                          <p:cTn id="7" presetID="10" presetClass="entr" presetSubtype="0" fill="hold" nodeType="withEffect">
+                            <p:stCondLst>
+                              <p:cond delay="200"/>
+                            </p:stCondLst>
+                            <p:childTnLst>
+                              <p:animEffect transition="in" filter="fade">
+                                <p:cBhvr>
+                                  <p:cTn id="8" dur="450"/>
+                                  <p:tgtEl>
+                                    <p:spTgt spid="4"/>
+                                  </p:tgtEl>
+                                </p:cBhvr>
+                              </p:animEffect>
+                            </p:childTnLst>
+                          </p:cTn>
+                        </p:par>
+                      </p:childTnLst>
+                    </p:cTn>
+                  </p:par>
+                </p:childTnLst>
+              </p:cTn>
+              <p:prevCondLst>
+                <p:cond evt="onPrev" delay="0">
+                  <p:tgtEl>
+                    <p:sldTgt/>
+                  </p:tgtEl>
+                </p:cond>
+              </p:prevCondLst>
+              <p:nextCondLst>
+                <p:cond evt="onNext" delay="0">
+                  <p:tgtEl>
+                    <p:sldTgt/>
+                  </p:tgtEl>
+                </p:cond>
+              </p:nextCondLst>
+            </p:seq>
+          </p:childTnLst>
+        </p:cTn>
+      </p:par>
+    </p:tnLst>
+  </p:timing>
 </p:sld>
 </file>
 
@@ -4009,6 +4189,96 @@
   <p:clrMapOvr>
     <a:masterClrMapping/>
   </p:clrMapOvr>
+  <p:timing>
+    <p:tnLst>
+      <p:par>
+        <p:cTn id="1" dur="indefinite" restart="never" nodeType="tmRoot">
+          <p:childTnLst>
+            <p:seq concurrent="true" nextAc="seek">
+              <p:cTn id="2" dur="indefinite" nodeType="mainSeq">
+                <p:childTnLst>
+                  <p:par>
+                    <p:cTn id="9" fill="hold">
+                      <p:stCondLst>
+                        <p:cond delay="0"/>
+                      </p:stCondLst>
+                      <p:childTnLst>
+                        <p:par>
+                          <p:cTn id="3" presetID="10" presetClass="entr" presetSubtype="0" fill="hold" nodeType="withEffect">
+                            <p:stCondLst>
+                              <p:cond delay="0"/>
+                            </p:stCondLst>
+                            <p:childTnLst>
+                              <p:animEffect transition="in" filter="fade">
+                                <p:cBhvr>
+                                  <p:cTn id="4" dur="450"/>
+                                  <p:tgtEl>
+                                    <p:spTgt spid="2"/>
+                                  </p:tgtEl>
+                                </p:cBhvr>
+                              </p:animEffect>
+                            </p:childTnLst>
+                          </p:cTn>
+                        </p:par>
+                        <p:par>
+                          <p:cTn id="5" presetID="10" presetClass="entr" presetSubtype="0" fill="hold" nodeType="withEffect">
+                            <p:stCondLst>
+                              <p:cond delay="200"/>
+                            </p:stCondLst>
+                            <p:childTnLst>
+                              <p:animEffect transition="in" filter="fade">
+                                <p:cBhvr>
+                                  <p:cTn id="6" dur="450"/>
+                                  <p:tgtEl>
+                                    <p:spTgt spid="3"/>
+                                  </p:tgtEl>
+                                </p:cBhvr>
+                              </p:animEffect>
+                            </p:childTnLst>
+                          </p:cTn>
+                        </p:par>
+                        <p:par>
+                          <p:cTn id="7" presetID="10" presetClass="entr" presetSubtype="0" fill="hold" nodeType="withEffect">
+                            <p:stCondLst>
+                              <p:cond delay="200"/>
+                            </p:stCondLst>
+                            <p:childTnLst>
+                              <p:animEffect transition="in" filter="fade">
+                                <p:cBhvr>
+                                  <p:cTn id="8" dur="450"/>
+                                  <p:tgtEl>
+                                    <p:spTgt spid="4"/>
+                                  </p:tgtEl>
+                                </p:cBhvr>
+                              </p:animEffect>
+                            </p:childTnLst>
+                          </p:cTn>
+                        </p:par>
+                      </p:childTnLst>
+                    </p:cTn>
+                  </p:par>
+                </p:childTnLst>
+              </p:cTn>
+              <p:prevCondLst>
+                <p:cond evt="onPrev" delay="0">
+                  <p:tgtEl>
+                    <p:sldTgt/>
+                  </p:tgtEl>
+                </p:cond>
+              </p:prevCondLst>
+              <p:nextCondLst>
+                <p:cond evt="onNext" delay="0">
+                  <p:tgtEl>
+                    <p:sldTgt/>
+                  </p:tgtEl>
+                </p:cond>
+              </p:nextCondLst>
+            </p:seq>
+          </p:childTnLst>
+        </p:cTn>
+      </p:par>
+    </p:tnLst>
+  </p:timing>
 </p:sld>
 </file>
 
@@ -4741,6 +5011,96 @@
   <p:clrMapOvr>
     <a:masterClrMapping/>
   </p:clrMapOvr>
+  <p:timing>
+    <p:tnLst>
+      <p:par>
+        <p:cTn id="1" dur="indefinite" restart="never" nodeType="tmRoot">
+          <p:childTnLst>
+            <p:seq concurrent="true" nextAc="seek">
+              <p:cTn id="2" dur="indefinite" nodeType="mainSeq">
+                <p:childTnLst>
+                  <p:par>
+                    <p:cTn id="9" fill="hold">
+                      <p:stCondLst>
+                        <p:cond delay="0"/>
+                      </p:stCondLst>
+                      <p:childTnLst>
+                        <p:par>
+                          <p:cTn id="3" presetID="10" presetClass="entr" presetSubtype="0" fill="hold" nodeType="withEffect">
+                            <p:stCondLst>
+                              <p:cond delay="0"/>
+                            </p:stCondLst>
+                            <p:childTnLst>
+                              <p:animEffect transition="in" filter="fade">
+                                <p:cBhvr>
+                                  <p:cTn id="4" dur="450"/>
+                                  <p:tgtEl>
+                                    <p:spTgt spid="2"/>
+                                  </p:tgtEl>
+                                </p:cBhvr>
+                              </p:animEffect>
+                            </p:childTnLst>
+                          </p:cTn>
+                        </p:par>
+                        <p:par>
+                          <p:cTn id="5" presetID="10" presetClass="entr" presetSubtype="0" fill="hold" nodeType="withEffect">
+                            <p:stCondLst>
+                              <p:cond delay="200"/>
+                            </p:stCondLst>
+                            <p:childTnLst>
+                              <p:animEffect transition="in" filter="fade">
+                                <p:cBhvr>
+                                  <p:cTn id="6" dur="450"/>
+                                  <p:tgtEl>
+                                    <p:spTgt spid="3"/>
+                                  </p:tgtEl>
+                                </p:cBhvr>
+                              </p:animEffect>
+                            </p:childTnLst>
+                          </p:cTn>
+                        </p:par>
+                        <p:par>
+                          <p:cTn id="7" presetID="10" presetClass="entr" presetSubtype="0" fill="hold" nodeType="withEffect">
+                            <p:stCondLst>
+                              <p:cond delay="200"/>
+                            </p:stCondLst>
+                            <p:childTnLst>
+                              <p:animEffect transition="in" filter="fade">
+                                <p:cBhvr>
+                                  <p:cTn id="8" dur="450"/>
+                                  <p:tgtEl>
+                                    <p:spTgt spid="4"/>
+                                  </p:tgtEl>
+                                </p:cBhvr>
+                              </p:animEffect>
+                            </p:childTnLst>
+                          </p:cTn>
+                        </p:par>
+                      </p:childTnLst>
+                    </p:cTn>
+                  </p:par>
+                </p:childTnLst>
+              </p:cTn>
+              <p:prevCondLst>
+                <p:cond evt="onPrev" delay="0">
+                  <p:tgtEl>
+                    <p:sldTgt/>
+                  </p:tgtEl>
+                </p:cond>
+              </p:prevCondLst>
+              <p:nextCondLst>
+                <p:cond evt="onNext" delay="0">
+                  <p:tgtEl>
+                    <p:sldTgt/>
+                  </p:tgtEl>
+                </p:cond>
+              </p:nextCondLst>
+            </p:seq>
+          </p:childTnLst>
+        </p:cTn>
+      </p:par>
+    </p:tnLst>
+  </p:timing>
 </p:sld>
 </file>
 
@@ -5157,6 +5517,96 @@
   <p:clrMapOvr>
     <a:masterClrMapping/>
   </p:clrMapOvr>
+  <p:timing>
+    <p:tnLst>
+      <p:par>
+        <p:cTn id="1" dur="indefinite" restart="never" nodeType="tmRoot">
+          <p:childTnLst>
+            <p:seq concurrent="true" nextAc="seek">
+              <p:cTn id="2" dur="indefinite" nodeType="mainSeq">
+                <p:childTnLst>
+                  <p:par>
+                    <p:cTn id="9" fill="hold">
+                      <p:stCondLst>
+                        <p:cond delay="0"/>
+                      </p:stCondLst>
+                      <p:childTnLst>
+                        <p:par>
+                          <p:cTn id="3" presetID="10" presetClass="entr" presetSubtype="0" fill="hold" nodeType="withEffect">
+                            <p:stCondLst>
+                              <p:cond delay="0"/>
+                            </p:stCondLst>
+                            <p:childTnLst>
+                              <p:animEffect transition="in" filter="fade">
+                                <p:cBhvr>
+                                  <p:cTn id="4" dur="450"/>
+                                  <p:tgtEl>
+                                    <p:spTgt spid="2"/>
+                                  </p:tgtEl>
+                                </p:cBhvr>
+                              </p:animEffect>
+                            </p:childTnLst>
+                          </p:cTn>
+                        </p:par>
+                        <p:par>
+                          <p:cTn id="5" presetID="10" presetClass="entr" presetSubtype="0" fill="hold" nodeType="withEffect">
+                            <p:stCondLst>
+                              <p:cond delay="200"/>
+                            </p:stCondLst>
+                            <p:childTnLst>
+                              <p:animEffect transition="in" filter="fade">
+                                <p:cBhvr>
+                                  <p:cTn id="6" dur="450"/>
+                                  <p:tgtEl>
+                                    <p:spTgt spid="3"/>
+                                  </p:tgtEl>
+                                </p:cBhvr>
+                              </p:animEffect>
+                            </p:childTnLst>
+                          </p:cTn>
+                        </p:par>
+                        <p:par>
+                          <p:cTn id="7" presetID="10" presetClass="entr" presetSubtype="0" fill="hold" nodeType="withEffect">
+                            <p:stCondLst>
+                              <p:cond delay="200"/>
+                            </p:stCondLst>
+                            <p:childTnLst>
+                              <p:animEffect transition="in" filter="fade">
+                                <p:cBhvr>
+                                  <p:cTn id="8" dur="450"/>
+                                  <p:tgtEl>
+                                    <p:spTgt spid="4"/>
+                                  </p:tgtEl>
+                                </p:cBhvr>
+                              </p:animEffect>
+                            </p:childTnLst>
+                          </p:cTn>
+                        </p:par>
+                      </p:childTnLst>
+                    </p:cTn>
+                  </p:par>
+                </p:childTnLst>
+              </p:cTn>
+              <p:prevCondLst>
+                <p:cond evt="onPrev" delay="0">
+                  <p:tgtEl>
+                    <p:sldTgt/>
+                  </p:tgtEl>
+                </p:cond>
+              </p:prevCondLst>
+              <p:nextCondLst>
+                <p:cond evt="onNext" delay="0">
+                  <p:tgtEl>
+                    <p:sldTgt/>
+                  </p:tgtEl>
+                </p:cond>
+              </p:nextCondLst>
+            </p:seq>
+          </p:childTnLst>
+        </p:cTn>
+      </p:par>
+    </p:tnLst>
+  </p:timing>
 </p:sld>
 </file>
 
@@ -5575,6 +6025,96 @@
   <p:clrMapOvr>
     <a:masterClrMapping/>
   </p:clrMapOvr>
+  <p:timing>
+    <p:tnLst>
+      <p:par>
+        <p:cTn id="1" dur="indefinite" restart="never" nodeType="tmRoot">
+          <p:childTnLst>
+            <p:seq concurrent="true" nextAc="seek">
+              <p:cTn id="2" dur="indefinite" nodeType="mainSeq">
+                <p:childTnLst>
+                  <p:par>
+                    <p:cTn id="9" fill="hold">
+                      <p:stCondLst>
+                        <p:cond delay="0"/>
+                      </p:stCondLst>
+                      <p:childTnLst>
+                        <p:par>
+                          <p:cTn id="3" presetID="10" presetClass="entr" presetSubtype="0" fill="hold" nodeType="withEffect">
+                            <p:stCondLst>
+                              <p:cond delay="0"/>
+                            </p:stCondLst>
+                            <p:childTnLst>
+                              <p:animEffect transition="in" filter="fade">
+                                <p:cBhvr>
+                                  <p:cTn id="4" dur="450"/>
+                                  <p:tgtEl>
+                                    <p:spTgt spid="2"/>
+                                  </p:tgtEl>
+                                </p:cBhvr>
+                              </p:animEffect>
+                            </p:childTnLst>
+                          </p:cTn>
+                        </p:par>
+                        <p:par>
+                          <p:cTn id="5" presetID="10" presetClass="entr" presetSubtype="0" fill="hold" nodeType="withEffect">
+                            <p:stCondLst>
+                              <p:cond delay="200"/>
+                            </p:stCondLst>
+                            <p:childTnLst>
+                              <p:animEffect transition="in" filter="fade">
+                                <p:cBhvr>
+                                  <p:cTn id="6" dur="450"/>
+                                  <p:tgtEl>
+                                    <p:spTgt spid="3"/>
+                                  </p:tgtEl>
+                                </p:cBhvr>
+                              </p:animEffect>
+                            </p:childTnLst>
+                          </p:cTn>
+                        </p:par>
+                        <p:par>
+                          <p:cTn id="7" presetID="10" presetClass="entr" presetSubtype="0" fill="hold" nodeType="withEffect">
+                            <p:stCondLst>
+                              <p:cond delay="200"/>
+                            </p:stCondLst>
+                            <p:childTnLst>
+                              <p:animEffect transition="in" filter="fade">
+                                <p:cBhvr>
+                                  <p:cTn id="8" dur="450"/>
+                                  <p:tgtEl>
+                                    <p:spTgt spid="4"/>
+                                  </p:tgtEl>
+                                </p:cBhvr>
+                              </p:animEffect>
+                            </p:childTnLst>
+                          </p:cTn>
+                        </p:par>
+                      </p:childTnLst>
+                    </p:cTn>
+                  </p:par>
+                </p:childTnLst>
+              </p:cTn>
+              <p:prevCondLst>
+                <p:cond evt="onPrev" delay="0">
+                  <p:tgtEl>
+                    <p:sldTgt/>
+                  </p:tgtEl>
+                </p:cond>
+              </p:prevCondLst>
+              <p:nextCondLst>
+                <p:cond evt="onNext" delay="0">
+                  <p:tgtEl>
+                    <p:sldTgt/>
+                  </p:tgtEl>
+                </p:cond>
+              </p:nextCondLst>
+            </p:seq>
+          </p:childTnLst>
+        </p:cTn>
+      </p:par>
+    </p:tnLst>
+  </p:timing>
 </p:sld>
 </file>
 
@@ -6577,6 +7117,96 @@
   <p:clrMapOvr>
     <a:masterClrMapping/>
   </p:clrMapOvr>
+  <p:timing>
+    <p:tnLst>
+      <p:par>
+        <p:cTn id="1" dur="indefinite" restart="never" nodeType="tmRoot">
+          <p:childTnLst>
+            <p:seq concurrent="true" nextAc="seek">
+              <p:cTn id="2" dur="indefinite" nodeType="mainSeq">
+                <p:childTnLst>
+                  <p:par>
+                    <p:cTn id="9" fill="hold">
+                      <p:stCondLst>
+                        <p:cond delay="0"/>
+                      </p:stCondLst>
+                      <p:childTnLst>
+                        <p:par>
+                          <p:cTn id="3" presetID="10" presetClass="entr" presetSubtype="0" fill="hold" nodeType="withEffect">
+                            <p:stCondLst>
+                              <p:cond delay="0"/>
+                            </p:stCondLst>
+                            <p:childTnLst>
+                              <p:animEffect transition="in" filter="fade">
+                                <p:cBhvr>
+                                  <p:cTn id="4" dur="450"/>
+                                  <p:tgtEl>
+                                    <p:spTgt spid="2"/>
+                                  </p:tgtEl>
+                                </p:cBhvr>
+                              </p:animEffect>
+                            </p:childTnLst>
+                          </p:cTn>
+                        </p:par>
+                        <p:par>
+                          <p:cTn id="5" presetID="10" presetClass="entr" presetSubtype="0" fill="hold" nodeType="withEffect">
+                            <p:stCondLst>
+                              <p:cond delay="200"/>
+                            </p:stCondLst>
+                            <p:childTnLst>
+                              <p:animEffect transition="in" filter="fade">
+                                <p:cBhvr>
+                                  <p:cTn id="6" dur="450"/>
+                                  <p:tgtEl>
+                                    <p:spTgt spid="3"/>
+                                  </p:tgtEl>
+                                </p:cBhvr>
+                              </p:animEffect>
+                            </p:childTnLst>
+                          </p:cTn>
+                        </p:par>
+                        <p:par>
+                          <p:cTn id="7" presetID="10" presetClass="entr" presetSubtype="0" fill="hold" nodeType="withEffect">
+                            <p:stCondLst>
+                              <p:cond delay="200"/>
+                            </p:stCondLst>
+                            <p:childTnLst>
+                              <p:animEffect transition="in" filter="fade">
+                                <p:cBhvr>
+                                  <p:cTn id="8" dur="450"/>
+                                  <p:tgtEl>
+                                    <p:spTgt spid="4"/>
+                                  </p:tgtEl>
+                                </p:cBhvr>
+                              </p:animEffect>
+                            </p:childTnLst>
+                          </p:cTn>
+                        </p:par>
+                      </p:childTnLst>
+                    </p:cTn>
+                  </p:par>
+                </p:childTnLst>
+              </p:cTn>
+              <p:prevCondLst>
+                <p:cond evt="onPrev" delay="0">
+                  <p:tgtEl>
+                    <p:sldTgt/>
+                  </p:tgtEl>
+                </p:cond>
+              </p:prevCondLst>
+              <p:nextCondLst>
+                <p:cond evt="onNext" delay="0">
+                  <p:tgtEl>
+                    <p:sldTgt/>
+                  </p:tgtEl>
+                </p:cond>
+              </p:nextCondLst>
+            </p:seq>
+          </p:childTnLst>
+        </p:cTn>
+      </p:par>
+    </p:tnLst>
+  </p:timing>
 </p:sld>
 </file>
 
@@ -7039,6 +7669,96 @@
   <p:clrMapOvr>
     <a:masterClrMapping/>
   </p:clrMapOvr>
+  <p:timing>
+    <p:tnLst>
+      <p:par>
+        <p:cTn id="1" dur="indefinite" restart="never" nodeType="tmRoot">
+          <p:childTnLst>
+            <p:seq concurrent="true" nextAc="seek">
+              <p:cTn id="2" dur="indefinite" nodeType="mainSeq">
+                <p:childTnLst>
+                  <p:par>
+                    <p:cTn id="9" fill="hold">
+                      <p:stCondLst>
+                        <p:cond delay="0"/>
+                      </p:stCondLst>
+                      <p:childTnLst>
+                        <p:par>
+                          <p:cTn id="3" presetID="10" presetClass="entr" presetSubtype="0" fill="hold" nodeType="withEffect">
+                            <p:stCondLst>
+                              <p:cond delay="0"/>
+                            </p:stCondLst>
+                            <p:childTnLst>
+                              <p:animEffect transition="in" filter="fade">
+                                <p:cBhvr>
+                                  <p:cTn id="4" dur="450"/>
+                                  <p:tgtEl>
+                                    <p:spTgt spid="2"/>
+                                  </p:tgtEl>
+                                </p:cBhvr>
+                              </p:animEffect>
+                            </p:childTnLst>
+                          </p:cTn>
+                        </p:par>
+                        <p:par>
+                          <p:cTn id="5" presetID="10" presetClass="entr" presetSubtype="0" fill="hold" nodeType="withEffect">
+                            <p:stCondLst>
+                              <p:cond delay="200"/>
+                            </p:stCondLst>
+                            <p:childTnLst>
+                              <p:animEffect transition="in" filter="fade">
+                                <p:cBhvr>
+                                  <p:cTn id="6" dur="450"/>
+                                  <p:tgtEl>
+                                    <p:spTgt spid="3"/>
+                                  </p:tgtEl>
+                                </p:cBhvr>
+                              </p:animEffect>
+                            </p:childTnLst>
+                          </p:cTn>
+                        </p:par>
+                        <p:par>
+                          <p:cTn id="7" presetID="10" presetClass="entr" presetSubtype="0" fill="hold" nodeType="withEffect">
+                            <p:stCondLst>
+                              <p:cond delay="200"/>
+                            </p:stCondLst>
+                            <p:childTnLst>
+                              <p:animEffect transition="in" filter="fade">
+                                <p:cBhvr>
+                                  <p:cTn id="8" dur="450"/>
+                                  <p:tgtEl>
+                                    <p:spTgt spid="4"/>
+                                  </p:tgtEl>
+                                </p:cBhvr>
+                              </p:animEffect>
+                            </p:childTnLst>
+                          </p:cTn>
+                        </p:par>
+                      </p:childTnLst>
+                    </p:cTn>
+                  </p:par>
+                </p:childTnLst>
+              </p:cTn>
+              <p:prevCondLst>
+                <p:cond evt="onPrev" delay="0">
+                  <p:tgtEl>
+                    <p:sldTgt/>
+                  </p:tgtEl>
+                </p:cond>
+              </p:prevCondLst>
+              <p:nextCondLst>
+                <p:cond evt="onNext" delay="0">
+                  <p:tgtEl>
+                    <p:sldTgt/>
+                  </p:tgtEl>
+                </p:cond>
+              </p:nextCondLst>
+            </p:seq>
+          </p:childTnLst>
+        </p:cTn>
+      </p:par>
+    </p:tnLst>
+  </p:timing>
 </p:sld>
 </file>
 
@@ -7501,6 +8221,96 @@
   <p:clrMapOvr>
     <a:masterClrMapping/>
   </p:clrMapOvr>
+  <p:timing>
+    <p:tnLst>
+      <p:par>
+        <p:cTn id="1" dur="indefinite" restart="never" nodeType="tmRoot">
+          <p:childTnLst>
+            <p:seq concurrent="true" nextAc="seek">
+              <p:cTn id="2" dur="indefinite" nodeType="mainSeq">
+                <p:childTnLst>
+                  <p:par>
+                    <p:cTn id="9" fill="hold">
+                      <p:stCondLst>
+                        <p:cond delay="0"/>
+                      </p:stCondLst>
+                      <p:childTnLst>
+                        <p:par>
+                          <p:cTn id="3" presetID="10" presetClass="entr" presetSubtype="0" fill="hold" nodeType="withEffect">
+                            <p:stCondLst>
+                              <p:cond delay="0"/>
+                            </p:stCondLst>
+                            <p:childTnLst>
+                              <p:animEffect transition="in" filter="fade">
+                                <p:cBhvr>
+                                  <p:cTn id="4" dur="450"/>
+                                  <p:tgtEl>
+                                    <p:spTgt spid="2"/>
+                                  </p:tgtEl>
+                                </p:cBhvr>
+                              </p:animEffect>
+                            </p:childTnLst>
+                          </p:cTn>
+                        </p:par>
+                        <p:par>
+                          <p:cTn id="5" presetID="10" presetClass="entr" presetSubtype="0" fill="hold" nodeType="withEffect">
+                            <p:stCondLst>
+                              <p:cond delay="200"/>
+                            </p:stCondLst>
+                            <p:childTnLst>
+                              <p:animEffect transition="in" filter="fade">
+                                <p:cBhvr>
+                                  <p:cTn id="6" dur="450"/>
+                                  <p:tgtEl>
+                                    <p:spTgt spid="3"/>
+                                  </p:tgtEl>
+                                </p:cBhvr>
+                              </p:animEffect>
+                            </p:childTnLst>
+                          </p:cTn>
+                        </p:par>
+                        <p:par>
+                          <p:cTn id="7" presetID="10" presetClass="entr" presetSubtype="0" fill="hold" nodeType="withEffect">
+                            <p:stCondLst>
+                              <p:cond delay="200"/>
+                            </p:stCondLst>
+                            <p:childTnLst>
+                              <p:animEffect transition="in" filter="fade">
+                                <p:cBhvr>
+                                  <p:cTn id="8" dur="450"/>
+                                  <p:tgtEl>
+                                    <p:spTgt spid="4"/>
+                                  </p:tgtEl>
+                                </p:cBhvr>
+                              </p:animEffect>
+                            </p:childTnLst>
+                          </p:cTn>
+                        </p:par>
+                      </p:childTnLst>
+                    </p:cTn>
+                  </p:par>
+                </p:childTnLst>
+              </p:cTn>
+              <p:prevCondLst>
+                <p:cond evt="onPrev" delay="0">
+                  <p:tgtEl>
+                    <p:sldTgt/>
+                  </p:tgtEl>
+                </p:cond>
+              </p:prevCondLst>
+              <p:nextCondLst>
+                <p:cond evt="onNext" delay="0">
+                  <p:tgtEl>
+                    <p:sldTgt/>
+                  </p:tgtEl>
+                </p:cond>
+              </p:nextCondLst>
+            </p:seq>
+          </p:childTnLst>
+        </p:cTn>
+      </p:par>
+    </p:tnLst>
+  </p:timing>
 </p:sld>
 </file>
 
@@ -8098,6 +8908,96 @@
   <p:clrMapOvr>
     <a:masterClrMapping/>
   </p:clrMapOvr>
+  <p:timing>
+    <p:tnLst>
+      <p:par>
+        <p:cTn id="1" dur="indefinite" restart="never" nodeType="tmRoot">
+          <p:childTnLst>
+            <p:seq concurrent="true" nextAc="seek">
+              <p:cTn id="2" dur="indefinite" nodeType="mainSeq">
+                <p:childTnLst>
+                  <p:par>
+                    <p:cTn id="9" fill="hold">
+                      <p:stCondLst>
+                        <p:cond delay="0"/>
+                      </p:stCondLst>
+                      <p:childTnLst>
+                        <p:par>
+                          <p:cTn id="3" presetID="10" presetClass="entr" presetSubtype="0" fill="hold" nodeType="withEffect">
+                            <p:stCondLst>
+                              <p:cond delay="0"/>
+                            </p:stCondLst>
+                            <p:childTnLst>
+                              <p:animEffect transition="in" filter="fade">
+                                <p:cBhvr>
+                                  <p:cTn id="4" dur="450"/>
+                                  <p:tgtEl>
+                                    <p:spTgt spid="2"/>
+                                  </p:tgtEl>
+                                </p:cBhvr>
+                              </p:animEffect>
+                            </p:childTnLst>
+                          </p:cTn>
+                        </p:par>
+                        <p:par>
+                          <p:cTn id="5" presetID="10" presetClass="entr" presetSubtype="0" fill="hold" nodeType="withEffect">
+                            <p:stCondLst>
+                              <p:cond delay="200"/>
+                            </p:stCondLst>
+                            <p:childTnLst>
+                              <p:animEffect transition="in" filter="fade">
+                                <p:cBhvr>
+                                  <p:cTn id="6" dur="450"/>
+                                  <p:tgtEl>
+                                    <p:spTgt spid="3"/>
+                                  </p:tgtEl>
+                                </p:cBhvr>
+                              </p:animEffect>
+                            </p:childTnLst>
+                          </p:cTn>
+                        </p:par>
+                        <p:par>
+                          <p:cTn id="7" presetID="10" presetClass="entr" presetSubtype="0" fill="hold" nodeType="withEffect">
+                            <p:stCondLst>
+                              <p:cond delay="200"/>
+                            </p:stCondLst>
+                            <p:childTnLst>
+                              <p:animEffect transition="in" filter="fade">
+                                <p:cBhvr>
+                                  <p:cTn id="8" dur="450"/>
+                                  <p:tgtEl>
+                                    <p:spTgt spid="4"/>
+                                  </p:tgtEl>
+                                </p:cBhvr>
+                              </p:animEffect>
+                            </p:childTnLst>
+                          </p:cTn>
+                        </p:par>
+                      </p:childTnLst>
+                    </p:cTn>
+                  </p:par>
+                </p:childTnLst>
+              </p:cTn>
+              <p:prevCondLst>
+                <p:cond evt="onPrev" delay="0">
+                  <p:tgtEl>
+                    <p:sldTgt/>
+                  </p:tgtEl>
+                </p:cond>
+              </p:prevCondLst>
+              <p:nextCondLst>
+                <p:cond evt="onNext" delay="0">
+                  <p:tgtEl>
+                    <p:sldTgt/>
+                  </p:tgtEl>
+                </p:cond>
+              </p:nextCondLst>
+            </p:seq>
+          </p:childTnLst>
+        </p:cTn>
+      </p:par>
+    </p:tnLst>
+  </p:timing>
 </p:sld>
 </file>
 
